--- a/courses/ai-native/sessions/s07.pptx
+++ b/courses/ai-native/sessions/s07.pptx
@@ -716,7 +716,7 @@
             <a:pPr lvl="0"/>
             <a:r>
               <a:rPr lang="ko-KR" sz="1200"/>
-              <a:t>주문한다의 루프에서 환경의 결과는 수용 테스트 4개의 출력과 의존 규칙 검사다. 센서의 구성은 "세션 09. 검증 하네스·결과 점검·피드백"이 맡는다.</a:t>
+              <a:t>"주문한다"의 루프에서 환경의 결과는 수용 테스트 4개의 출력과 의존 규칙 검사다. 센서의 구성은 "세션 09. 검증 하네스·결과 점검·피드백"이 맡는다.</a:t>
             </a:r>
           </a:p>
         </p:txBody>
@@ -1023,7 +1023,7 @@
             <a:pPr lvl="0"/>
             <a:r>
               <a:rPr lang="ko-KR" sz="1200"/>
-              <a:t>여러 에이전트가 값을 하는 코딩 과제의 예 — 서로 다른 저장소나 독립된 모듈을 동시에 고치는 일이다. 주문한다는 그 조건이 아니다.</a:t>
+              <a:t>여러 에이전트가 값을 하는 코딩 과제의 예 — 서로 다른 저장소나 독립된 모듈을 동시에 고치는 일이다. "주문한다"는 그 조건이 아니다.</a:t>
             </a:r>
           </a:p>
         </p:txBody>
@@ -1173,7 +1173,7 @@
             <a:pPr lvl="0"/>
             <a:r>
               <a:rPr lang="ko-KR" sz="1200"/>
-              <a:t>주문한다의 세 계기 — 같은 테스트 3회 연속 실패, 원격 저장소 반영, 명세에 없는 업무 규칙이다.</a:t>
+              <a:t>"주문한다"의 세 계기 — 같은 테스트 3회 연속 실패, 원격 저장소 반영, 명세에 없는 업무 규칙이다.</a:t>
             </a:r>
           </a:p>
         </p:txBody>
@@ -2120,7 +2120,7 @@
             <a:pPr lvl="0"/>
             <a:r>
               <a:rPr lang="ko-KR" sz="1200"/>
-              <a:t>라우팅은 들어오는 요청의 종류가 여럿일 때 값을 한다. 주문한다는 과제가 하나여서 쓰지 않는다(「주문한다의 패턴」).</a:t>
+              <a:t>라우팅은 들어오는 요청의 종류가 여럿일 때 값을 한다. "주문한다"는 과제가 하나여서 쓰지 않는다(「주문한다의 패턴」).</a:t>
             </a:r>
           </a:p>
         </p:txBody>
@@ -2195,7 +2195,7 @@
             <a:pPr lvl="0"/>
             <a:r>
               <a:rPr lang="ko-KR" sz="1200"/>
-              <a:t>수강생에게 묻는다 — 주문한다의 작업 단위 4개를 병렬로 돌리면 무엇이 충돌하는가? 같은 클래스의 같은 메서드다.</a:t>
+              <a:t>수강생에게 묻는다 — "주문한다"의 작업 단위 4개를 병렬로 돌리면 무엇이 충돌하는가? 같은 클래스의 같은 메서드다.</a:t>
             </a:r>
           </a:p>
         </p:txBody>
@@ -6763,7 +6763,7 @@
                 <a:latin typeface="맑은 고딕"/>
                 <a:ea typeface="맑은 고딕"/>
               </a:rPr>
-              <a:t>주문한다는 </a:t>
+              <a:t>"주문한다"는 </a:t>
             </a:r>
             <a:r>
               <a:rPr sz="1800" b="1">
@@ -6897,7 +6897,7 @@
                 <a:latin typeface="맑은 고딕"/>
                 <a:ea typeface="맑은 고딕"/>
               </a:rPr>
-              <a:t>주문한다의 패턴 선택</a:t>
+              <a:t>"주문한다"의 패턴 선택</a:t>
             </a:r>
           </a:p>
         </p:txBody>
@@ -8706,7 +8706,7 @@
                 <a:latin typeface="맑은 고딕"/>
                 <a:ea typeface="맑은 고딕"/>
               </a:rPr>
-              <a:t>주문한다에는 쓰지 않는다</a:t>
+              <a:t>"주문한다"에는 쓰지 않는다</a:t>
             </a:r>
             <a:r>
               <a:rPr sz="1800" b="0">
@@ -10211,7 +10211,7 @@
                           <a:ea typeface="맑은 고딕" panose="020B0503020000020004" pitchFamily="34" charset="-127"/>
                           <a:cs typeface="맑은 고딕"/>
                         </a:rPr>
-                        <a:t>주문한다에서</a:t>
+                        <a:t>"주문한다"에서</a:t>
                       </a:r>
                     </a:p>
                   </a:txBody>
@@ -11097,7 +11097,7 @@
                 <a:latin typeface="맑은 고딕"/>
                 <a:ea typeface="맑은 고딕"/>
               </a:rPr>
-              <a:t>세 가지 비용과 주문한다의 판단</a:t>
+              <a:t>세 가지 비용과 "주문한다"의 판단</a:t>
             </a:r>
           </a:p>
         </p:txBody>
@@ -15991,7 +15991,7 @@
                 <a:latin typeface="맑은 고딕"/>
                 <a:ea typeface="맑은 고딕"/>
               </a:rPr>
-              <a:t>주문한다의 단계별 개입</a:t>
+              <a:t>"주문한다"의 단계별 개입</a:t>
             </a:r>
           </a:p>
         </p:txBody>
@@ -16678,7 +16678,7 @@
                 <a:latin typeface="맑은 고딕"/>
                 <a:ea typeface="맑은 고딕"/>
               </a:rPr>
-              <a:t>주문한다의 실행 흐름을 </a:t>
+              <a:t>"주문한다"의 실행 흐름을 </a:t>
             </a:r>
             <a:r>
               <a:rPr sz="1800" b="1">
@@ -16948,7 +16948,7 @@
                 <a:latin typeface="맑은 고딕"/>
                 <a:ea typeface="맑은 고딕"/>
               </a:rPr>
-              <a:t>주문한다의 흐름에는 사람의 자리가 </a:t>
+              <a:t>"주문한다"의 흐름에는 사람의 자리가 </a:t>
             </a:r>
             <a:r>
               <a:rPr sz="1800" b="1">
@@ -22607,7 +22607,7 @@
                 <a:latin typeface="맑은 고딕"/>
                 <a:ea typeface="맑은 고딕"/>
               </a:rPr>
-              <a:t>신청한다의 실행 흐름</a:t>
+              <a:t>"신청한다"의 실행 흐름</a:t>
             </a:r>
             <a:r>
               <a:rPr sz="1600" b="0">
@@ -23228,7 +23228,7 @@
                 <a:latin typeface="맑은 고딕"/>
                 <a:ea typeface="맑은 고딕"/>
               </a:rPr>
-              <a:t> 신청한다의 실행 흐름과 확인 지점. 실습 8의 입력이 됩니다.</a:t>
+              <a:t> "신청한다"의 실행 흐름과 확인 지점. 실습 8의 입력이 됩니다.</a:t>
             </a:r>
           </a:p>
         </p:txBody>
@@ -23712,7 +23712,7 @@
                 <a:latin typeface="맑은 고딕"/>
                 <a:ea typeface="맑은 고딕"/>
               </a:rPr>
-              <a:t> 흐름 안의 판단 자리다. 주문한다는 계획·결제 관련 변경·병합 셋이다</a:t>
+              <a:t> 흐름 안의 판단 자리다. "주문한다"는 계획·결제 관련 변경·병합 셋이다</a:t>
             </a:r>
           </a:p>
           <a:p>
@@ -24104,7 +24104,7 @@
                 <a:latin typeface="맑은 고딕"/>
                 <a:ea typeface="맑은 고딕"/>
               </a:rPr>
-              <a:t>신청한다의 흐름은 </a:t>
+              <a:t>"신청한다"의 흐름은 </a:t>
             </a:r>
             <a:r>
               <a:rPr sz="1400" b="1">

--- a/courses/ai-native/sessions/s07.pptx
+++ b/courses/ai-native/sessions/s07.pptx
@@ -703,6 +703,13 @@
             <a:r>
               <a:rPr lang="ko-KR" sz="1200"/>
               <a:t>인용 근거: [Anthropic 2024] 원문 확인. 원문은 도구 호출 결과나 코드 실행을 ground truth의 예로 든다.</a:t>
+            </a:r>
+          </a:p>
+          <a:p>
+            <a:pPr lvl="0"/>
+            <a:r>
+              <a:rPr lang="ko-KR" sz="1200"/>
+              <a:t>종료 조건과 멈출 조건은 "세션 06. 작업 위임과 도구·권한·상태의 경계"의 「07. 위임 계약」에서 정한 것이다. 본문은 그 둘이 루프의 어디에서 끝을 내는지만 말한다.</a:t>
             </a:r>
           </a:p>
           <a:p>
@@ -7251,7 +7258,7 @@
         <p:spPr>
           <a:xfrm>
             <a:off x="365760" y="960120"/>
-            <a:ext cx="8412480" cy="2788920"/>
+            <a:ext cx="8412480" cy="3011978"/>
           </a:xfrm>
         </p:spPr>
         <p:txBody>
@@ -7393,7 +7400,7 @@
                 <a:latin typeface="맑은 고딕"/>
                 <a:ea typeface="맑은 고딕"/>
               </a:rPr>
-              <a:t> 실패한 테스트의 메시지가 다음 수정의 입력이다. 센서가 없으면 루프는 자기 짐작으로 돈다.</a:t>
+              <a:t> 과제로 시작한 루프에서 실패한 테스트의 메시지가 다음 수정의 입력이다. 센서가 없으면 자기 짐작으로 돈다.</a:t>
             </a:r>
           </a:p>
           <a:p>
@@ -7436,7 +7443,7 @@
                 <a:latin typeface="맑은 고딕"/>
                 <a:ea typeface="맑은 고딕"/>
               </a:rPr>
-              <a:t> 종료 조건은 완료의 정의이고, 멈출 조건은 사람이 정할 결정이다. 둘 다 "세션 06. 작업 위임과 도구·권한·상태의 경계"의 「07. 위임 계약」에서 정했다.</a:t>
+              <a:t> 종료 조건은 완료의 정의이고, 멈출 조건은 사람이 정할 결정이다.</a:t>
             </a:r>
           </a:p>
           <a:p>
@@ -7479,7 +7486,7 @@
                 <a:latin typeface="맑은 고딕"/>
                 <a:ea typeface="맑은 고딕"/>
               </a:rPr>
-              <a:t> 그래서 판단할 자리를 흐름에 미리 두어야 한다</a:t>
+              <a:t> 판단할 자리를 흐름에 미리 두어야 한다</a:t>
             </a:r>
             <a:r>
               <a:rPr sz="1200" b="0">
@@ -7518,7 +7525,7 @@
         </p:nvSpPr>
         <p:spPr>
           <a:xfrm>
-            <a:off x="365760" y="4548170"/>
+            <a:off x="365760" y="4273850"/>
             <a:ext cx="8412480" cy="201168"/>
           </a:xfrm>
           <a:prstGeom prst="rect">
@@ -7562,8 +7569,8 @@
         </p:blipFill>
         <p:spPr>
           <a:xfrm>
-            <a:off x="1460500" y="4785914"/>
-            <a:ext cx="6223000" cy="928688"/>
+            <a:off x="1187590" y="4511594"/>
+            <a:ext cx="6768819" cy="1864879"/>
           </a:xfrm>
           <a:prstGeom prst="rect">
             <a:avLst/>
@@ -9233,8 +9240,8 @@
         </p:blipFill>
         <p:spPr>
           <a:xfrm>
-            <a:off x="1460500" y="4597492"/>
-            <a:ext cx="6223000" cy="1420813"/>
+            <a:off x="1580133" y="4597492"/>
+            <a:ext cx="5983734" cy="1366184"/>
           </a:xfrm>
           <a:prstGeom prst="rect">
             <a:avLst/>
@@ -9859,8 +9866,8 @@
         </p:blipFill>
         <p:spPr>
           <a:xfrm>
-            <a:off x="1460500" y="5186311"/>
-            <a:ext cx="6223000" cy="587375"/>
+            <a:off x="1363266" y="5186311"/>
+            <a:ext cx="6417469" cy="605730"/>
           </a:xfrm>
           <a:prstGeom prst="rect">
             <a:avLst/>
@@ -23583,7 +23590,7 @@
                 <a:latin typeface="맑은 고딕"/>
                 <a:ea typeface="맑은 고딕"/>
               </a:rPr>
-              <a:t> 다섯 패턴을 네 질문으로 고르고, 가장 단순한 것부터 쓴다</a:t>
+              <a:t> 다섯을 네 질문으로 고르고 단순한 것부터 쓴다</a:t>
             </a:r>
           </a:p>
           <a:p>
@@ -23755,7 +23762,7 @@
                 <a:latin typeface="맑은 고딕"/>
                 <a:ea typeface="맑은 고딕"/>
               </a:rPr>
-              <a:t> 많으면 읽지 않고 누른다. 판정은 센서로, 사람은 판단만 한다</a:t>
+              <a:t> 많으면 읽지 않고 누른다. 판정은 센서가 한다</a:t>
             </a:r>
           </a:p>
           <a:p>
@@ -25582,7 +25589,7 @@
         <p:spPr>
           <a:xfrm>
             <a:off x="365760" y="960120"/>
-            <a:ext cx="8412480" cy="2788920"/>
+            <a:ext cx="8412480" cy="2225040"/>
           </a:xfrm>
         </p:spPr>
         <p:txBody>
@@ -25820,8 +25827,8 @@
         </p:blipFill>
         <p:spPr>
           <a:xfrm>
-            <a:off x="1460500" y="3724656"/>
-            <a:ext cx="6223000" cy="1190625"/>
+            <a:off x="871327" y="3724656"/>
+            <a:ext cx="7401347" cy="2530052"/>
           </a:xfrm>
           <a:prstGeom prst="rect">
             <a:avLst/>
@@ -26340,8 +26347,8 @@
         </p:blipFill>
         <p:spPr>
           <a:xfrm>
-            <a:off x="1460500" y="4709714"/>
-            <a:ext cx="6223000" cy="1016000"/>
+            <a:off x="1661220" y="4709714"/>
+            <a:ext cx="5821561" cy="950459"/>
           </a:xfrm>
           <a:prstGeom prst="rect">
             <a:avLst/>
@@ -26860,8 +26867,8 @@
         </p:blipFill>
         <p:spPr>
           <a:xfrm>
-            <a:off x="2114550" y="3612434"/>
-            <a:ext cx="4914900" cy="2500313"/>
+            <a:off x="2116894" y="3612434"/>
+            <a:ext cx="4910212" cy="2497928"/>
           </a:xfrm>
           <a:prstGeom prst="rect">
             <a:avLst/>
@@ -27092,7 +27099,7 @@
         <p:spPr>
           <a:xfrm>
             <a:off x="365760" y="960120"/>
-            <a:ext cx="8412480" cy="2437015"/>
+            <a:ext cx="8412480" cy="2514600"/>
           </a:xfrm>
         </p:spPr>
         <p:txBody>
@@ -27305,69 +27312,6 @@
                 <a:ea typeface="맑은 고딕"/>
               </a:rPr>
               <a:t>[Anthropic 2024]</a:t>
-            </a:r>
-          </a:p>
-          <a:p>
-            <a:pPr lvl="2" marL="723900" indent="-368300">
-              <a:spcBef>
-                <a:spcPts val="600"/>
-              </a:spcBef>
-              <a:spcAft>
-                <a:spcPts val="600"/>
-              </a:spcAft>
-              <a:buSzPct val="90000"/>
-              <a:buFont typeface="Wingdings" pitchFamily="2" charset="2"/>
-              <a:buChar char=""/>
-            </a:pPr>
-            <a:r>
-              <a:rPr sz="1800" b="1">
-                <a:solidFill>
-                  <a:srgbClr val="000000"/>
-                </a:solidFill>
-                <a:latin typeface="맑은 고딕"/>
-                <a:ea typeface="맑은 고딕"/>
-              </a:rPr>
-              <a:t>쪼갠 일은 독립이어야 한다</a:t>
-            </a:r>
-            <a:r>
-              <a:rPr sz="1800" b="0">
-                <a:solidFill>
-                  <a:srgbClr val="000000"/>
-                </a:solidFill>
-                <a:latin typeface="맑은 고딕"/>
-                <a:ea typeface="맑은 고딕"/>
-              </a:rPr>
-              <a:t> —</a:t>
-            </a:r>
-            <a:r>
-              <a:rPr sz="1600" b="0">
-                <a:solidFill>
-                  <a:srgbClr val="000000"/>
-                </a:solidFill>
-                <a:latin typeface="맑은 고딕"/>
-                <a:ea typeface="맑은 고딕"/>
-              </a:rPr>
-              <a:t> 같은 파일을 고치는 하위 과제는 병렬이 아니라 </a:t>
-            </a:r>
-            <a:r>
-              <a:rPr sz="1600" b="1">
-                <a:solidFill>
-                  <a:srgbClr val="000000"/>
-                </a:solidFill>
-                <a:latin typeface="맑은 고딕"/>
-                <a:ea typeface="맑은 고딕"/>
-              </a:rPr>
-              <a:t>순서</a:t>
-            </a:r>
-            <a:r>
-              <a:rPr sz="1600" b="0">
-                <a:solidFill>
-                  <a:srgbClr val="000000"/>
-                </a:solidFill>
-                <a:latin typeface="맑은 고딕"/>
-                <a:ea typeface="맑은 고딕"/>
-              </a:rPr>
-              <a:t>다.</a:t>
             </a:r>
           </a:p>
         </p:txBody>
@@ -27386,7 +27330,7 @@
         </p:nvSpPr>
         <p:spPr>
           <a:xfrm>
-            <a:off x="365760" y="3698887"/>
+            <a:off x="365760" y="3074047"/>
             <a:ext cx="8412480" cy="201168"/>
           </a:xfrm>
           <a:prstGeom prst="rect">
@@ -27430,8 +27374,8 @@
         </p:blipFill>
         <p:spPr>
           <a:xfrm>
-            <a:off x="1460500" y="3936631"/>
-            <a:ext cx="6223000" cy="2436813"/>
+            <a:off x="1298575" y="3311791"/>
+            <a:ext cx="6546850" cy="2563626"/>
           </a:xfrm>
           <a:prstGeom prst="rect">
             <a:avLst/>
@@ -27666,6 +27610,69 @@
           </a:bodyPr>
           <a:lstStyle/>
           <a:p>
+            <a:pPr lvl="2" marL="723900" indent="-368300">
+              <a:spcBef>
+                <a:spcPts val="600"/>
+              </a:spcBef>
+              <a:spcAft>
+                <a:spcPts val="600"/>
+              </a:spcAft>
+              <a:buSzPct val="90000"/>
+              <a:buFont typeface="Wingdings" pitchFamily="2" charset="2"/>
+              <a:buChar char=""/>
+            </a:pPr>
+            <a:r>
+              <a:rPr sz="1800" b="1">
+                <a:solidFill>
+                  <a:srgbClr val="000000"/>
+                </a:solidFill>
+                <a:latin typeface="맑은 고딕"/>
+                <a:ea typeface="맑은 고딕"/>
+              </a:rPr>
+              <a:t>쪼갠 일은 독립이어야 한다</a:t>
+            </a:r>
+            <a:r>
+              <a:rPr sz="1800" b="0">
+                <a:solidFill>
+                  <a:srgbClr val="000000"/>
+                </a:solidFill>
+                <a:latin typeface="맑은 고딕"/>
+                <a:ea typeface="맑은 고딕"/>
+              </a:rPr>
+              <a:t> —</a:t>
+            </a:r>
+            <a:r>
+              <a:rPr sz="1600" b="0">
+                <a:solidFill>
+                  <a:srgbClr val="000000"/>
+                </a:solidFill>
+                <a:latin typeface="맑은 고딕"/>
+                <a:ea typeface="맑은 고딕"/>
+              </a:rPr>
+              <a:t> 같은 파일을 고치는 하위 과제는 병렬이 아니라 </a:t>
+            </a:r>
+            <a:r>
+              <a:rPr sz="1600" b="1">
+                <a:solidFill>
+                  <a:srgbClr val="000000"/>
+                </a:solidFill>
+                <a:latin typeface="맑은 고딕"/>
+                <a:ea typeface="맑은 고딕"/>
+              </a:rPr>
+              <a:t>순서</a:t>
+            </a:r>
+            <a:r>
+              <a:rPr sz="1600" b="0">
+                <a:solidFill>
+                  <a:srgbClr val="000000"/>
+                </a:solidFill>
+                <a:latin typeface="맑은 고딕"/>
+                <a:ea typeface="맑은 고딕"/>
+              </a:rPr>
+              <a:t>다.</a:t>
+            </a:r>
+          </a:p>
+          <a:p>
             <a:pPr lvl="3" marL="1077913" indent="-354013">
               <a:spcBef>
                 <a:spcPts val="600"/>
@@ -28368,8 +28375,8 @@
         </p:blipFill>
         <p:spPr>
           <a:xfrm>
-            <a:off x="1460500" y="4161074"/>
-            <a:ext cx="6223000" cy="1571625"/>
+            <a:off x="1418034" y="4161074"/>
+            <a:ext cx="6307931" cy="1593074"/>
           </a:xfrm>
           <a:prstGeom prst="rect">
             <a:avLst/>
@@ -28908,8 +28915,8 @@
         </p:blipFill>
         <p:spPr>
           <a:xfrm>
-            <a:off x="1531938" y="3886754"/>
-            <a:ext cx="6080125" cy="1412875"/>
+            <a:off x="1532558" y="3886754"/>
+            <a:ext cx="6078885" cy="1412587"/>
           </a:xfrm>
           <a:prstGeom prst="rect">
             <a:avLst/>

--- a/courses/ai-native/sessions/s07.pptx
+++ b/courses/ai-native/sessions/s07.pptx
@@ -8331,7 +8331,7 @@
                 <a:latin typeface="맑은 고딕"/>
                 <a:ea typeface="맑은 고딕"/>
               </a:rPr>
-              <a:t>"고정된 프롬프트를 </a:t>
+              <a:t>고정된 프롬프트를 </a:t>
             </a:r>
             <a:r>
               <a:rPr sz="1800" b="1">
@@ -8351,7 +8351,7 @@
                 <a:latin typeface="맑은 고딕"/>
                 <a:ea typeface="맑은 고딕"/>
               </a:rPr>
-              <a:t>로 에이전트에 먹인다"</a:t>
+              <a:t>로 에이전트에 먹인다</a:t>
             </a:r>
             <a:r>
               <a:rPr sz="1000" b="0">
@@ -8371,27 +8371,7 @@
                 <a:latin typeface="맑은 고딕"/>
                 <a:ea typeface="맑은 고딕"/>
               </a:rPr>
-              <a:t>"a fixed prompt is fed to an agent in an infinite loop"</a:t>
-            </a:r>
-            <a:r>
-              <a:rPr sz="1000" b="0">
-                <a:solidFill>
-                  <a:srgbClr val="000000"/>
-                </a:solidFill>
-                <a:latin typeface="맑은 고딕"/>
-                <a:ea typeface="맑은 고딕"/>
-              </a:rPr>
-              <a:t>, </a:t>
-            </a:r>
-            <a:r>
-              <a:rPr sz="1000" b="0">
-                <a:solidFill>
-                  <a:srgbClr val="000000"/>
-                </a:solidFill>
-                <a:latin typeface="맑은 고딕"/>
-                <a:ea typeface="맑은 고딕"/>
-              </a:rPr>
-              <a:t>[Thoughtworks 2026]</a:t>
+              <a:t>"a fixed prompt is fed to an agent in an infinite loop", [Thoughtworks 2026]</a:t>
             </a:r>
           </a:p>
           <a:p>
@@ -9071,7 +9051,47 @@
                 <a:latin typeface="맑은 고딕"/>
                 <a:ea typeface="맑은 고딕"/>
               </a:rPr>
-              <a:t>여러 에이전트는 그래프로 볼 수 있고</a:t>
+              <a:t>여러 에이전트는 그래프로 볼 수 있고 관리자형의 간선은 </a:t>
+            </a:r>
+            <a:r>
+              <a:rPr sz="1800" b="1">
+                <a:solidFill>
+                  <a:srgbClr val="000000"/>
+                </a:solidFill>
+                <a:latin typeface="맑은 고딕"/>
+                <a:ea typeface="맑은 고딕"/>
+              </a:rPr>
+              <a:t>도구 호출</a:t>
+            </a:r>
+            <a:r>
+              <a:rPr sz="1800" b="0">
+                <a:solidFill>
+                  <a:srgbClr val="000000"/>
+                </a:solidFill>
+                <a:latin typeface="맑은 고딕"/>
+                <a:ea typeface="맑은 고딕"/>
+              </a:rPr>
+              <a:t>이며 분산형의 간선은 </a:t>
+            </a:r>
+            <a:r>
+              <a:rPr sz="1800" b="1">
+                <a:solidFill>
+                  <a:srgbClr val="000000"/>
+                </a:solidFill>
+                <a:latin typeface="맑은 고딕"/>
+                <a:ea typeface="맑은 고딕"/>
+              </a:rPr>
+              <a:t>핸드오프</a:t>
+            </a:r>
+            <a:r>
+              <a:rPr sz="1800" b="0">
+                <a:solidFill>
+                  <a:srgbClr val="000000"/>
+                </a:solidFill>
+                <a:latin typeface="맑은 고딕"/>
+                <a:ea typeface="맑은 고딕"/>
+              </a:rPr>
+              <a:t>다</a:t>
             </a:r>
             <a:r>
               <a:rPr sz="1000" b="0">
@@ -9091,7 +9111,7 @@
                 <a:latin typeface="맑은 고딕"/>
                 <a:ea typeface="맑은 고딕"/>
               </a:rPr>
-              <a:t>관리자형의 간선은 도구 호출, 분산형의 간선은 핸드오프다, "Multi-agent systems can be modeled as graphs, with agents represented as nodes. In the manager pattern, edges represent tool calls whereas in the decentralized pattern, edges represent handoffs that transfer execution between agents.", [OpenAI 2025]</a:t>
+              <a:t>"Multi-agent systems can be modeled as graphs, with agents represented as nodes. In the manager pattern, edges represent tool calls whereas in the decentralized pattern, edges represent handoffs that transfer execution between agents.", [OpenAI 2025]</a:t>
             </a:r>
           </a:p>
           <a:p>
@@ -9594,7 +9614,7 @@
                 <a:latin typeface="맑은 고딕"/>
                 <a:ea typeface="맑은 고딕"/>
               </a:rPr>
-              <a:t>"계획자가 없으면 생성자는 </a:t>
+              <a:t>계획자가 없으면 생성자는 </a:t>
             </a:r>
             <a:r>
               <a:rPr sz="1600" b="1">
@@ -9614,7 +9634,7 @@
                 <a:latin typeface="맑은 고딕"/>
                 <a:ea typeface="맑은 고딕"/>
               </a:rPr>
-              <a:t> — 요청만 받고 자기 일을 명세하지 않은 채 만들기 시작한다"</a:t>
+              <a:t> — 요청만 받고 자기 일을 명세하지 않은 채 만들기 시작했다</a:t>
             </a:r>
             <a:r>
               <a:rPr sz="1000" b="0">
@@ -10055,7 +10075,7 @@
           </p:nvPr>
         </p:nvGraphicFramePr>
         <p:xfrm>
-          <a:off x="1174306" y="3411566"/>
+          <a:off x="1174306" y="3137246"/>
           <a:ext cx="6781800" cy="3873500"/>
         </p:xfrm>
         <a:graphic>
@@ -10794,7 +10814,7 @@
         <p:spPr>
           <a:xfrm>
             <a:off x="365760" y="960120"/>
-            <a:ext cx="8412480" cy="2136568"/>
+            <a:ext cx="8412480" cy="1879530"/>
           </a:xfrm>
           <a:prstGeom prst="rect">
             <a:avLst/>
@@ -10880,6 +10900,36 @@
               <a:t>4배</a:t>
             </a:r>
             <a:r>
+              <a:rPr sz="1800" b="0">
+                <a:solidFill>
+                  <a:srgbClr val="000000"/>
+                </a:solidFill>
+                <a:latin typeface="맑은 고딕"/>
+                <a:ea typeface="맑은 고딕"/>
+              </a:rPr>
+              <a:t>를 쓰고 여러 에이전트는 대화의 약 </a:t>
+            </a:r>
+            <a:r>
+              <a:rPr sz="1800" b="1">
+                <a:solidFill>
+                  <a:srgbClr val="000000"/>
+                </a:solidFill>
+                <a:latin typeface="맑은 고딕"/>
+                <a:ea typeface="맑은 고딕"/>
+              </a:rPr>
+              <a:t>15배</a:t>
+            </a:r>
+            <a:r>
+              <a:rPr sz="1800" b="0">
+                <a:solidFill>
+                  <a:srgbClr val="000000"/>
+                </a:solidFill>
+                <a:latin typeface="맑은 고딕"/>
+                <a:ea typeface="맑은 고딕"/>
+              </a:rPr>
+              <a:t>의 토큰을 쓴다</a:t>
+            </a:r>
+            <a:r>
               <a:rPr sz="1000" b="0">
                 <a:solidFill>
                   <a:srgbClr val="000000"/>
@@ -10897,7 +10947,7 @@
                 <a:latin typeface="맑은 고딕"/>
                 <a:ea typeface="맑은 고딕"/>
               </a:rPr>
-              <a:t>여러 에이전트는 대화의 약 15배의 토큰을 쓴다, "agents typically use about 4× more tokens than chat interactions, and multi-agent systems use about 15× more tokens than chats.", [Anthropic 2025a]</a:t>
+              <a:t>"agents typically use about 4× more tokens than chat interactions, and multi-agent systems use about 15× more tokens than chats.", [Anthropic 2025a]</a:t>
             </a:r>
           </a:p>
           <a:p>
@@ -10913,6 +10963,16 @@
               <a:buChar char=""/>
             </a:pPr>
             <a:r>
+              <a:rPr sz="1600" b="1">
+                <a:solidFill>
+                  <a:srgbClr val="000000"/>
+                </a:solidFill>
+                <a:latin typeface="맑은 고딕"/>
+                <a:ea typeface="맑은 고딕"/>
+              </a:rPr>
+              <a:t>코딩 과제는</a:t>
+            </a:r>
+            <a:r>
               <a:rPr sz="1600" b="0">
                 <a:solidFill>
                   <a:srgbClr val="000000"/>
@@ -10920,7 +10980,7 @@
                 <a:latin typeface="맑은 고딕"/>
                 <a:ea typeface="맑은 고딕"/>
               </a:rPr>
-              <a:t>모든 에이전트가 </a:t>
+              <a:t> 연구보다 </a:t>
             </a:r>
             <a:r>
               <a:rPr sz="1600" b="1">
@@ -10930,27 +10990,7 @@
                 <a:latin typeface="맑은 고딕"/>
                 <a:ea typeface="맑은 고딕"/>
               </a:rPr>
-              <a:t>같은 맥락을 공유</a:t>
-            </a:r>
-            <a:r>
-              <a:rPr sz="1600" b="0">
-                <a:solidFill>
-                  <a:srgbClr val="000000"/>
-                </a:solidFill>
-                <a:latin typeface="맑은 고딕"/>
-                <a:ea typeface="맑은 고딕"/>
-              </a:rPr>
-              <a:t>해야 하거나 의존이 많은 영역은 아직 맞지 않으며, </a:t>
-            </a:r>
-            <a:r>
-              <a:rPr sz="1600" b="1">
-                <a:solidFill>
-                  <a:srgbClr val="000000"/>
-                </a:solidFill>
-                <a:latin typeface="맑은 고딕"/>
-                <a:ea typeface="맑은 고딕"/>
-              </a:rPr>
-              <a:t>코딩 과제는 진짜로 병렬화되는 일이 적다</a:t>
+              <a:t>진짜로 병렬화되는 일이 적다</a:t>
             </a:r>
             <a:r>
               <a:rPr sz="1000" b="0">
@@ -11074,7 +11114,7 @@
         </p:nvSpPr>
         <p:spPr>
           <a:xfrm>
-            <a:off x="365760" y="3113116"/>
+            <a:off x="365760" y="2838796"/>
             <a:ext cx="8412480" cy="222250"/>
           </a:xfrm>
           <a:prstGeom prst="rect">
@@ -11123,7 +11163,7 @@
         </p:nvSpPr>
         <p:spPr>
           <a:xfrm>
-            <a:off x="365760" y="4792166"/>
+            <a:off x="365760" y="4517846"/>
             <a:ext cx="8412480" cy="1038316"/>
           </a:xfrm>
           <a:prstGeom prst="rect">
@@ -11382,7 +11422,7 @@
           </p:nvPr>
         </p:nvGraphicFramePr>
         <p:xfrm>
-          <a:off x="1956626" y="3847985"/>
+          <a:off x="1956626" y="3573665"/>
           <a:ext cx="5217160" cy="3873500"/>
         </p:xfrm>
         <a:graphic>
@@ -12289,7 +12329,7 @@
         <p:spPr>
           <a:xfrm>
             <a:off x="365760" y="960120"/>
-            <a:ext cx="8412480" cy="2545491"/>
+            <a:ext cx="8412480" cy="2288454"/>
           </a:xfrm>
           <a:prstGeom prst="rect">
             <a:avLst/>
@@ -12362,7 +12402,7 @@
                 <a:latin typeface="맑은 고딕"/>
                 <a:ea typeface="맑은 고딕"/>
               </a:rPr>
-              <a:t>"위험이 큰 과제에서는 </a:t>
+              <a:t>위험이 큰 과제에서는 </a:t>
             </a:r>
             <a:r>
               <a:rPr sz="1800" b="1">
@@ -12392,7 +12432,7 @@
                 <a:latin typeface="맑은 고딕"/>
                 <a:ea typeface="맑은 고딕"/>
               </a:rPr>
-              <a:t>이 결정적이다 — 에이전트가 중요한 행동을 하기 전에 </a:t>
+              <a:t>이 결정적이다 — 흐름 안에 </a:t>
             </a:r>
             <a:r>
               <a:rPr sz="1800" b="1">
@@ -12402,7 +12442,7 @@
                 <a:latin typeface="맑은 고딕"/>
                 <a:ea typeface="맑은 고딕"/>
               </a:rPr>
-              <a:t>흐름 안에 의도된 멈춤</a:t>
+              <a:t>의도된 멈춤</a:t>
             </a:r>
             <a:r>
               <a:rPr sz="1800" b="0">
@@ -12412,7 +12452,7 @@
                 <a:latin typeface="맑은 고딕"/>
                 <a:ea typeface="맑은 고딕"/>
               </a:rPr>
-              <a:t>을 두어 사람의 승인을 받는다"</a:t>
+              <a:t>을 두어 사람의 승인을 받는다</a:t>
             </a:r>
             <a:r>
               <a:rPr sz="1000" b="0">
@@ -12432,27 +12472,7 @@
                 <a:latin typeface="맑은 고딕"/>
                 <a:ea typeface="맑은 고딕"/>
               </a:rPr>
-              <a:t>"For high-stakes tasks, the Human-in-the-Loop (HITL) pattern is critical, creating a deliberate pause in the workflow to get approval from a person before an agent takes a significant action."</a:t>
-            </a:r>
-            <a:r>
-              <a:rPr sz="1000" b="0">
-                <a:solidFill>
-                  <a:srgbClr val="000000"/>
-                </a:solidFill>
-                <a:latin typeface="맑은 고딕"/>
-                <a:ea typeface="맑은 고딕"/>
-              </a:rPr>
-              <a:t>, </a:t>
-            </a:r>
-            <a:r>
-              <a:rPr sz="1000" b="0">
-                <a:solidFill>
-                  <a:srgbClr val="000000"/>
-                </a:solidFill>
-                <a:latin typeface="맑은 고딕"/>
-                <a:ea typeface="맑은 고딕"/>
-              </a:rPr>
-              <a:t>[Blount 외 2026]</a:t>
+              <a:t>"For high-stakes tasks, the Human-in-the-Loop (HITL) pattern is critical, creating a deliberate pause in the workflow to get approval from a person before an agent takes a significant action.", [Blount 외 2026]</a:t>
             </a:r>
           </a:p>
           <a:p>
@@ -12475,7 +12495,7 @@
                 <a:latin typeface="맑은 고딕"/>
                 <a:ea typeface="맑은 고딕"/>
               </a:rPr>
-              <a:t>"에이전트는 </a:t>
+              <a:t>에이전트는 </a:t>
             </a:r>
             <a:r>
               <a:rPr sz="1600" b="1">
@@ -12485,7 +12505,7 @@
                 <a:latin typeface="맑은 고딕"/>
                 <a:ea typeface="맑은 고딕"/>
               </a:rPr>
-              <a:t>확인 지점에서</a:t>
+              <a:t>확인 지점이나 막혔을 때</a:t>
             </a:r>
             <a:r>
               <a:rPr sz="1600" b="0">
@@ -12495,7 +12515,7 @@
                 <a:latin typeface="맑은 고딕"/>
                 <a:ea typeface="맑은 고딕"/>
               </a:rPr>
-              <a:t>, 또는 막혔을 때 사람의 피드백을 위해 멈출 수 있다"</a:t>
+              <a:t> 사람의 피드백을 위해 멈출 수 있다</a:t>
             </a:r>
             <a:r>
               <a:rPr sz="1000" b="0">
@@ -12619,7 +12639,7 @@
         </p:nvSpPr>
         <p:spPr>
           <a:xfrm>
-            <a:off x="365760" y="3549535"/>
+            <a:off x="365760" y="3275215"/>
             <a:ext cx="8412480" cy="222250"/>
           </a:xfrm>
           <a:prstGeom prst="rect">
@@ -12668,7 +12688,7 @@
         </p:nvSpPr>
         <p:spPr>
           <a:xfrm>
-            <a:off x="365760" y="5516585"/>
+            <a:off x="365760" y="5242265"/>
             <a:ext cx="8412480" cy="781278"/>
           </a:xfrm>
           <a:prstGeom prst="rect">
@@ -13730,6 +13750,16 @@
               <a:buNone/>
             </a:pPr>
             <a:r>
+              <a:rPr sz="1800" b="1">
+                <a:solidFill>
+                  <a:srgbClr val="000000"/>
+                </a:solidFill>
+                <a:latin typeface="맑은 고딕"/>
+                <a:ea typeface="맑은 고딕"/>
+              </a:rPr>
+              <a:t>판단이 필요할 때만</a:t>
+            </a:r>
+            <a:r>
               <a:rPr sz="1800" b="0">
                 <a:solidFill>
                   <a:srgbClr val="000000"/>
@@ -13737,27 +13767,7 @@
                 <a:latin typeface="맑은 고딕"/>
                 <a:ea typeface="맑은 고딕"/>
               </a:rPr>
-              <a:t>"</a:t>
-            </a:r>
-            <a:r>
-              <a:rPr sz="1800" b="1">
-                <a:solidFill>
-                  <a:srgbClr val="000000"/>
-                </a:solidFill>
-                <a:latin typeface="맑은 고딕"/>
-                <a:ea typeface="맑은 고딕"/>
-              </a:rPr>
-              <a:t>판단이 필요할 때만</a:t>
-            </a:r>
-            <a:r>
-              <a:rPr sz="1800" b="0">
-                <a:solidFill>
-                  <a:srgbClr val="000000"/>
-                </a:solidFill>
-                <a:latin typeface="맑은 고딕"/>
-                <a:ea typeface="맑은 고딕"/>
-              </a:rPr>
-              <a:t> 사람에게 올린다"</a:t>
+              <a:t> 사람에게 올린다</a:t>
             </a:r>
             <a:r>
               <a:rPr sz="1000" b="0">
@@ -13777,27 +13787,7 @@
                 <a:latin typeface="맑은 고딕"/>
                 <a:ea typeface="맑은 고딕"/>
               </a:rPr>
-              <a:t>"Escalate to a human only when judgment is required"</a:t>
-            </a:r>
-            <a:r>
-              <a:rPr sz="1000" b="0">
-                <a:solidFill>
-                  <a:srgbClr val="000000"/>
-                </a:solidFill>
-                <a:latin typeface="맑은 고딕"/>
-                <a:ea typeface="맑은 고딕"/>
-              </a:rPr>
-              <a:t>, </a:t>
-            </a:r>
-            <a:r>
-              <a:rPr sz="1000" b="0">
-                <a:solidFill>
-                  <a:srgbClr val="000000"/>
-                </a:solidFill>
-                <a:latin typeface="맑은 고딕"/>
-                <a:ea typeface="맑은 고딕"/>
-              </a:rPr>
-              <a:t>[Lopopolo 2026]</a:t>
+              <a:t>"Escalate to a human only when judgment is required", [Lopopolo 2026]</a:t>
             </a:r>
           </a:p>
           <a:p>
@@ -13813,6 +13803,16 @@
               <a:buChar char=""/>
             </a:pPr>
             <a:r>
+              <a:rPr sz="1600" b="1">
+                <a:solidFill>
+                  <a:srgbClr val="000000"/>
+                </a:solidFill>
+                <a:latin typeface="맑은 고딕"/>
+                <a:ea typeface="맑은 고딕"/>
+              </a:rPr>
+              <a:t>실패 한도 초과</a:t>
+            </a:r>
+            <a:r>
               <a:rPr sz="1600" b="0">
                 <a:solidFill>
                   <a:srgbClr val="000000"/>
@@ -13820,27 +13820,7 @@
                 <a:latin typeface="맑은 고딕"/>
                 <a:ea typeface="맑은 고딕"/>
               </a:rPr>
-              <a:t>"실패 한도 초과 — 에이전트의 재시도나 행동에 </a:t>
-            </a:r>
-            <a:r>
-              <a:rPr sz="1600" b="1">
-                <a:solidFill>
-                  <a:srgbClr val="000000"/>
-                </a:solidFill>
-                <a:latin typeface="맑은 고딕"/>
-                <a:ea typeface="맑은 고딕"/>
-              </a:rPr>
-              <a:t>상한을 둔다</a:t>
-            </a:r>
-            <a:r>
-              <a:rPr sz="1600" b="0">
-                <a:solidFill>
-                  <a:srgbClr val="000000"/>
-                </a:solidFill>
-                <a:latin typeface="맑은 고딕"/>
-                <a:ea typeface="맑은 고딕"/>
-              </a:rPr>
-              <a:t>"</a:t>
+              <a:t> — 에이전트의 재시도나 행동에 상한을 둔다</a:t>
             </a:r>
             <a:r>
               <a:rPr sz="1000" b="0">
@@ -13903,7 +13883,7 @@
                 <a:latin typeface="맑은 고딕"/>
                 <a:ea typeface="맑은 고딕"/>
               </a:rPr>
-              <a:t>"민감하거나 </a:t>
+              <a:t>민감하거나 </a:t>
             </a:r>
             <a:r>
               <a:rPr sz="1600" b="1">
@@ -13923,7 +13903,7 @@
                 <a:latin typeface="맑은 고딕"/>
                 <a:ea typeface="맑은 고딕"/>
               </a:rPr>
-              <a:t> 위험이 큰 행동은 사람의 감독을 거치게 한다"</a:t>
+              <a:t> 위험이 큰 행동은 사람의 감독을 거치게 한다</a:t>
             </a:r>
             <a:r>
               <a:rPr sz="1000" b="0">
@@ -20299,7 +20279,7 @@
                 <a:latin typeface="맑은 고딕"/>
                 <a:ea typeface="맑은 고딕"/>
               </a:rPr>
-              <a:t>"사용자는 권한 요청의 </a:t>
+              <a:t>사용자는 권한 요청의 </a:t>
             </a:r>
             <a:r>
               <a:rPr sz="1800" b="1">
@@ -20312,16 +20292,6 @@
               <a:t>약 93%를 승인했다</a:t>
             </a:r>
             <a:r>
-              <a:rPr sz="1800" b="0">
-                <a:solidFill>
-                  <a:srgbClr val="000000"/>
-                </a:solidFill>
-                <a:latin typeface="맑은 고딕"/>
-                <a:ea typeface="맑은 고딕"/>
-              </a:rPr>
-              <a:t>"</a:t>
-            </a:r>
-            <a:r>
               <a:rPr sz="1000" b="0">
                 <a:solidFill>
                   <a:srgbClr val="000000"/>
@@ -20339,27 +20309,7 @@
                 <a:latin typeface="맑은 고딕"/>
                 <a:ea typeface="맑은 고딕"/>
               </a:rPr>
-              <a:t>"Our telemetry showed users approved roughly 93% of permission prompts."</a:t>
-            </a:r>
-            <a:r>
-              <a:rPr sz="1000" b="0">
-                <a:solidFill>
-                  <a:srgbClr val="000000"/>
-                </a:solidFill>
-                <a:latin typeface="맑은 고딕"/>
-                <a:ea typeface="맑은 고딕"/>
-              </a:rPr>
-              <a:t>, </a:t>
-            </a:r>
-            <a:r>
-              <a:rPr sz="1000" b="0">
-                <a:solidFill>
-                  <a:srgbClr val="000000"/>
-                </a:solidFill>
-                <a:latin typeface="맑은 고딕"/>
-                <a:ea typeface="맑은 고딕"/>
-              </a:rPr>
-              <a:t>[Anthropic 2026c]</a:t>
+              <a:t>"Our telemetry showed users approved roughly 93% of permission prompts.", [Anthropic 2026c]</a:t>
             </a:r>
           </a:p>
           <a:p>
@@ -20382,7 +20332,7 @@
                 <a:latin typeface="맑은 고딕"/>
                 <a:ea typeface="맑은 고딕"/>
               </a:rPr>
-              <a:t>"승인을 많이 볼수록 </a:t>
+              <a:t>승인을 많이 볼수록 </a:t>
             </a:r>
             <a:r>
               <a:rPr sz="1600" b="1">
@@ -20402,7 +20352,7 @@
                 <a:latin typeface="맑은 고딕"/>
                 <a:ea typeface="맑은 고딕"/>
               </a:rPr>
-              <a:t>, 시간이 지나면 감독이 훨씬 느슨해진다"</a:t>
+              <a:t> 시간이 지나면 감독이 훨씬 느슨해진다</a:t>
             </a:r>
             <a:r>
               <a:rPr sz="1000" b="0">
@@ -20608,7 +20558,7 @@
                 <a:latin typeface="맑은 고딕"/>
                 <a:ea typeface="맑은 고딕"/>
               </a:rPr>
-              <a:t>"코드 산출량이 늘자 병목은 </a:t>
+              <a:t>코드 산출량이 늘자 병목은 </a:t>
             </a:r>
             <a:r>
               <a:rPr sz="1800" b="1">
@@ -20628,7 +20578,7 @@
                 <a:latin typeface="맑은 고딕"/>
                 <a:ea typeface="맑은 고딕"/>
               </a:rPr>
-              <a:t>이 되었다"</a:t>
+              <a:t>이 되었다</a:t>
             </a:r>
             <a:r>
               <a:rPr sz="1000" b="0">
@@ -20648,27 +20598,7 @@
                 <a:latin typeface="맑은 고딕"/>
                 <a:ea typeface="맑은 고딕"/>
               </a:rPr>
-              <a:t>"As code throughput increased, our bottleneck became human QA capacity."</a:t>
-            </a:r>
-            <a:r>
-              <a:rPr sz="1000" b="0">
-                <a:solidFill>
-                  <a:srgbClr val="000000"/>
-                </a:solidFill>
-                <a:latin typeface="맑은 고딕"/>
-                <a:ea typeface="맑은 고딕"/>
-              </a:rPr>
-              <a:t>, </a:t>
-            </a:r>
-            <a:r>
-              <a:rPr sz="1000" b="0">
-                <a:solidFill>
-                  <a:srgbClr val="000000"/>
-                </a:solidFill>
-                <a:latin typeface="맑은 고딕"/>
-                <a:ea typeface="맑은 고딕"/>
-              </a:rPr>
-              <a:t>[Lopopolo 2026]</a:t>
+              <a:t>"As code throughput increased, our bottleneck became human QA capacity.", [Lopopolo 2026]</a:t>
             </a:r>
           </a:p>
         </p:txBody>
@@ -22002,7 +21932,7 @@
                 <a:latin typeface="맑은 고딕"/>
                 <a:ea typeface="맑은 고딕"/>
               </a:rPr>
-              <a:t>"코딩 에이전트 </a:t>
+              <a:t>코딩 에이전트 </a:t>
             </a:r>
             <a:r>
               <a:rPr sz="1800" b="1">
@@ -22022,7 +21952,7 @@
                 <a:latin typeface="맑은 고딕"/>
                 <a:ea typeface="맑은 고딕"/>
               </a:rPr>
-              <a:t>이 작고 의도적으로 고른 집단이라면, </a:t>
+              <a:t>이 작고 의도적으로 고른 집단이라면 </a:t>
             </a:r>
             <a:r>
               <a:rPr sz="1800" b="1">
@@ -22042,7 +21972,7 @@
                 <a:latin typeface="맑은 고딕"/>
                 <a:ea typeface="맑은 고딕"/>
               </a:rPr>
-              <a:t>는 수십에서 수백의 에이전트를 한 문제에 투입하고 구성과 규모를 AI가 정한다"</a:t>
+              <a:t>는 수십에서 수백의 에이전트를 한 문제에 투입하고 구성과 규모를 AI가 정한다</a:t>
             </a:r>
             <a:r>
               <a:rPr sz="1000" b="0">
@@ -22062,27 +21992,7 @@
                 <a:latin typeface="맑은 고딕"/>
                 <a:ea typeface="맑은 고딕"/>
               </a:rPr>
-              <a:t>"Where a team of coding agents is a small, deliberate group, a coding agent swarm applies dozens to hundreds of agents to a problem, with AI determining composition and size dynamically."</a:t>
-            </a:r>
-            <a:r>
-              <a:rPr sz="1000" b="0">
-                <a:solidFill>
-                  <a:srgbClr val="000000"/>
-                </a:solidFill>
-                <a:latin typeface="맑은 고딕"/>
-                <a:ea typeface="맑은 고딕"/>
-              </a:rPr>
-              <a:t>, </a:t>
-            </a:r>
-            <a:r>
-              <a:rPr sz="1000" b="0">
-                <a:solidFill>
-                  <a:srgbClr val="000000"/>
-                </a:solidFill>
-                <a:latin typeface="맑은 고딕"/>
-                <a:ea typeface="맑은 고딕"/>
-              </a:rPr>
-              <a:t>[Thoughtworks 2026]</a:t>
+              <a:t>"Where a team of coding agents is a small, deliberate group, a coding agent swarm applies dozens to hundreds of agents to a problem, with AI determining composition and size dynamically.", [Thoughtworks 2026]</a:t>
             </a:r>
           </a:p>
           <a:p>
@@ -26075,7 +25985,7 @@
                 <a:latin typeface="맑은 고딕"/>
                 <a:ea typeface="맑은 고딕"/>
               </a:rPr>
-              <a:t>"프롬프트 체이닝은 과제를 </a:t>
+              <a:t>프롬프트 체이닝은 과제를 </a:t>
             </a:r>
             <a:r>
               <a:rPr sz="1800" b="1">
@@ -26095,7 +26005,7 @@
                 <a:latin typeface="맑은 고딕"/>
                 <a:ea typeface="맑은 고딕"/>
               </a:rPr>
-              <a:t>으로 나누고, 각 LLM 호출이 앞 호출의 출력을 처리한다"</a:t>
+              <a:t>으로 나누고 각 LLM 호출이 앞 호출의 출력을 처리한다</a:t>
             </a:r>
             <a:r>
               <a:rPr sz="1000" b="0">
@@ -26115,27 +26025,7 @@
                 <a:latin typeface="맑은 고딕"/>
                 <a:ea typeface="맑은 고딕"/>
               </a:rPr>
-              <a:t>"Prompt chaining decomposes a task into a sequence of steps, where each LLM call processes the output of the previous one."</a:t>
-            </a:r>
-            <a:r>
-              <a:rPr sz="1000" b="0">
-                <a:solidFill>
-                  <a:srgbClr val="000000"/>
-                </a:solidFill>
-                <a:latin typeface="맑은 고딕"/>
-                <a:ea typeface="맑은 고딕"/>
-              </a:rPr>
-              <a:t>, </a:t>
-            </a:r>
-            <a:r>
-              <a:rPr sz="1000" b="0">
-                <a:solidFill>
-                  <a:srgbClr val="000000"/>
-                </a:solidFill>
-                <a:latin typeface="맑은 고딕"/>
-                <a:ea typeface="맑은 고딕"/>
-              </a:rPr>
-              <a:t>[Anthropic 2024]</a:t>
+              <a:t>"Prompt chaining decomposes a task into a sequence of steps, where each LLM call processes the output of the previous one.", [Anthropic 2024]</a:t>
             </a:r>
           </a:p>
           <a:p>
@@ -26595,7 +26485,7 @@
                 <a:latin typeface="맑은 고딕"/>
                 <a:ea typeface="맑은 고딕"/>
               </a:rPr>
-              <a:t>"라우팅은 입력을 </a:t>
+              <a:t>라우팅은 입력을 </a:t>
             </a:r>
             <a:r>
               <a:rPr sz="1800" b="1">
@@ -26615,7 +26505,7 @@
                 <a:latin typeface="맑은 고딕"/>
                 <a:ea typeface="맑은 고딕"/>
               </a:rPr>
-              <a:t> 전문화된 후속 작업으로 보낸다"</a:t>
+              <a:t> 전문화된 후속 작업으로 보낸다</a:t>
             </a:r>
             <a:r>
               <a:rPr sz="1000" b="0">
@@ -26635,27 +26525,7 @@
                 <a:latin typeface="맑은 고딕"/>
                 <a:ea typeface="맑은 고딕"/>
               </a:rPr>
-              <a:t>"Routing classifies an input and directs it to a specialized followup task."</a:t>
-            </a:r>
-            <a:r>
-              <a:rPr sz="1000" b="0">
-                <a:solidFill>
-                  <a:srgbClr val="000000"/>
-                </a:solidFill>
-                <a:latin typeface="맑은 고딕"/>
-                <a:ea typeface="맑은 고딕"/>
-              </a:rPr>
-              <a:t>, </a:t>
-            </a:r>
-            <a:r>
-              <a:rPr sz="1000" b="0">
-                <a:solidFill>
-                  <a:srgbClr val="000000"/>
-                </a:solidFill>
-                <a:latin typeface="맑은 고딕"/>
-                <a:ea typeface="맑은 고딕"/>
-              </a:rPr>
-              <a:t>[Anthropic 2024]</a:t>
+              <a:t>"Routing classifies an input and directs it to a specialized followup task.", [Anthropic 2024]</a:t>
             </a:r>
           </a:p>
           <a:p>
@@ -27125,7 +26995,7 @@
                 <a:latin typeface="맑은 고딕"/>
                 <a:ea typeface="맑은 고딕"/>
               </a:rPr>
-              <a:t>"LLM이 한 과제를 </a:t>
+              <a:t>LLM이 한 과제를 </a:t>
             </a:r>
             <a:r>
               <a:rPr sz="1800" b="1">
@@ -27145,7 +27015,7 @@
                 <a:latin typeface="맑은 고딕"/>
                 <a:ea typeface="맑은 고딕"/>
               </a:rPr>
-              <a:t> 수행하고 그 출력을 프로그램으로 모을 수 있다"</a:t>
+              <a:t> 수행하고 그 출력을 프로그램으로 모을 수 있다</a:t>
             </a:r>
             <a:r>
               <a:rPr sz="1000" b="0">
@@ -27165,27 +27035,7 @@
                 <a:latin typeface="맑은 고딕"/>
                 <a:ea typeface="맑은 고딕"/>
               </a:rPr>
-              <a:t>"LLMs can sometimes work simultaneously on a task and have their outputs aggregated programmatically."</a:t>
-            </a:r>
-            <a:r>
-              <a:rPr sz="1000" b="0">
-                <a:solidFill>
-                  <a:srgbClr val="000000"/>
-                </a:solidFill>
-                <a:latin typeface="맑은 고딕"/>
-                <a:ea typeface="맑은 고딕"/>
-              </a:rPr>
-              <a:t>, </a:t>
-            </a:r>
-            <a:r>
-              <a:rPr sz="1000" b="0">
-                <a:solidFill>
-                  <a:srgbClr val="000000"/>
-                </a:solidFill>
-                <a:latin typeface="맑은 고딕"/>
-                <a:ea typeface="맑은 고딕"/>
-              </a:rPr>
-              <a:t>[Anthropic 2024]</a:t>
+              <a:t>"LLMs can sometimes work simultaneously on a task and have their outputs aggregated programmatically.", [Anthropic 2024]</a:t>
             </a:r>
           </a:p>
           <a:p>
@@ -27201,6 +27051,16 @@
               <a:buChar char=""/>
             </a:pPr>
             <a:r>
+              <a:rPr sz="1600" b="1">
+                <a:solidFill>
+                  <a:srgbClr val="000000"/>
+                </a:solidFill>
+                <a:latin typeface="맑은 고딕"/>
+                <a:ea typeface="맑은 고딕"/>
+              </a:rPr>
+              <a:t>분할</a:t>
+            </a:r>
+            <a:r>
               <a:rPr sz="1600" b="0">
                 <a:solidFill>
                   <a:srgbClr val="000000"/>
@@ -27208,7 +27068,7 @@
                 <a:latin typeface="맑은 고딕"/>
                 <a:ea typeface="맑은 고딕"/>
               </a:rPr>
-              <a:t>"분할 — 과제를 독립된 하위 과제로 나누어 병렬로 실행한다"</a:t>
+              <a:t> — 과제를 독립된 하위 과제로 나누어 병렬로 실행한다</a:t>
             </a:r>
             <a:r>
               <a:rPr sz="1000" b="0">
@@ -27264,6 +27124,16 @@
               <a:buChar char=""/>
             </a:pPr>
             <a:r>
+              <a:rPr sz="1600" b="1">
+                <a:solidFill>
+                  <a:srgbClr val="000000"/>
+                </a:solidFill>
+                <a:latin typeface="맑은 고딕"/>
+                <a:ea typeface="맑은 고딕"/>
+              </a:rPr>
+              <a:t>투표</a:t>
+            </a:r>
+            <a:r>
               <a:rPr sz="1600" b="0">
                 <a:solidFill>
                   <a:srgbClr val="000000"/>
@@ -27271,7 +27141,7 @@
                 <a:latin typeface="맑은 고딕"/>
                 <a:ea typeface="맑은 고딕"/>
               </a:rPr>
-              <a:t>"투표 — 같은 과제를 여러 번 실행해 다양한 출력을 얻는다"</a:t>
+              <a:t> — 같은 과제를 여러 번 실행해 다양한 출력을 얻는다</a:t>
             </a:r>
             <a:r>
               <a:rPr sz="1000" b="0">
@@ -28103,7 +27973,7 @@
                 <a:latin typeface="맑은 고딕"/>
                 <a:ea typeface="맑은 고딕"/>
               </a:rPr>
-              <a:t>"오케스트레이터-워커에서는 중앙의 LLM이 과제를 </a:t>
+              <a:t>오케스트레이터-워커에서는 중앙의 LLM이 과제를 </a:t>
             </a:r>
             <a:r>
               <a:rPr sz="1800" b="1">
@@ -28123,7 +27993,7 @@
                 <a:latin typeface="맑은 고딕"/>
                 <a:ea typeface="맑은 고딕"/>
               </a:rPr>
-              <a:t> 워커 LLM에 맡기고 결과를 합친다"</a:t>
+              <a:t> 워커 LLM에 맡기고 결과를 합친다</a:t>
             </a:r>
             <a:r>
               <a:rPr sz="1000" b="0">
@@ -28143,27 +28013,7 @@
                 <a:latin typeface="맑은 고딕"/>
                 <a:ea typeface="맑은 고딕"/>
               </a:rPr>
-              <a:t>"In the orchestrator-workers workflow, a central LLM dynamically breaks down tasks, delegates them to worker LLMs, and synthesizes their results."</a:t>
-            </a:r>
-            <a:r>
-              <a:rPr sz="1000" b="0">
-                <a:solidFill>
-                  <a:srgbClr val="000000"/>
-                </a:solidFill>
-                <a:latin typeface="맑은 고딕"/>
-                <a:ea typeface="맑은 고딕"/>
-              </a:rPr>
-              <a:t>, </a:t>
-            </a:r>
-            <a:r>
-              <a:rPr sz="1000" b="0">
-                <a:solidFill>
-                  <a:srgbClr val="000000"/>
-                </a:solidFill>
-                <a:latin typeface="맑은 고딕"/>
-                <a:ea typeface="맑은 고딕"/>
-              </a:rPr>
-              <a:t>[Anthropic 2024]</a:t>
+              <a:t>"In the orchestrator-workers workflow, a central LLM dynamically breaks down tasks, delegates them to worker LLMs, and synthesizes their results.", [Anthropic 2024]</a:t>
             </a:r>
           </a:p>
           <a:p>
@@ -28623,7 +28473,7 @@
                 <a:latin typeface="맑은 고딕"/>
                 <a:ea typeface="맑은 고딕"/>
               </a:rPr>
-              <a:t>"평가자-최적화기에서는 한 LLM 호출이 응답을 만들고 다른 호출이 </a:t>
+              <a:t>평가자-최적화기에서는 한 LLM 호출이 응답을 만들고 다른 호출이 </a:t>
             </a:r>
             <a:r>
               <a:rPr sz="1800" b="1">
@@ -28643,7 +28493,7 @@
                 <a:latin typeface="맑은 고딕"/>
                 <a:ea typeface="맑은 고딕"/>
               </a:rPr>
-              <a:t>을 주며 루프를 돈다"</a:t>
+              <a:t>을 주며 루프를 돈다</a:t>
             </a:r>
             <a:r>
               <a:rPr sz="1000" b="0">
@@ -28663,27 +28513,7 @@
                 <a:latin typeface="맑은 고딕"/>
                 <a:ea typeface="맑은 고딕"/>
               </a:rPr>
-              <a:t>"In the evaluator-optimizer workflow, one LLM call generates a response while another provides evaluation and feedback in a loop."</a:t>
-            </a:r>
-            <a:r>
-              <a:rPr sz="1000" b="0">
-                <a:solidFill>
-                  <a:srgbClr val="000000"/>
-                </a:solidFill>
-                <a:latin typeface="맑은 고딕"/>
-                <a:ea typeface="맑은 고딕"/>
-              </a:rPr>
-              <a:t>, </a:t>
-            </a:r>
-            <a:r>
-              <a:rPr sz="1000" b="0">
-                <a:solidFill>
-                  <a:srgbClr val="000000"/>
-                </a:solidFill>
-                <a:latin typeface="맑은 고딕"/>
-                <a:ea typeface="맑은 고딕"/>
-              </a:rPr>
-              <a:t>[Anthropic 2024]</a:t>
+              <a:t>"In the evaluator-optimizer workflow, one LLM call generates a response while another provides evaluation and feedback in a loop.", [Anthropic 2024]</a:t>
             </a:r>
           </a:p>
           <a:p>

--- a/courses/ai-native/sessions/s07.pptx
+++ b/courses/ai-native/sessions/s07.pptx
@@ -5291,7 +5291,7 @@
                 <a:latin typeface="맑은 고딕"/>
                 <a:ea typeface="맑은 고딕"/>
               </a:rPr>
-              <a:t>쪼갤 방법을 실행 중에만 아는 경우</a:t>
+              <a:t>쪼갤 방법을 실행 중에야 알 수 있다면</a:t>
             </a:r>
             <a:r>
               <a:rPr sz="1800" b="0">
@@ -5311,7 +5311,7 @@
                 <a:latin typeface="맑은 고딕"/>
                 <a:ea typeface="맑은 고딕"/>
               </a:rPr>
-              <a:t> 그때가 오케스트레이터-워커의 자리다.</a:t>
+              <a:t> 그때 오케스트레이터-워커를 쓴다.</a:t>
             </a:r>
           </a:p>
         </p:txBody>
@@ -6770,27 +6770,7 @@
                 <a:latin typeface="맑은 고딕"/>
                 <a:ea typeface="맑은 고딕"/>
               </a:rPr>
-              <a:t>"주문한다"는 </a:t>
-            </a:r>
-            <a:r>
-              <a:rPr sz="1800" b="1">
-                <a:solidFill>
-                  <a:srgbClr val="000000"/>
-                </a:solidFill>
-                <a:latin typeface="맑은 고딕"/>
-                <a:ea typeface="맑은 고딕"/>
-              </a:rPr>
-              <a:t>두 패턴</a:t>
-            </a:r>
-            <a:r>
-              <a:rPr sz="1800" b="0">
-                <a:solidFill>
-                  <a:srgbClr val="000000"/>
-                </a:solidFill>
-                <a:latin typeface="맑은 고딕"/>
-                <a:ea typeface="맑은 고딕"/>
-              </a:rPr>
-              <a:t>만 쓴다. 나머지를 버린 이유가 패턴 선택의 설명이다.</a:t>
+              <a:t>"주문한다"에는 두 패턴만 쓴다. 나머지를 쓰지 않은 이유를 함께 적어 두면 그것이 선택의 근거가 된다.</a:t>
             </a:r>
           </a:p>
         </p:txBody>
@@ -6999,7 +6979,7 @@
                 <a:latin typeface="맑은 고딕"/>
                 <a:ea typeface="맑은 고딕"/>
               </a:rPr>
-              <a:t>구현은 루프로</a:t>
+              <a:t>구현은 에이전트 루프로</a:t>
             </a:r>
             <a:r>
               <a:rPr sz="1800" b="0">
@@ -7019,7 +6999,7 @@
                 <a:latin typeface="맑은 고딕"/>
                 <a:ea typeface="맑은 고딕"/>
               </a:rPr>
-              <a:t> 작업 단위 4개</a:t>
+              <a:t> 작업 단위 넷</a:t>
             </a:r>
             <a:r>
               <a:rPr sz="1200" b="0">
@@ -7039,7 +7019,7 @@
                 <a:latin typeface="맑은 고딕"/>
                 <a:ea typeface="맑은 고딕"/>
               </a:rPr>
-              <a:t>는 수용 테스트가 끝을 판정하므로 루프를 맡길 수 있다.</a:t>
+              <a:t>은 수용 테스트가 끝을 판정하므로 루프를 맡길 수 있다.</a:t>
             </a:r>
           </a:p>
         </p:txBody>
@@ -7357,7 +7337,27 @@
                 <a:latin typeface="맑은 고딕"/>
                 <a:ea typeface="맑은 고딕"/>
               </a:rPr>
-              <a:t>"crucial for the agents to gain "ground truth" from the environment at each step", [Anthropic 2024]</a:t>
+              <a:t>"crucial for the agents to gain "ground truth" from the environment at each step"</a:t>
+            </a:r>
+            <a:r>
+              <a:rPr sz="1000" b="0">
+                <a:solidFill>
+                  <a:srgbClr val="000000"/>
+                </a:solidFill>
+                <a:latin typeface="맑은 고딕"/>
+                <a:ea typeface="맑은 고딕"/>
+              </a:rPr>
+              <a:t>, </a:t>
+            </a:r>
+            <a:r>
+              <a:rPr sz="1000" b="0">
+                <a:solidFill>
+                  <a:srgbClr val="000000"/>
+                </a:solidFill>
+                <a:latin typeface="맑은 고딕"/>
+                <a:ea typeface="맑은 고딕"/>
+              </a:rPr>
+              <a:t>[Anthropic 2024]</a:t>
             </a:r>
           </a:p>
           <a:p>
@@ -7380,7 +7380,7 @@
                 <a:latin typeface="맑은 고딕"/>
                 <a:ea typeface="맑은 고딕"/>
               </a:rPr>
-              <a:t>루프를 돌리는 힘</a:t>
+              <a:t>루프를 돌리는 것</a:t>
             </a:r>
             <a:r>
               <a:rPr sz="1800" b="0">
@@ -7400,7 +7400,7 @@
                 <a:latin typeface="맑은 고딕"/>
                 <a:ea typeface="맑은 고딕"/>
               </a:rPr>
-              <a:t> 과제로 시작한 루프에서 실패한 테스트의 메시지가 다음 수정의 입력이다. 센서가 없으면 자기 짐작으로 돈다.</a:t>
+              <a:t> 실패한 테스트의 메시지가 다음 수정의 입력이 된다. 센서가 없으면 에이전트는 자기 짐작으로 돈다.</a:t>
             </a:r>
           </a:p>
           <a:p>
@@ -8371,7 +8371,27 @@
                 <a:latin typeface="맑은 고딕"/>
                 <a:ea typeface="맑은 고딕"/>
               </a:rPr>
-              <a:t>"a fixed prompt is fed to an agent in an infinite loop", [Thoughtworks 2026]</a:t>
+              <a:t>"a fixed prompt is fed to an agent in an infinite loop"</a:t>
+            </a:r>
+            <a:r>
+              <a:rPr sz="1000" b="0">
+                <a:solidFill>
+                  <a:srgbClr val="000000"/>
+                </a:solidFill>
+                <a:latin typeface="맑은 고딕"/>
+                <a:ea typeface="맑은 고딕"/>
+              </a:rPr>
+              <a:t>, </a:t>
+            </a:r>
+            <a:r>
+              <a:rPr sz="1000" b="0">
+                <a:solidFill>
+                  <a:srgbClr val="000000"/>
+                </a:solidFill>
+                <a:latin typeface="맑은 고딕"/>
+                <a:ea typeface="맑은 고딕"/>
+              </a:rPr>
+              <a:t>[Thoughtworks 2026]</a:t>
             </a:r>
           </a:p>
           <a:p>
@@ -8958,60 +8978,50 @@
                 <a:latin typeface="맑은 고딕"/>
                 <a:ea typeface="맑은 고딕"/>
               </a:rPr>
-              <a:t>여러 에이전트를 잇는 방법은 둘이다 —</a:t>
-            </a:r>
-            <a:r>
-              <a:rPr sz="1600" b="0">
-                <a:solidFill>
-                  <a:srgbClr val="000000"/>
-                </a:solidFill>
-                <a:latin typeface="맑은 고딕"/>
-                <a:ea typeface="맑은 고딕"/>
-              </a:rPr>
-              <a:t> 관리자가 </a:t>
-            </a:r>
-            <a:r>
-              <a:rPr sz="1600" b="1">
-                <a:solidFill>
-                  <a:srgbClr val="000000"/>
-                </a:solidFill>
-                <a:latin typeface="맑은 고딕"/>
-                <a:ea typeface="맑은 고딕"/>
-              </a:rPr>
-              <a:t>도구로 부르는가</a:t>
-            </a:r>
-            <a:r>
-              <a:rPr sz="1600" b="0">
-                <a:solidFill>
-                  <a:srgbClr val="000000"/>
-                </a:solidFill>
-                <a:latin typeface="맑은 고딕"/>
-                <a:ea typeface="맑은 고딕"/>
-              </a:rPr>
-              <a:t>, 동료에게 </a:t>
-            </a:r>
-            <a:r>
-              <a:rPr sz="1600" b="1">
-                <a:solidFill>
-                  <a:srgbClr val="000000"/>
-                </a:solidFill>
-                <a:latin typeface="맑은 고딕"/>
-                <a:ea typeface="맑은 고딕"/>
-              </a:rPr>
-              <a:t>실행을 넘기는가</a:t>
-            </a:r>
-            <a:r>
-              <a:rPr sz="1600" b="0">
-                <a:solidFill>
-                  <a:srgbClr val="000000"/>
-                </a:solidFill>
-                <a:latin typeface="맑은 고딕"/>
-                <a:ea typeface="맑은 고딕"/>
-              </a:rPr>
-              <a:t>. 그래프로 보면 에이전트가 노드이고, 둘을 잇는 선</a:t>
-            </a:r>
-            <a:r>
-              <a:rPr sz="1200" b="0">
+              <a:t>여러 에이전트를 잇는 방법은 둘이다. 관리자가 다른 에이전트를 </a:t>
+            </a:r>
+            <a:r>
+              <a:rPr sz="1800" b="1">
+                <a:solidFill>
+                  <a:srgbClr val="000000"/>
+                </a:solidFill>
+                <a:latin typeface="맑은 고딕"/>
+                <a:ea typeface="맑은 고딕"/>
+              </a:rPr>
+              <a:t>도구처럼 부르거나</a:t>
+            </a:r>
+            <a:r>
+              <a:rPr sz="1800" b="0">
+                <a:solidFill>
+                  <a:srgbClr val="000000"/>
+                </a:solidFill>
+                <a:latin typeface="맑은 고딕"/>
+                <a:ea typeface="맑은 고딕"/>
+              </a:rPr>
+              <a:t>, 한 에이전트가 다른 에이전트에게 </a:t>
+            </a:r>
+            <a:r>
+              <a:rPr sz="1800" b="1">
+                <a:solidFill>
+                  <a:srgbClr val="000000"/>
+                </a:solidFill>
+                <a:latin typeface="맑은 고딕"/>
+                <a:ea typeface="맑은 고딕"/>
+              </a:rPr>
+              <a:t>실행을 넘긴다</a:t>
+            </a:r>
+            <a:r>
+              <a:rPr sz="1800" b="0">
+                <a:solidFill>
+                  <a:srgbClr val="000000"/>
+                </a:solidFill>
+                <a:latin typeface="맑은 고딕"/>
+                <a:ea typeface="맑은 고딕"/>
+              </a:rPr>
+              <a:t>. 그래프로 그리면 에이전트가 노드이고 둘을 잇는 선</a:t>
+            </a:r>
+            <a:r>
+              <a:rPr sz="1400" b="0">
                 <a:solidFill>
                   <a:srgbClr val="000000"/>
                 </a:solidFill>
@@ -9021,7 +9031,7 @@
               <a:t>(간선, edge)</a:t>
             </a:r>
             <a:r>
-              <a:rPr sz="1600" b="0">
+              <a:rPr sz="1800" b="0">
                 <a:solidFill>
                   <a:srgbClr val="000000"/>
                 </a:solidFill>
@@ -9111,7 +9121,27 @@
                 <a:latin typeface="맑은 고딕"/>
                 <a:ea typeface="맑은 고딕"/>
               </a:rPr>
-              <a:t>"Multi-agent systems can be modeled as graphs, with agents represented as nodes. In the manager pattern, edges represent tool calls whereas in the decentralized pattern, edges represent handoffs that transfer execution between agents.", [OpenAI 2025]</a:t>
+              <a:t>"Multi-agent systems can be modeled as graphs, with agents represented as nodes. In the manager pattern, edges represent tool calls whereas in the decentralized pattern, edges represent handoffs that transfer execution between agents."</a:t>
+            </a:r>
+            <a:r>
+              <a:rPr sz="1000" b="0">
+                <a:solidFill>
+                  <a:srgbClr val="000000"/>
+                </a:solidFill>
+                <a:latin typeface="맑은 고딕"/>
+                <a:ea typeface="맑은 고딕"/>
+              </a:rPr>
+              <a:t>, </a:t>
+            </a:r>
+            <a:r>
+              <a:rPr sz="1000" b="0">
+                <a:solidFill>
+                  <a:srgbClr val="000000"/>
+                </a:solidFill>
+                <a:latin typeface="맑은 고딕"/>
+                <a:ea typeface="맑은 고딕"/>
+              </a:rPr>
+              <a:t>[OpenAI 2025]</a:t>
             </a:r>
           </a:p>
           <a:p>
@@ -9482,7 +9512,7 @@
         <p:spPr>
           <a:xfrm>
             <a:off x="365760" y="960120"/>
-            <a:ext cx="8412480" cy="3686695"/>
+            <a:ext cx="8412480" cy="3961015"/>
           </a:xfrm>
         </p:spPr>
         <p:txBody>
@@ -9508,7 +9538,7 @@
                 <a:latin typeface="맑은 고딕"/>
                 <a:ea typeface="맑은 고딕"/>
               </a:rPr>
-              <a:t>역할을 나눌 때 가장 센 레버는 </a:t>
+              <a:t>역할을 나눌 때 가장 크게 달라지는 것은 </a:t>
             </a:r>
             <a:r>
               <a:rPr sz="1800" b="1">
@@ -9518,7 +9548,7 @@
                 <a:latin typeface="맑은 고딕"/>
                 <a:ea typeface="맑은 고딕"/>
               </a:rPr>
-              <a:t>일하는 쪽과 판단하는 쪽의 분리</a:t>
+              <a:t>일하는 쪽과 판단하는 쪽을 떼어 놓는 것</a:t>
             </a:r>
             <a:r>
               <a:rPr sz="1800" b="0">
@@ -9528,7 +9558,7 @@
                 <a:latin typeface="맑은 고딕"/>
                 <a:ea typeface="맑은 고딕"/>
               </a:rPr>
-              <a:t>다.</a:t>
+              <a:t>이다.</a:t>
             </a:r>
           </a:p>
           <a:p>
@@ -9591,7 +9621,27 @@
                 <a:latin typeface="맑은 고딕"/>
                 <a:ea typeface="맑은 고딕"/>
               </a:rPr>
-              <a:t>"Separating the agent doing the work from the agent judging it proves to be a strong lever to address this issue.", [Anthropic 2026b]</a:t>
+              <a:t>"Separating the agent doing the work from the agent judging it proves to be a strong lever to address this issue."</a:t>
+            </a:r>
+            <a:r>
+              <a:rPr sz="1000" b="0">
+                <a:solidFill>
+                  <a:srgbClr val="000000"/>
+                </a:solidFill>
+                <a:latin typeface="맑은 고딕"/>
+                <a:ea typeface="맑은 고딕"/>
+              </a:rPr>
+              <a:t>, </a:t>
+            </a:r>
+            <a:r>
+              <a:rPr sz="1000" b="0">
+                <a:solidFill>
+                  <a:srgbClr val="000000"/>
+                </a:solidFill>
+                <a:latin typeface="맑은 고딕"/>
+                <a:ea typeface="맑은 고딕"/>
+              </a:rPr>
+              <a:t>[Anthropic 2026b]</a:t>
             </a:r>
           </a:p>
           <a:p>
@@ -9842,7 +9892,7 @@
         </p:nvSpPr>
         <p:spPr>
           <a:xfrm>
-            <a:off x="365760" y="4948567"/>
+            <a:off x="365760" y="5222887"/>
             <a:ext cx="8412480" cy="201168"/>
           </a:xfrm>
           <a:prstGeom prst="rect">
@@ -9886,7 +9936,7 @@
         </p:blipFill>
         <p:spPr>
           <a:xfrm>
-            <a:off x="1363266" y="5186311"/>
+            <a:off x="1363266" y="5460631"/>
             <a:ext cx="6417469" cy="605730"/>
           </a:xfrm>
           <a:prstGeom prst="rect">
@@ -10075,7 +10125,7 @@
           </p:nvPr>
         </p:nvGraphicFramePr>
         <p:xfrm>
-          <a:off x="1174306" y="3137246"/>
+          <a:off x="1174306" y="3411566"/>
           <a:ext cx="6781800" cy="3873500"/>
         </p:xfrm>
         <a:graphic>
@@ -10814,7 +10864,7 @@
         <p:spPr>
           <a:xfrm>
             <a:off x="365760" y="960120"/>
-            <a:ext cx="8412480" cy="1879530"/>
+            <a:ext cx="8412480" cy="2136568"/>
           </a:xfrm>
           <a:prstGeom prst="rect">
             <a:avLst/>
@@ -10844,7 +10894,7 @@
                 <a:latin typeface="맑은 고딕"/>
                 <a:ea typeface="맑은 고딕"/>
               </a:rPr>
-              <a:t>여러 에이전트는 비싸다. 비용은 </a:t>
+              <a:t>에이전트를 여럿 두면 비용이 는다. 늘어나는 것은 </a:t>
             </a:r>
             <a:r>
               <a:rPr sz="1800" b="1">
@@ -10854,7 +10904,7 @@
                 <a:latin typeface="맑은 고딕"/>
                 <a:ea typeface="맑은 고딕"/>
               </a:rPr>
-              <a:t>토큰·오류의 누적·조정</a:t>
+              <a:t>토큰과 누적되는 오류와 서로 맞추는 수고</a:t>
             </a:r>
             <a:r>
               <a:rPr sz="1800" b="0">
@@ -10864,7 +10914,7 @@
                 <a:latin typeface="맑은 고딕"/>
                 <a:ea typeface="맑은 고딕"/>
               </a:rPr>
-              <a:t> 셋이다.</a:t>
+              <a:t>다.</a:t>
             </a:r>
           </a:p>
           <a:p>
@@ -10947,7 +10997,27 @@
                 <a:latin typeface="맑은 고딕"/>
                 <a:ea typeface="맑은 고딕"/>
               </a:rPr>
-              <a:t>"agents typically use about 4× more tokens than chat interactions, and multi-agent systems use about 15× more tokens than chats.", [Anthropic 2025a]</a:t>
+              <a:t>"agents typically use about 4× more tokens than chat interactions, and multi-agent systems use about 15× more tokens than chats."</a:t>
+            </a:r>
+            <a:r>
+              <a:rPr sz="1000" b="0">
+                <a:solidFill>
+                  <a:srgbClr val="000000"/>
+                </a:solidFill>
+                <a:latin typeface="맑은 고딕"/>
+                <a:ea typeface="맑은 고딕"/>
+              </a:rPr>
+              <a:t>, </a:t>
+            </a:r>
+            <a:r>
+              <a:rPr sz="1000" b="0">
+                <a:solidFill>
+                  <a:srgbClr val="000000"/>
+                </a:solidFill>
+                <a:latin typeface="맑은 고딕"/>
+                <a:ea typeface="맑은 고딕"/>
+              </a:rPr>
+              <a:t>[Anthropic 2025a]</a:t>
             </a:r>
           </a:p>
           <a:p>
@@ -11114,7 +11184,7 @@
         </p:nvSpPr>
         <p:spPr>
           <a:xfrm>
-            <a:off x="365760" y="2838796"/>
+            <a:off x="365760" y="3113116"/>
             <a:ext cx="8412480" cy="222250"/>
           </a:xfrm>
           <a:prstGeom prst="rect">
@@ -11163,7 +11233,7 @@
         </p:nvSpPr>
         <p:spPr>
           <a:xfrm>
-            <a:off x="365760" y="4517846"/>
+            <a:off x="365760" y="4792166"/>
             <a:ext cx="8412480" cy="1038316"/>
           </a:xfrm>
           <a:prstGeom prst="rect">
@@ -12472,7 +12542,27 @@
                 <a:latin typeface="맑은 고딕"/>
                 <a:ea typeface="맑은 고딕"/>
               </a:rPr>
-              <a:t>"For high-stakes tasks, the Human-in-the-Loop (HITL) pattern is critical, creating a deliberate pause in the workflow to get approval from a person before an agent takes a significant action.", [Blount 외 2026]</a:t>
+              <a:t>"For high-stakes tasks, the Human-in-the-Loop (HITL) pattern is critical, creating a deliberate pause in the workflow to get approval from a person before an agent takes a significant action."</a:t>
+            </a:r>
+            <a:r>
+              <a:rPr sz="1000" b="0">
+                <a:solidFill>
+                  <a:srgbClr val="000000"/>
+                </a:solidFill>
+                <a:latin typeface="맑은 고딕"/>
+                <a:ea typeface="맑은 고딕"/>
+              </a:rPr>
+              <a:t>, </a:t>
+            </a:r>
+            <a:r>
+              <a:rPr sz="1000" b="0">
+                <a:solidFill>
+                  <a:srgbClr val="000000"/>
+                </a:solidFill>
+                <a:latin typeface="맑은 고딕"/>
+                <a:ea typeface="맑은 고딕"/>
+              </a:rPr>
+              <a:t>[Blount 외 2026]</a:t>
             </a:r>
           </a:p>
           <a:p>
@@ -13787,7 +13877,27 @@
                 <a:latin typeface="맑은 고딕"/>
                 <a:ea typeface="맑은 고딕"/>
               </a:rPr>
-              <a:t>"Escalate to a human only when judgment is required", [Lopopolo 2026]</a:t>
+              <a:t>"Escalate to a human only when judgment is required"</a:t>
+            </a:r>
+            <a:r>
+              <a:rPr sz="1000" b="0">
+                <a:solidFill>
+                  <a:srgbClr val="000000"/>
+                </a:solidFill>
+                <a:latin typeface="맑은 고딕"/>
+                <a:ea typeface="맑은 고딕"/>
+              </a:rPr>
+              <a:t>, </a:t>
+            </a:r>
+            <a:r>
+              <a:rPr sz="1000" b="0">
+                <a:solidFill>
+                  <a:srgbClr val="000000"/>
+                </a:solidFill>
+                <a:latin typeface="맑은 고딕"/>
+                <a:ea typeface="맑은 고딕"/>
+              </a:rPr>
+              <a:t>[Lopopolo 2026]</a:t>
             </a:r>
           </a:p>
           <a:p>
@@ -16060,7 +16170,27 @@
                 <a:latin typeface="맑은 고딕"/>
                 <a:ea typeface="맑은 고딕"/>
               </a:rPr>
-              <a:t>"In a system where agent throughput far exceeds human attention, corrections are cheap, and waiting is expensive.", [Lopopolo 2026]</a:t>
+              <a:t>"In a system where agent throughput far exceeds human attention, corrections are cheap, and waiting is expensive."</a:t>
+            </a:r>
+            <a:r>
+              <a:rPr sz="1000" b="0">
+                <a:solidFill>
+                  <a:srgbClr val="000000"/>
+                </a:solidFill>
+                <a:latin typeface="맑은 고딕"/>
+                <a:ea typeface="맑은 고딕"/>
+              </a:rPr>
+              <a:t>, </a:t>
+            </a:r>
+            <a:r>
+              <a:rPr sz="1000" b="0">
+                <a:solidFill>
+                  <a:srgbClr val="000000"/>
+                </a:solidFill>
+                <a:latin typeface="맑은 고딕"/>
+                <a:ea typeface="맑은 고딕"/>
+              </a:rPr>
+              <a:t>[Lopopolo 2026]</a:t>
             </a:r>
           </a:p>
           <a:p>
@@ -16083,7 +16213,7 @@
                 <a:latin typeface="맑은 고딕"/>
                 <a:ea typeface="맑은 고딕"/>
               </a:rPr>
-              <a:t>사전 승인은 되돌릴 수 없는 일에만</a:t>
+              <a:t>사전 승인은 되돌릴 수 없는 일에만 둔다</a:t>
             </a:r>
             <a:r>
               <a:rPr sz="1800" b="0">
@@ -16103,7 +16233,7 @@
                 <a:latin typeface="맑은 고딕"/>
                 <a:ea typeface="맑은 고딕"/>
               </a:rPr>
-              <a:t> 그 밖에는 일을 멈춰 세우는 값이 얻는 것보다 크다.</a:t>
+              <a:t> 그 밖의 자리에서는 일을 멈춰 세우는 손해가 얻는 것보다 크다.</a:t>
             </a:r>
           </a:p>
           <a:p>
@@ -17008,7 +17138,7 @@
                 <a:latin typeface="맑은 고딕"/>
                 <a:ea typeface="맑은 고딕"/>
               </a:rPr>
-              <a:t> 작업 단위의 순서와 범위가 명세와 맞는지 확인한다. 글이라서 고치는 값이 가장 싸다.</a:t>
+              <a:t> 작업 단위의 순서와 범위가 명세와 맞는지 확인한다. 아직 글이라서 고치는 비용이 가장 적다.</a:t>
             </a:r>
           </a:p>
           <a:p>
@@ -19030,7 +19160,7 @@
                 <a:latin typeface="맑은 고딕"/>
                 <a:ea typeface="맑은 고딕"/>
               </a:rPr>
-              <a:t>줄인 승인의 자리</a:t>
+              <a:t>승인을 줄인 결과</a:t>
             </a:r>
             <a:r>
               <a:rPr sz="1800" b="0">
@@ -19050,7 +19180,7 @@
                 <a:latin typeface="맑은 고딕"/>
                 <a:ea typeface="맑은 고딕"/>
               </a:rPr>
-              <a:t> 셋을 뺀 덕분에 남은 세 자리를 사람이 </a:t>
+              <a:t> 세 자리를 뺀 덕분에 남은 세 자리에서는 사람이 </a:t>
             </a:r>
             <a:r>
               <a:rPr sz="1600" b="1">
@@ -19070,7 +19200,7 @@
                 <a:latin typeface="맑은 고딕"/>
                 <a:ea typeface="맑은 고딕"/>
               </a:rPr>
-              <a:t> 판단한다.</a:t>
+              <a:t> 판단할 시간이 생긴다.</a:t>
             </a:r>
           </a:p>
           <a:p>
@@ -19093,7 +19223,7 @@
                 <a:latin typeface="맑은 고딕"/>
                 <a:ea typeface="맑은 고딕"/>
               </a:rPr>
-              <a:t>두지 않은 자리의 조건</a:t>
+              <a:t>두지 않아도 되는 조건</a:t>
             </a:r>
             <a:r>
               <a:rPr sz="1800" b="0">
@@ -19113,7 +19243,7 @@
                 <a:latin typeface="맑은 고딕"/>
                 <a:ea typeface="맑은 고딕"/>
               </a:rPr>
-              <a:t> 센서가 있고, 되돌릴 수 있고, 사람이 정할 결정이 아니라는 셋이 모두 맞을 때다.</a:t>
+              <a:t> 센서가 판정하고, 되돌릴 수 있으며, 사람이 정할 결정이 아닌 경우다.</a:t>
             </a:r>
           </a:p>
         </p:txBody>
@@ -20309,7 +20439,27 @@
                 <a:latin typeface="맑은 고딕"/>
                 <a:ea typeface="맑은 고딕"/>
               </a:rPr>
-              <a:t>"Our telemetry showed users approved roughly 93% of permission prompts.", [Anthropic 2026c]</a:t>
+              <a:t>"Our telemetry showed users approved roughly 93% of permission prompts."</a:t>
+            </a:r>
+            <a:r>
+              <a:rPr sz="1000" b="0">
+                <a:solidFill>
+                  <a:srgbClr val="000000"/>
+                </a:solidFill>
+                <a:latin typeface="맑은 고딕"/>
+                <a:ea typeface="맑은 고딕"/>
+              </a:rPr>
+              <a:t>, </a:t>
+            </a:r>
+            <a:r>
+              <a:rPr sz="1000" b="0">
+                <a:solidFill>
+                  <a:srgbClr val="000000"/>
+                </a:solidFill>
+                <a:latin typeface="맑은 고딕"/>
+                <a:ea typeface="맑은 고딕"/>
+              </a:rPr>
+              <a:t>[Anthropic 2026c]</a:t>
             </a:r>
           </a:p>
           <a:p>
@@ -20598,7 +20748,27 @@
                 <a:latin typeface="맑은 고딕"/>
                 <a:ea typeface="맑은 고딕"/>
               </a:rPr>
-              <a:t>"As code throughput increased, our bottleneck became human QA capacity.", [Lopopolo 2026]</a:t>
+              <a:t>"As code throughput increased, our bottleneck became human QA capacity."</a:t>
+            </a:r>
+            <a:r>
+              <a:rPr sz="1000" b="0">
+                <a:solidFill>
+                  <a:srgbClr val="000000"/>
+                </a:solidFill>
+                <a:latin typeface="맑은 고딕"/>
+                <a:ea typeface="맑은 고딕"/>
+              </a:rPr>
+              <a:t>, </a:t>
+            </a:r>
+            <a:r>
+              <a:rPr sz="1000" b="0">
+                <a:solidFill>
+                  <a:srgbClr val="000000"/>
+                </a:solidFill>
+                <a:latin typeface="맑은 고딕"/>
+                <a:ea typeface="맑은 고딕"/>
+              </a:rPr>
+              <a:t>[Lopopolo 2026]</a:t>
             </a:r>
           </a:p>
         </p:txBody>
@@ -21899,7 +22069,7 @@
                 <a:latin typeface="맑은 고딕"/>
                 <a:ea typeface="맑은 고딕"/>
               </a:rPr>
-              <a:t>많이 띄우는 것</a:t>
+              <a:t>여럿 띄우는 것</a:t>
             </a:r>
             <a:r>
               <a:rPr sz="1800" b="0">
@@ -21909,7 +22079,7 @@
                 <a:latin typeface="맑은 고딕"/>
                 <a:ea typeface="맑은 고딕"/>
               </a:rPr>
-              <a:t>은 흐름을 설계한 것이 아니다.</a:t>
+              <a:t>만으로는 실행 흐름을 설계한 것이 아니다.</a:t>
             </a:r>
           </a:p>
           <a:p>
@@ -21992,7 +22162,27 @@
                 <a:latin typeface="맑은 고딕"/>
                 <a:ea typeface="맑은 고딕"/>
               </a:rPr>
-              <a:t>"Where a team of coding agents is a small, deliberate group, a coding agent swarm applies dozens to hundreds of agents to a problem, with AI determining composition and size dynamically.", [Thoughtworks 2026]</a:t>
+              <a:t>"Where a team of coding agents is a small, deliberate group, a coding agent swarm applies dozens to hundreds of agents to a problem, with AI determining composition and size dynamically."</a:t>
+            </a:r>
+            <a:r>
+              <a:rPr sz="1000" b="0">
+                <a:solidFill>
+                  <a:srgbClr val="000000"/>
+                </a:solidFill>
+                <a:latin typeface="맑은 고딕"/>
+                <a:ea typeface="맑은 고딕"/>
+              </a:rPr>
+              <a:t>, </a:t>
+            </a:r>
+            <a:r>
+              <a:rPr sz="1000" b="0">
+                <a:solidFill>
+                  <a:srgbClr val="000000"/>
+                </a:solidFill>
+                <a:latin typeface="맑은 고딕"/>
+                <a:ea typeface="맑은 고딕"/>
+              </a:rPr>
+              <a:t>[Thoughtworks 2026]</a:t>
             </a:r>
           </a:p>
           <a:p>
@@ -22241,7 +22431,7 @@
                 <a:latin typeface="맑은 고딕"/>
                 <a:ea typeface="맑은 고딕"/>
               </a:rPr>
-              <a:t>먼저 물을 것</a:t>
+              <a:t>먼저 확인할 것</a:t>
             </a:r>
             <a:r>
               <a:rPr sz="1800" b="0">
@@ -22271,7 +22461,7 @@
                 <a:latin typeface="맑은 고딕"/>
                 <a:ea typeface="맑은 고딕"/>
               </a:rPr>
-              <a:t>명세와 센서가 그만큼 촘촘한가</a:t>
+              <a:t>명세와 센서가 그만큼 촘촘한지</a:t>
             </a:r>
             <a:r>
               <a:rPr sz="1600" b="0">
@@ -22281,7 +22471,7 @@
                 <a:latin typeface="맑은 고딕"/>
                 <a:ea typeface="맑은 고딕"/>
               </a:rPr>
-              <a:t>를 본다. 아니면 늘린 수만큼 고칠 일이 늘어난다.</a:t>
+              <a:t> 본다. 아니면 늘린 수만큼 고칠 일이 는다.</a:t>
             </a:r>
           </a:p>
         </p:txBody>
@@ -25499,7 +25689,7 @@
         <p:spPr>
           <a:xfrm>
             <a:off x="365760" y="960120"/>
-            <a:ext cx="8412480" cy="2225040"/>
+            <a:ext cx="8412480" cy="2499360"/>
           </a:xfrm>
         </p:spPr>
         <p:txBody>
@@ -25525,7 +25715,7 @@
                 <a:latin typeface="맑은 고딕"/>
                 <a:ea typeface="맑은 고딕"/>
               </a:rPr>
-              <a:t>위임 계약까지 정하면 남는 질문은 </a:t>
+              <a:t>맡길 범위까지 정했다면 남는 질문은 하나다. </a:t>
             </a:r>
             <a:r>
               <a:rPr sz="1800" b="1">
@@ -25535,17 +25725,7 @@
                 <a:latin typeface="맑은 고딕"/>
                 <a:ea typeface="맑은 고딕"/>
               </a:rPr>
-              <a:t>어떤 순서로 실행하고 어디서 사람이 보는가</a:t>
-            </a:r>
-            <a:r>
-              <a:rPr sz="1800" b="0">
-                <a:solidFill>
-                  <a:srgbClr val="000000"/>
-                </a:solidFill>
-                <a:latin typeface="맑은 고딕"/>
-                <a:ea typeface="맑은 고딕"/>
-              </a:rPr>
-              <a:t>다.</a:t>
+              <a:t>어떤 순서로 실행하고 어디에서 사람이 결과를 확인할 것인가.</a:t>
             </a:r>
           </a:p>
           <a:p>
@@ -25568,7 +25748,7 @@
                 <a:latin typeface="맑은 고딕"/>
                 <a:ea typeface="맑은 고딕"/>
               </a:rPr>
-              <a:t>정하는 것은 셋</a:t>
+              <a:t>정할 것</a:t>
             </a:r>
             <a:r>
               <a:rPr sz="1800" b="0">
@@ -25588,7 +25768,7 @@
                 <a:latin typeface="맑은 고딕"/>
                 <a:ea typeface="맑은 고딕"/>
               </a:rPr>
-              <a:t> 단계와 경로, 반복과 끝, 사람이 판단할 자리.</a:t>
+              <a:t> 작업을 어떤 단계로 나눌지, 어디서 반복하고 언제 끝낼지, 사람이 어디에서 판단할지다.</a:t>
             </a:r>
           </a:p>
           <a:p>
@@ -25654,7 +25834,7 @@
                 <a:latin typeface="맑은 고딕"/>
                 <a:ea typeface="맑은 고딕"/>
               </a:rPr>
-              <a:t>사람의 자리는 끝이 아니다</a:t>
+              <a:t>사람은 마지막에만 보는 것이 아니다</a:t>
             </a:r>
             <a:r>
               <a:rPr sz="1800" b="0">
@@ -25674,7 +25854,7 @@
                 <a:latin typeface="맑은 고딕"/>
                 <a:ea typeface="맑은 고딕"/>
               </a:rPr>
-              <a:t> 결과를 끝에서 한 번 보는 것과, 흐름 안에 판단할 자리를 두는 것은 다르다.</a:t>
+              <a:t> 끝난 결과를 한 번 확인하는 것과, 흐름 중간에 판단할 자리를 두는 것은 다르다.</a:t>
             </a:r>
           </a:p>
         </p:txBody>
@@ -25693,7 +25873,7 @@
         </p:nvSpPr>
         <p:spPr>
           <a:xfrm>
-            <a:off x="365760" y="3486912"/>
+            <a:off x="365760" y="3761232"/>
             <a:ext cx="8412480" cy="201168"/>
           </a:xfrm>
           <a:prstGeom prst="rect">
@@ -25737,8 +25917,8 @@
         </p:blipFill>
         <p:spPr>
           <a:xfrm>
-            <a:off x="871327" y="3724656"/>
-            <a:ext cx="7401347" cy="2530052"/>
+            <a:off x="1094467" y="3998976"/>
+            <a:ext cx="6955066" cy="2377497"/>
           </a:xfrm>
           <a:prstGeom prst="rect">
             <a:avLst/>
@@ -26025,7 +26205,27 @@
                 <a:latin typeface="맑은 고딕"/>
                 <a:ea typeface="맑은 고딕"/>
               </a:rPr>
-              <a:t>"Prompt chaining decomposes a task into a sequence of steps, where each LLM call processes the output of the previous one.", [Anthropic 2024]</a:t>
+              <a:t>"Prompt chaining decomposes a task into a sequence of steps, where each LLM call processes the output of the previous one."</a:t>
+            </a:r>
+            <a:r>
+              <a:rPr sz="1000" b="0">
+                <a:solidFill>
+                  <a:srgbClr val="000000"/>
+                </a:solidFill>
+                <a:latin typeface="맑은 고딕"/>
+                <a:ea typeface="맑은 고딕"/>
+              </a:rPr>
+              <a:t>, </a:t>
+            </a:r>
+            <a:r>
+              <a:rPr sz="1000" b="0">
+                <a:solidFill>
+                  <a:srgbClr val="000000"/>
+                </a:solidFill>
+                <a:latin typeface="맑은 고딕"/>
+                <a:ea typeface="맑은 고딕"/>
+              </a:rPr>
+              <a:t>[Anthropic 2024]</a:t>
             </a:r>
           </a:p>
           <a:p>
@@ -26154,7 +26354,7 @@
                 <a:latin typeface="맑은 고딕"/>
                 <a:ea typeface="맑은 고딕"/>
               </a:rPr>
-              <a:t>값과 대가</a:t>
+              <a:t>얻는 것과 치르는 것</a:t>
             </a:r>
             <a:r>
               <a:rPr sz="1800" b="0">
@@ -26174,7 +26374,7 @@
                 <a:latin typeface="맑은 고딕"/>
                 <a:ea typeface="맑은 고딕"/>
               </a:rPr>
-              <a:t> 중간 결과를 사람이 볼 수 있다. 대신 단계마다 맥락을 새로 읽어 토큰이 늘어난다.</a:t>
+              <a:t> 중간 결과를 사람이 확인할 수 있다. 대신 단계마다 맥락을 다시 읽어 토큰이 늘어난다.</a:t>
             </a:r>
           </a:p>
         </p:txBody>
@@ -26525,7 +26725,27 @@
                 <a:latin typeface="맑은 고딕"/>
                 <a:ea typeface="맑은 고딕"/>
               </a:rPr>
-              <a:t>"Routing classifies an input and directs it to a specialized followup task.", [Anthropic 2024]</a:t>
+              <a:t>"Routing classifies an input and directs it to a specialized followup task."</a:t>
+            </a:r>
+            <a:r>
+              <a:rPr sz="1000" b="0">
+                <a:solidFill>
+                  <a:srgbClr val="000000"/>
+                </a:solidFill>
+                <a:latin typeface="맑은 고딕"/>
+                <a:ea typeface="맑은 고딕"/>
+              </a:rPr>
+              <a:t>, </a:t>
+            </a:r>
+            <a:r>
+              <a:rPr sz="1000" b="0">
+                <a:solidFill>
+                  <a:srgbClr val="000000"/>
+                </a:solidFill>
+                <a:latin typeface="맑은 고딕"/>
+                <a:ea typeface="맑은 고딕"/>
+              </a:rPr>
+              <a:t>[Anthropic 2024]</a:t>
             </a:r>
           </a:p>
           <a:p>
@@ -26654,7 +26874,7 @@
                 <a:latin typeface="맑은 고딕"/>
                 <a:ea typeface="맑은 고딕"/>
               </a:rPr>
-              <a:t>분류는 싸게</a:t>
+              <a:t>분류에는 비용을 적게 들인다</a:t>
             </a:r>
             <a:r>
               <a:rPr sz="1800" b="0">
@@ -27035,7 +27255,27 @@
                 <a:latin typeface="맑은 고딕"/>
                 <a:ea typeface="맑은 고딕"/>
               </a:rPr>
-              <a:t>"LLMs can sometimes work simultaneously on a task and have their outputs aggregated programmatically.", [Anthropic 2024]</a:t>
+              <a:t>"LLMs can sometimes work simultaneously on a task and have their outputs aggregated programmatically."</a:t>
+            </a:r>
+            <a:r>
+              <a:rPr sz="1000" b="0">
+                <a:solidFill>
+                  <a:srgbClr val="000000"/>
+                </a:solidFill>
+                <a:latin typeface="맑은 고딕"/>
+                <a:ea typeface="맑은 고딕"/>
+              </a:rPr>
+              <a:t>, </a:t>
+            </a:r>
+            <a:r>
+              <a:rPr sz="1000" b="0">
+                <a:solidFill>
+                  <a:srgbClr val="000000"/>
+                </a:solidFill>
+                <a:latin typeface="맑은 고딕"/>
+                <a:ea typeface="맑은 고딕"/>
+              </a:rPr>
+              <a:t>[Anthropic 2024]</a:t>
             </a:r>
           </a:p>
           <a:p>
@@ -27688,7 +27928,7 @@
                 <a:latin typeface="맑은 고딕"/>
                 <a:ea typeface="맑은 고딕"/>
               </a:rPr>
-              <a:t>합치는 쪽은 프로그램</a:t>
+              <a:t>합치는 일은 프로그램이 한다</a:t>
             </a:r>
             <a:r>
               <a:rPr sz="1800" b="0">
@@ -27708,7 +27948,7 @@
                 <a:latin typeface="맑은 고딕"/>
                 <a:ea typeface="맑은 고딕"/>
               </a:rPr>
-              <a:t> 모으는 규칙</a:t>
+              <a:t> 결과를 모으는 규칙</a:t>
             </a:r>
             <a:r>
               <a:rPr sz="1200" b="0">
@@ -27728,7 +27968,7 @@
                 <a:latin typeface="맑은 고딕"/>
                 <a:ea typeface="맑은 고딕"/>
               </a:rPr>
-              <a:t>을 사람이 코드로 정한다.</a:t>
+              <a:t>은 사람이 코드로 정한다.</a:t>
             </a:r>
           </a:p>
         </p:txBody>
@@ -28013,7 +28253,27 @@
                 <a:latin typeface="맑은 고딕"/>
                 <a:ea typeface="맑은 고딕"/>
               </a:rPr>
-              <a:t>"In the orchestrator-workers workflow, a central LLM dynamically breaks down tasks, delegates them to worker LLMs, and synthesizes their results.", [Anthropic 2024]</a:t>
+              <a:t>"In the orchestrator-workers workflow, a central LLM dynamically breaks down tasks, delegates them to worker LLMs, and synthesizes their results."</a:t>
+            </a:r>
+            <a:r>
+              <a:rPr sz="1000" b="0">
+                <a:solidFill>
+                  <a:srgbClr val="000000"/>
+                </a:solidFill>
+                <a:latin typeface="맑은 고딕"/>
+                <a:ea typeface="맑은 고딕"/>
+              </a:rPr>
+              <a:t>, </a:t>
+            </a:r>
+            <a:r>
+              <a:rPr sz="1000" b="0">
+                <a:solidFill>
+                  <a:srgbClr val="000000"/>
+                </a:solidFill>
+                <a:latin typeface="맑은 고딕"/>
+                <a:ea typeface="맑은 고딕"/>
+              </a:rPr>
+              <a:t>[Anthropic 2024]</a:t>
             </a:r>
           </a:p>
           <a:p>
@@ -28142,7 +28402,7 @@
                 <a:latin typeface="맑은 고딕"/>
                 <a:ea typeface="맑은 고딕"/>
               </a:rPr>
-              <a:t>합성이 약한 고리</a:t>
+              <a:t>합치는 단계가 가장 약하다</a:t>
             </a:r>
             <a:r>
               <a:rPr sz="1800" b="0">
@@ -28162,7 +28422,7 @@
                 <a:latin typeface="맑은 고딕"/>
                 <a:ea typeface="맑은 고딕"/>
               </a:rPr>
-              <a:t> 워커가 잘못 가정한 것이 합쳐진 결과에 섞여 들어온다.</a:t>
+              <a:t> 워커가 잘못 가정한 내용이 합쳐진 결과에 그대로 섞여 들어온다.</a:t>
             </a:r>
           </a:p>
         </p:txBody>
@@ -28513,7 +28773,27 @@
                 <a:latin typeface="맑은 고딕"/>
                 <a:ea typeface="맑은 고딕"/>
               </a:rPr>
-              <a:t>"In the evaluator-optimizer workflow, one LLM call generates a response while another provides evaluation and feedback in a loop.", [Anthropic 2024]</a:t>
+              <a:t>"In the evaluator-optimizer workflow, one LLM call generates a response while another provides evaluation and feedback in a loop."</a:t>
+            </a:r>
+            <a:r>
+              <a:rPr sz="1000" b="0">
+                <a:solidFill>
+                  <a:srgbClr val="000000"/>
+                </a:solidFill>
+                <a:latin typeface="맑은 고딕"/>
+                <a:ea typeface="맑은 고딕"/>
+              </a:rPr>
+              <a:t>, </a:t>
+            </a:r>
+            <a:r>
+              <a:rPr sz="1000" b="0">
+                <a:solidFill>
+                  <a:srgbClr val="000000"/>
+                </a:solidFill>
+                <a:latin typeface="맑은 고딕"/>
+                <a:ea typeface="맑은 고딕"/>
+              </a:rPr>
+              <a:t>[Anthropic 2024]</a:t>
             </a:r>
           </a:p>
           <a:p>
@@ -28642,7 +28922,7 @@
                 <a:latin typeface="맑은 고딕"/>
                 <a:ea typeface="맑은 고딕"/>
               </a:rPr>
-              <a:t>계산으로 판정되면 센서다</a:t>
+              <a:t>기계가 판정할 수 있으면 센서로 둔다</a:t>
             </a:r>
             <a:r>
               <a:rPr sz="1800" b="0">
@@ -28662,7 +28942,7 @@
                 <a:latin typeface="맑은 고딕"/>
                 <a:ea typeface="맑은 고딕"/>
               </a:rPr>
-              <a:t> 수용 테스트처럼 기계가 판정할 수 있으면 평가자를 LLM으로 두지 않는다</a:t>
+              <a:t> 수용 테스트처럼 판정이 자동이면 평가자를 LLM으로 둘 이유가 없다</a:t>
             </a:r>
             <a:r>
               <a:rPr sz="1200" b="0">
@@ -28701,7 +28981,7 @@
         </p:nvSpPr>
         <p:spPr>
           <a:xfrm>
-            <a:off x="365760" y="3649010"/>
+            <a:off x="365760" y="3923330"/>
             <a:ext cx="8412480" cy="201168"/>
           </a:xfrm>
           <a:prstGeom prst="rect">
@@ -28745,7 +29025,7 @@
         </p:blipFill>
         <p:spPr>
           <a:xfrm>
-            <a:off x="1532558" y="3886754"/>
+            <a:off x="1532558" y="4161074"/>
             <a:ext cx="6078885" cy="1412587"/>
           </a:xfrm>
           <a:prstGeom prst="rect">

--- a/courses/ai-native/sessions/s07.pptx
+++ b/courses/ai-native/sessions/s07.pptx
@@ -1169,7 +1169,7 @@
             <a:pPr lvl="0"/>
             <a:r>
               <a:rPr lang="ko-KR" sz="1200"/>
-              <a:t>인용 근거: Martin 2000의 인터페이스 분리 원칙 원문 확인. 같은 절은 쓰는 쪽이 갈리면 인터페이스도 갈린다고 설명한다.</a:t>
+              <a:t>인용 근거: Martin 2000의 인터페이스 분리 원칙 원문 확인. 같은 절은 쓰는 쪽이 나뉘면 인터페이스도 나뉜다고 설명한다.</a:t>
             </a:r>
           </a:p>
           <a:p>
@@ -1572,7 +1572,7 @@
             <a:pPr lvl="0"/>
             <a:r>
               <a:rPr lang="ko-KR" sz="1200"/>
-              <a:t>사람이 가르는 근거를 적어 두면 다음 작업의 맥락이 된다. "세션 08. 위임"이 이 결정을 읽힐 범위에 넣는다.</a:t>
+              <a:t>사람이 판단한 근거를 적어 두면 다음 작업의 맥락이 된다. "세션 08. 위임"이 이 결정을 읽힐 범위에 넣는다.</a:t>
             </a:r>
           </a:p>
           <a:p>
@@ -2036,7 +2036,7 @@
             <a:pPr lvl="0"/>
             <a:r>
               <a:rPr lang="ko-KR" sz="1200"/>
-              <a:t>데이터만 든 모델도 테스트는 통과한다. 가르는 기준은 다음 변경에서 열리는 파일의 수다.</a:t>
+              <a:t>데이터만 든 모델도 테스트는 통과한다. 판단의 기준은 다음 변경에서 열리는 파일의 수다.</a:t>
             </a:r>
           </a:p>
         </p:txBody>
@@ -2418,7 +2418,7 @@
             <a:pPr lvl="0"/>
             <a:r>
               <a:rPr lang="ko-KR" sz="1200"/>
-              <a:t>모델에서 보완된 내용 — 확정 불가 뒤의 처리가 계약의 빈칸으로 드러나 요구의 미정 목록에 남았다.</a:t>
+              <a:t>모델에서 보완된 것 — 확정 불가 뒤의 처리가 계약의 빈칸으로 드러나 요구의 미정 목록에 남았다.</a:t>
             </a:r>
           </a:p>
           <a:p>
@@ -2535,7 +2535,7 @@
             <a:pPr lvl="0"/>
             <a:r>
               <a:rPr lang="ko-KR" sz="1200"/>
-              <a:t>주문 생성에서 판매가를 조회하는 쪽이 서비스이고 단가를 확정하는 쪽이 주문이다. 강의의 「정보 전문가」와 같은 가름이다.</a:t>
+              <a:t>주문 생성에서 판매가를 조회하는 쪽이 서비스이고 단가를 확정하는 쪽이 주문이다. 강의의 「정보 전문가」와 같은 구분이다.</a:t>
             </a:r>
           </a:p>
           <a:p>
@@ -2557,6 +2557,462 @@
             <a:r>
               <a:rPr lang="ko-KR" sz="1200"/>
               <a:t>작업 단위가 다섯이다. 강의의 넷과 다른 점은 주문 생성과 주문 결과 확인을 단위로 둔 것과, 확정 불가를 단위 4로 둔 것이다. 뒤의 처리는 미정이지만 어떤 전이도 하지 않는다는 것은 확인할 수 있으므로 근거가 있다. 마지막 문단의 미정 목록이 실습 3~6에서 이어진 것과 같은지 대조하게 한다. 설계가 미정을 늘리지도 줄이지도 않았다. 실제 실행은 tools/run-exercise-turn.py와 Codex CLI로 ①~⑤ 6회다(⑤ 최종화 2회). 단계별 시각·명령·종료 코드는 code/s07/exercise-conversation/order/codex-metadata-NN.json에 있다.</a:t>
+            </a:r>
+          </a:p>
+          <a:p>
+            <a:pPr lvl="0"/>
+            <a:r>
+              <a:rPr lang="ko-KR" sz="1200"/>
+              <a:t>실제로 실행한 프롬프트 — 아래가 이 별첨을 만든 입력이다. 본문 실습의 ①~⑤는 수강생용 문구이고, 실제 실행은 앞 응답을 읽고 답한 내용이 붙어 길다. ①은 앞 실습의 최종 MD 넷을 통째로 붙여 38KB라 노트에는 앞머리까지만 싣는다 — 그대로 재현하려면 code/s07/exercise-conversation/order/prompt-01.txt~prompt-05.txt를 그 파일 그대로 입력으로 쓴다. ①에 붙인 네 파일은 같은 폴더의 input-s03.md·input-s04.md·input-s05.md·input-s06.md(실습 3·4·5·6의 최종 MD)이며 앞 실습의 원본과 바이트 단위로 같다.</a:t>
+            </a:r>
+          </a:p>
+          <a:p>
+            <a:pPr lvl="1"/>
+            <a:r>
+              <a:rPr lang="ko-KR" sz="1200"/>
+              <a:t>1. 실제 프롬프트 1</a:t>
+            </a:r>
+          </a:p>
+          <a:p>
+            <a:pPr lvl="0">
+              <a:buNone/>
+            </a:pPr>
+            <a:r>
+              <a:rPr lang="ko-KR" sz="1200"/>
+              <a:t>    실습 3의 요구사항 정의서, 실습 4의 정적 모델, 실습 5의 동적 모델, 실습 6의 아키텍처 결정을 읽고, "주문한다"를 구현할 객체의 책임과 협력을 설계해라. 업무 규칙을 누가 지키고 시스템 오퍼레이션을 누가 받는지 근거와 함께 정해라. 설계 시퀀스 다이어그램, 인터페이스 선언, 각 오퍼레이션의 사전조건과 사후조건을 함께 제안해라. 아키텍처가 정한 패키지 경계와 의존 규칙을 어기지 마라. 근거 없는 정책은 확정하지 말고 질문해라. 앞 실습이 미정으로 남긴 것은 해결하려 하지 말고 설계에서 어디가 비는지만 밝혀라.</a:t>
+            </a:r>
+          </a:p>
+          <a:p>
+            <a:pPr lvl="0">
+              <a:buNone/>
+            </a:pPr>
+            <a:r>
+              <a:rPr lang="ko-KR" sz="1200"/>
+              <a:t>    [실습 3 실제 최종 MD] # “주문한다” 요구사항 정의서</a:t>
+            </a:r>
+          </a:p>
+          <a:p>
+            <a:pPr lvl="0">
+              <a:buNone/>
+            </a:pPr>
+            <a:r>
+              <a:rPr lang="ko-KR" sz="1200"/>
+              <a:t>    고객이 장바구니의 상품과 수량을 바탕으로 배송지를 지정하고, 카드 승인을 받아 주문을 성립시킨 뒤 그 결과를 확인할 때까지의 요구사항과 수용 기준을 정의한다.</a:t>
+            </a:r>
+          </a:p>
+          <a:p>
+            <a:pPr lvl="0">
+              <a:buNone/>
+            </a:pPr>
+            <a:r>
+              <a:rPr lang="ko-KR" sz="1200"/>
+              <a:t>    ## 목적과 범위</a:t>
+            </a:r>
+          </a:p>
+          <a:p>
+            <a:pPr lvl="2"/>
+            <a:r>
+              <a:rPr lang="ko-KR" sz="1200"/>
+              <a:t>상품 조회와 장바구니 구성은 전제다.</a:t>
+            </a:r>
+          </a:p>
+          <a:p>
+            <a:pPr lvl="2"/>
+            <a:r>
+              <a:rPr lang="ko-KR" sz="1200"/>
+              <a:t>상세 범위는 공통 흐름 3~5단계인 배송지 지정, 결제, 주문 결과 확인이다.</a:t>
+            </a:r>
+          </a:p>
+          <a:p>
+            <a:pPr lvl="2"/>
+            <a:r>
+              <a:rPr lang="ko-KR" sz="1200"/>
+              <a:t>상품·결제·배송 시스템은 외부 시스템으로 연계하며 내부 기능은 재구현하지 않는다.</a:t>
+            </a:r>
+          </a:p>
+          <a:p>
+            <a:pPr lvl="0">
+              <a:buNone/>
+            </a:pPr>
+            <a:r>
+              <a:rPr lang="ko-KR" sz="1200"/>
+              <a:t>    ## 사용자 이야기</a:t>
+            </a:r>
+          </a:p>
+          <a:p>
+            <a:pPr lvl="0">
+              <a:buNone/>
+            </a:pPr>
+            <a:r>
+              <a:rPr lang="ko-KR" sz="1200"/>
+              <a:t>    고객으로서 장바구니의 상품과 수량을 기준으로 배송지를 지정하고 카드 승인을 받아 주문을 성립시킨 뒤 그 결과를 확인하고 싶다.</a:t>
+            </a:r>
+          </a:p>
+          <a:p>
+            <a:pPr lvl="0">
+              <a:buNone/>
+            </a:pPr>
+            <a:r>
+              <a:rPr lang="ko-KR" sz="1200"/>
+              <a:t>    ## 핵심 기능과 업무 규칙</a:t>
+            </a:r>
+          </a:p>
+          <a:p>
+            <a:pPr lvl="2"/>
+            <a:r>
+              <a:rPr lang="ko-KR" sz="1200"/>
+              <a:t>배송지를 지정하면 주문 생성 시점의 판매가로 주문 금액을 확정하고 결제대기 주문을 생성한다.</a:t>
+            </a:r>
+          </a:p>
+          <a:p>
+            <a:pPr lvl="2"/>
+            <a:r>
+              <a:rPr lang="ko-KR" sz="1200"/>
+              <a:t>주문자와 수령인은 같은 사람으로 본다.</a:t>
+            </a:r>
+          </a:p>
+          <a:p>
+            <a:pPr lvl="2"/>
+            <a:r>
+              <a:rPr lang="ko-KR" sz="1200"/>
+              <a:t>주문 금액은 각 주문 항목의 주문 생성 시점 판매가에 수량을 곱하여 합한 금액이다.</a:t>
+            </a:r>
+          </a:p>
+          <a:p>
+            <a:pPr lvl="2"/>
+            <a:r>
+              <a:rPr lang="ko-KR" sz="1200"/>
+              <a:t>주문 생성 뒤 판매가가 변경되어도 주문 금액과 카드 승인 요청 금액은 바뀌지 않는다.</a:t>
+            </a:r>
+          </a:p>
+          <a:p>
+            <a:pPr lvl="2"/>
+            <a:r>
+              <a:rPr lang="ko-KR" sz="1200"/>
+              <a:t>결제대기 주문의 상품·수량·배송지는 변경할 수 없다. 변경하려면 새 주문을 생성한다.</a:t>
+            </a:r>
+          </a:p>
+          <a:p>
+            <a:pPr lvl="2"/>
+            <a:r>
+              <a:rPr lang="ko-KR" sz="1200"/>
+              <a:t>결제 수단은 카드만 허용한다.</a:t>
+            </a:r>
+          </a:p>
+          <a:p>
+            <a:pPr lvl="2"/>
+            <a:r>
+              <a:rPr lang="ko-KR" sz="1200"/>
+              <a:t>카드 승인이 거절되면 같은 주문을 결제대기로 유지하며 다른 카드로 재결제할 수 있다.</a:t>
+            </a:r>
+          </a:p>
+          <a:p>
+            <a:pPr lvl="2"/>
+            <a:r>
+              <a:rPr lang="ko-KR" sz="1200"/>
+              <a:t>카드 승인이 완료되면 같은 주문이 성립하고 상태가 결제완료가 된다.</a:t>
+            </a:r>
+          </a:p>
+          <a:p>
+            <a:pPr lvl="2"/>
+            <a:r>
+              <a:rPr lang="ko-KR" sz="1200"/>
+              <a:t>배송 요청은 카드 승인 완료 뒤 해당 주문의 확정된 배송지로 보낸다.</a:t>
+            </a:r>
+          </a:p>
+          <a:p>
+            <a:pPr lvl="2"/>
+            <a:r>
+              <a:rPr lang="ko-KR" sz="1200"/>
+              <a:t>주문 쪽에서 재고를 별도로 확보하지 않고 상품 시스템의 판단을 따른다.</a:t>
+            </a:r>
+          </a:p>
+          <a:p>
+            <a:pPr lvl="2"/>
+            <a:r>
+              <a:rPr lang="ko-KR" sz="1200"/>
+              <a:t>결제 응답을 확정할 수 없으면 승인 또는 거절로 간주하지 않는다.</a:t>
+            </a:r>
+          </a:p>
+          <a:p>
+            <a:pPr lvl="2"/>
+            <a:r>
+              <a:rPr lang="ko-KR" sz="1200"/>
+              <a:t>본인 주문에 대해서만 조회 또는 변경 요청의 권한을 인정한다. 권한이 있더라도 실제 변경 가능 여부에는 주문 상태와 업무 규칙을 적용한다.</a:t>
+            </a:r>
+          </a:p>
+          <a:p>
+            <a:pPr lvl="2"/>
+            <a:r>
+              <a:rPr lang="ko-KR" sz="1200"/>
+              <a:t>다른 고객의 주문에 대한 조회·변경 요청은 거절한다.</a:t>
+            </a:r>
+          </a:p>
+          <a:p>
+            <a:pPr lvl="0">
+              <a:buNone/>
+            </a:pPr>
+            <a:r>
+              <a:rPr lang="ko-KR" sz="1200"/>
+              <a:t>    ## 기본 용어집</a:t>
+            </a:r>
+          </a:p>
+          <a:p>
+            <a:pPr lvl="2"/>
+            <a:r>
+              <a:rPr lang="ko-KR" sz="1200"/>
+              <a:t>주문(Order): 배송지가 지정되어 생성된 거래 기록</a:t>
+            </a:r>
+          </a:p>
+          <a:p>
+            <a:pPr lvl="2"/>
+            <a:r>
+              <a:rPr lang="ko-KR" sz="1200"/>
+              <a:t>주문 항목(OrderItem): 주문에 포함된 상품, 수량 및 주문 생성 시점의 판매가</a:t>
+            </a:r>
+          </a:p>
+          <a:p>
+            <a:pPr lvl="2"/>
+            <a:r>
+              <a:rPr lang="ko-KR" sz="1200"/>
+              <a:t>판매가(salePrice): 상품 시스템이 제공하는 상품 가격</a:t>
+            </a:r>
+          </a:p>
+          <a:p>
+            <a:pPr lvl="2"/>
+            <a:r>
+              <a:rPr lang="ko-KR" sz="1200"/>
+              <a:t>주문 금액(totalAmount): 각 주문 항목의 주문 생성 시점 판매가에 수량을 곱하여 합한 금액</a:t>
+            </a:r>
+          </a:p>
+          <a:p>
+            <a:pPr lvl="2"/>
+            <a:r>
+              <a:rPr lang="ko-KR" sz="1200"/>
+              <a:t>주문 생성: 배송지 지정에 따라 주문이 기록되고 결제대기가 되는 것</a:t>
+            </a:r>
+          </a:p>
+          <a:p>
+            <a:pPr lvl="2"/>
+            <a:r>
+              <a:rPr lang="ko-KR" sz="1200"/>
+              <a:t>결제대기(PENDING_PAYMENT): 주문은 생성됐지만 카드 승인이 완료되지 않은 상태</a:t>
+            </a:r>
+          </a:p>
+          <a:p>
+            <a:pPr lvl="2"/>
+            <a:r>
+              <a:rPr lang="ko-KR" sz="1200"/>
+              <a:t>주문 성립: 카드 승인이 완료되어 같은 주문이 결제완료가 되는 것</a:t>
+            </a:r>
+          </a:p>
+          <a:p>
+            <a:pPr lvl="2"/>
+            <a:r>
+              <a:rPr lang="ko-KR" sz="1200"/>
+              <a:t>결제완료(PAID): 카드 승인이 완료되어 주문이 성립한 상태</a:t>
+            </a:r>
+          </a:p>
+          <a:p>
+            <a:pPr lvl="2"/>
+            <a:r>
+              <a:rPr lang="ko-KR" sz="1200"/>
+              <a:t>주문 결과 확인: 카드 승인 응답에 따른 주문 상태와 결과를 확인하는 것</a:t>
+            </a:r>
+          </a:p>
+          <a:p>
+            <a:pPr lvl="0">
+              <a:buNone/>
+            </a:pPr>
+            <a:r>
+              <a:rPr lang="ko-KR" sz="1200"/>
+              <a:t>    ## 공통 흐름</a:t>
+            </a:r>
+          </a:p>
+          <a:p>
+            <a:pPr lvl="2"/>
+            <a:r>
+              <a:rPr lang="ko-KR" sz="1200"/>
+              <a:t>1. 상품 조회 — 전제: 고객이 상품을 조회한다.</a:t>
+            </a:r>
+          </a:p>
+          <a:p>
+            <a:pPr lvl="2"/>
+            <a:r>
+              <a:rPr lang="ko-KR" sz="1200"/>
+              <a:t>2. 장바구니 — 전제: 고객이 상품과 수량을 장바구니에 담는다.</a:t>
+            </a:r>
+          </a:p>
+          <a:p>
+            <a:pPr lvl="0">
+              <a:buNone/>
+            </a:pPr>
+            <a:r>
+              <a:rPr lang="ko-KR" sz="1200"/>
+              <a:t>    ⟨이하 생략 — input-s03.md·input-s04.md·input-s05.md·input-s06.md의 전문이 이어진다. 이 프롬프트의 전문은 prompt-01.txt에 있다⟩</a:t>
+            </a:r>
+          </a:p>
+          <a:p>
+            <a:pPr lvl="1"/>
+            <a:r>
+              <a:rPr lang="ko-KR" sz="1200"/>
+              <a:t>2. 실제 프롬프트 2</a:t>
+            </a:r>
+          </a:p>
+          <a:p>
+            <a:pPr lvl="0">
+              <a:buNone/>
+            </a:pPr>
+            <a:r>
+              <a:rPr lang="ko-KR" sz="1200"/>
+              <a:t>    [앞선 질문에 대한 답]</a:t>
+            </a:r>
+          </a:p>
+          <a:p>
+            <a:pPr lvl="2"/>
+            <a:r>
+              <a:rPr lang="ko-KR" sz="1200"/>
+              <a:t>1. 본인 주문 권한 검사의 적용 여부는 미정이다. 설계에서 정하지 말고 검사할 자리가 비어 있다고만 적어라.</a:t>
+            </a:r>
+          </a:p>
+          <a:p>
+            <a:pPr lvl="2"/>
+            <a:r>
+              <a:rPr lang="ko-KR" sz="1200"/>
+              <a:t>2. 회원·비회원과 본인 확인 정보의 타입도 미정이다.</a:t>
+            </a:r>
+          </a:p>
+          <a:p>
+            <a:pPr lvl="2"/>
+            <a:r>
+              <a:rPr lang="ko-KR" sz="1200"/>
+              <a:t>3. 확정 불가 결과 뒤의 재결제 허용 여부는 미정이다.</a:t>
+            </a:r>
+          </a:p>
+          <a:p>
+            <a:pPr lvl="2"/>
+            <a:r>
+              <a:rPr lang="ko-KR" sz="1200"/>
+              <a:t>4. 승인 뒤 저장이나 배송 요청이 실패할 때의 처리도 미정이다.</a:t>
+            </a:r>
+          </a:p>
+          <a:p>
+            <a:pPr lvl="2"/>
+            <a:r>
+              <a:rPr lang="ko-KR" sz="1200"/>
+              <a:t>5. 승인·거절 이력의 영속은 이번 범위가 아니다. 주문 결과 확인은 현재 상태와 확정 값으로 한다.</a:t>
+            </a:r>
+          </a:p>
+          <a:p>
+            <a:pPr lvl="2"/>
+            <a:r>
+              <a:rPr lang="ko-KR" sz="1200"/>
+              <a:t>6. 유스케이스 조정자는 업무 패키지 order에 둔다. 포트를 업무 패키지가 소유한다는 아키텍처 결정과 같은 근거다. 이름은 네가 정하고 근거를 적어라.</a:t>
+            </a:r>
+          </a:p>
+          <a:p>
+            <a:pPr lvl="0">
+              <a:buNone/>
+            </a:pPr>
+            <a:r>
+              <a:rPr lang="ko-KR" sz="1200"/>
+              <a:t>    [추가 질문·수정 요청] 책임 배치의 근거를 정보 전문가와 컨트롤러로 다시 적어라. 주문 금액 계산, 단가 확정, 상태 전이와 금지, 사건 수신과 호출 순서, 조회와 저장, 외부 승인·배송 요청을 각각 어느 객체가 맡고 왜 그런지 한 줄씩 밝혀라. 그 값을 아는 객체가 계산하는지, 값을 넘겨 받아 계산하는 객체가 없는지 확인해라.</a:t>
+            </a:r>
+          </a:p>
+          <a:p>
+            <a:pPr lvl="1"/>
+            <a:r>
+              <a:rPr lang="ko-KR" sz="1200"/>
+              <a:t>3. 실제 프롬프트 3</a:t>
+            </a:r>
+          </a:p>
+          <a:p>
+            <a:pPr lvl="0">
+              <a:buNone/>
+            </a:pPr>
+            <a:r>
+              <a:rPr lang="ko-KR" sz="1200"/>
+              <a:t>    [앞선 질문에 대한 답] 추가로 정할 것은 없다. 미정은 그대로 둔다.</a:t>
+            </a:r>
+          </a:p>
+          <a:p>
+            <a:pPr lvl="0">
+              <a:buNone/>
+            </a:pPr>
+            <a:r>
+              <a:rPr lang="ko-KR" sz="1200"/>
+              <a:t>    [추가 질문·수정 요청] 인터페이스를 쓰는 쪽마다 가르고, 결제·배송·상품을 하나로 묶지 않는 근거를 적어라. 그리고 테스트 대역이 지켜야 할 계약을 사전조건과 사후조건으로 적어라. 대역이 사전조건을 검사하지 않으면 어떤 잘못된 구현이 통과하는지 예를 하나 들어라.</a:t>
+            </a:r>
+          </a:p>
+          <a:p>
+            <a:pPr lvl="1"/>
+            <a:r>
+              <a:rPr lang="ko-KR" sz="1200"/>
+              <a:t>4. 실제 프롬프트 4</a:t>
+            </a:r>
+          </a:p>
+          <a:p>
+            <a:pPr lvl="0">
+              <a:buNone/>
+            </a:pPr>
+            <a:r>
+              <a:rPr lang="ko-KR" sz="1200"/>
+              <a:t>    [앞선 질문에 대한 답] 추가로 정할 것은 없다.</a:t>
+            </a:r>
+          </a:p>
+          <a:p>
+            <a:pPr lvl="0">
+              <a:buNone/>
+            </a:pPr>
+            <a:r>
+              <a:rPr lang="ko-KR" sz="1200"/>
+              <a:t>    [추가 질문·수정 요청] 이 기능을 한 번에 검증할 수 있는 작업 단위로 쪼개라. 단위마다 구현할 결과와 완료를 확인할 예, 단위 사이의 순서를 적어라. 계층이나 파일이 아니라 고객의 행동과 업무 규칙으로 갈라라. 미정인 정책은 단위에 넣지 마라.</a:t>
+            </a:r>
+          </a:p>
+          <a:p>
+            <a:pPr lvl="1"/>
+            <a:r>
+              <a:rPr lang="ko-KR" sz="1200"/>
+              <a:t>5. 실제 프롬프트 5</a:t>
+            </a:r>
+          </a:p>
+          <a:p>
+            <a:pPr lvl="0">
+              <a:buNone/>
+            </a:pPr>
+            <a:r>
+              <a:rPr lang="ko-KR" sz="1200"/>
+              <a:t>    지금까지 합의한 내용을 최종 MD 하나로 만들어라. 책임 배치, 설계 시퀀스(원본 포함), 인터페이스와 오퍼레이션 계약, 작업 단위와 완료 조건으로 구성해라. 새 분석·정책·결정을 추가하지 말고 합의한 것만 담아라. 미정은 미정으로 남겨라. 다섯 장을 넘지 않게 핵심만 남기고, 긴 열거는 대표만 남겨라.</a:t>
+            </a:r>
+          </a:p>
+          <a:p>
+            <a:pPr lvl="0">
+              <a:buNone/>
+            </a:pPr>
+            <a:r>
+              <a:rPr lang="ko-KR" sz="1200"/>
+              <a:t>    이전 MD를 읽기 쉽게 고쳐라. 판단과 문장은 그대로 두고 배치만 바꾼다.</a:t>
+            </a:r>
+          </a:p>
+          <a:p>
+            <a:pPr lvl="2"/>
+            <a:r>
+              <a:rPr lang="ko-KR" sz="1200"/>
+              <a:t>표의 칸에 문장이 들어가 한 줄로 읽히지 않는다. 책임 배치, 오퍼레이션 계약, 작업 단위와 완료 조건을 표가 아니라 하위 목록으로 적어라. 항목마다 굵은 이름 뒤에 한 줄씩 붙이고, 사후조건이 결과마다 다르면 결과별로 줄을 나눠라.</a:t>
+            </a:r>
+          </a:p>
+          <a:p>
+            <a:pPr lvl="2"/>
+            <a:r>
+              <a:rPr lang="ko-KR" sz="1200"/>
+              <a:t>시퀀스 다이어그램의 참여자 이름이 길어 도식이 가로로 늘어났다. 패키지 접두어를 빼고 클래스 이름만 참여자로 써라. 그리고 세 장면을 한 도식에 담지 말고 카드 승인 장면만 도식으로 남기고, 주문 생성과 주문 결과 확인은 목록 한 줄씩으로 설명해라.</a:t>
+            </a:r>
+          </a:p>
+          <a:p>
+            <a:pPr lvl="2"/>
+            <a:r>
+              <a:rPr lang="ko-KR" sz="1200"/>
+              <a:t>내용을 지우지 마라. 미정 목록과 근거 문장은 모두 남긴다.</a:t>
             </a:r>
           </a:p>
         </p:txBody>
@@ -2938,7 +3394,7 @@
             <a:pPr lvl="0"/>
             <a:r>
               <a:rPr lang="ko-KR" sz="1200"/>
-              <a:t>이 배치가 유일한 정답이 아니다. 「07. SOLID로 판단하기」의 「두 대안 가르기」에서 다른 안과 견준다.</a:t>
+              <a:t>이 배치가 유일한 정답이 아니다. 「07. SOLID로 판단하기」의 「두 대안 비교하기」에서 다른 안과 비교한다.</a:t>
             </a:r>
           </a:p>
         </p:txBody>
@@ -4508,7 +4964,7 @@
                 <a:latin typeface="맑은 고딕"/>
                 <a:ea typeface="맑은 고딕"/>
               </a:rPr>
-              <a:t>12. 실습 —</a:t>
+              <a:t>12. 실습 7 —</a:t>
             </a:r>
             <a:r>
               <a:rPr sz="1400" b="0">
@@ -11482,7 +11938,7 @@
                           <a:ea typeface="맑은 고딕" panose="020B0503020000020004" pitchFamily="34" charset="-127"/>
                           <a:cs typeface="맑은 고딕"/>
                         </a:rPr>
-                        <a:t>업무 규칙과 호출 순서를 주문·주문 서비스로 가른다</a:t>
+                        <a:t>업무 규칙과 호출 순서를 주문·주문 서비스로 나눈다</a:t>
                       </a:r>
                     </a:p>
                   </a:txBody>
@@ -11986,7 +12442,7 @@
                           <a:ea typeface="맑은 고딕" panose="020B0503020000020004" pitchFamily="34" charset="-127"/>
                           <a:cs typeface="맑은 고딕"/>
                         </a:rPr>
-                        <a:t>결제·배송·상품을 포트 셋으로 가른다</a:t>
+                        <a:t>결제·배송·상품을 포트 셋으로 나눈다</a:t>
                       </a:r>
                     </a:p>
                   </a:txBody>
@@ -12594,7 +13050,7 @@
                 <a:latin typeface="맑은 고딕"/>
                 <a:ea typeface="맑은 고딕"/>
               </a:rPr>
-              <a:t>이다. 그래서 포트를 어떻게 가르고 무엇으로 대체하는지가 설계의 중심이 된다.</a:t>
+              <a:t>이다. 그래서 포트를 어떻게 나누고 무엇으로 대체하는지가 설계의 중심이 된다.</a:t>
             </a:r>
           </a:p>
         </p:txBody>
@@ -12705,7 +13161,7 @@
                 <a:latin typeface="맑은 고딕"/>
                 <a:ea typeface="맑은 고딕"/>
               </a:rPr>
-              <a:t>인터페이스를 가르기</a:t>
+              <a:t>인터페이스를 나누기</a:t>
             </a:r>
           </a:p>
           <a:p>
@@ -13308,7 +13764,7 @@
                 <a:latin typeface="맑은 고딕"/>
                 <a:ea typeface="맑은 고딕"/>
               </a:rPr>
-              <a:t>가르는 기준은 </a:t>
+              <a:t>나누는 기준은 </a:t>
             </a:r>
             <a:r>
               <a:rPr sz="1800" b="1">
@@ -13328,7 +13784,7 @@
                 <a:latin typeface="맑은 고딕"/>
                 <a:ea typeface="맑은 고딕"/>
               </a:rPr>
-              <a:t>이다. 셋으로 가르면 각 포트를 그 업무 패키지가 소유해 의존 규칙과도 맞는다.</a:t>
+              <a:t>이다. 셋으로 나누면 각 포트를 그 업무 패키지가 소유해 의존 규칙과도 맞는다.</a:t>
             </a:r>
           </a:p>
         </p:txBody>
@@ -14438,7 +14894,7 @@
                 <a:latin typeface="맑은 고딕"/>
                 <a:ea typeface="맑은 고딕"/>
               </a:rPr>
-              <a:t>으로 AI가 낸 두 대안을 가른다.</a:t>
+              <a:t>으로 AI가 낸 두 대안을 구분한다.</a:t>
             </a:r>
           </a:p>
           <a:p>
@@ -14614,7 +15070,7 @@
                 <a:latin typeface="맑은 고딕"/>
                 <a:ea typeface="맑은 고딕"/>
               </a:rPr>
-              <a:t>두 대안 가르기</a:t>
+              <a:t>두 대안 비교하기</a:t>
             </a:r>
           </a:p>
           <a:p>
@@ -14982,7 +15438,7 @@
                 <a:latin typeface="맑은 고딕"/>
                 <a:ea typeface="맑은 고딕"/>
               </a:rPr>
-              <a:t>가르는 것은 취향이 아니라 </a:t>
+              <a:t>선택의 기준은 취향이 아니라 </a:t>
             </a:r>
             <a:r>
               <a:rPr sz="1800" b="1">
@@ -15922,7 +16378,7 @@
                 <a:latin typeface="맑은 고딕"/>
                 <a:ea typeface="맑은 고딕"/>
               </a:rPr>
-              <a:t> 가르는 것은 동작이 아니라 다음 변경에서 드는 비용이다.</a:t>
+              <a:t> 판단의 기준은 동작이 아니라 다음 변경에서 드는 비용이다.</a:t>
             </a:r>
           </a:p>
         </p:txBody>
@@ -18864,7 +19320,7 @@
                 <a:latin typeface="맑은 고딕"/>
                 <a:ea typeface="맑은 고딕"/>
               </a:rPr>
-              <a:t>가르는 일</a:t>
+              <a:t>판단하는 일</a:t>
             </a:r>
             <a:r>
               <a:rPr sz="1800" b="0">
@@ -18897,7 +19353,7 @@
                 <a:latin typeface="맑은 고딕"/>
                 <a:ea typeface="맑은 고딕"/>
               </a:rPr>
-              <a:t>가르는 근거는 이 세션의 네 이름이다 —</a:t>
+              <a:t>판단의 근거는 이 세션의 네 이름이다 —</a:t>
             </a:r>
             <a:r>
               <a:rPr sz="1600" b="0">
@@ -19880,7 +20336,7 @@
                 <a:latin typeface="맑은 고딕"/>
                 <a:ea typeface="맑은 고딕"/>
               </a:rPr>
-              <a:t>수용 테스트와 단위 테스트가 재는 것이 다르다.</a:t>
+              <a:t>수용 테스트와 단위 테스트가 확인하는 것이 다르다.</a:t>
             </a:r>
             <a:r>
               <a:rPr sz="1800" b="0">
@@ -19890,7 +20346,7 @@
                 <a:latin typeface="맑은 고딕"/>
                 <a:ea typeface="맑은 고딕"/>
               </a:rPr>
-              <a:t> 수용 테스트는 "세션 03. 요구와 수용 기준"이 정한 기대값을, 단위 테스트는 이 세션이 둔 책임의 자리를 잰다.</a:t>
+              <a:t> 수용 테스트는 "세션 03. 요구와 수용 기준"이 정한 기대값을, 단위 테스트는 이 세션이 둔 책임의 자리를 확인한다.</a:t>
             </a:r>
           </a:p>
         </p:txBody>
@@ -20617,7 +21073,7 @@
                 <a:latin typeface="맑은 고딕"/>
                 <a:ea typeface="맑은 고딕"/>
               </a:rPr>
-              <a:t>을 각각 잰다. 단위마다 통과한 줄이 그 단위의 완료 증거다.</a:t>
+              <a:t>을 각각 확인한다. 단위마다 통과한 줄이 그 단위의 완료 증거다.</a:t>
             </a:r>
           </a:p>
           <a:p>
@@ -20941,7 +21397,7 @@
                 <a:latin typeface="맑은 고딕"/>
                 <a:ea typeface="맑은 고딕"/>
               </a:rPr>
-              <a:t>으로 끝까지 가른다.</a:t>
+              <a:t>으로 끝까지 나눈다.</a:t>
             </a:r>
           </a:p>
           <a:p>
@@ -22203,7 +22659,7 @@
                 <a:latin typeface="맑은 고딕"/>
                 <a:ea typeface="맑은 고딕"/>
               </a:rPr>
-              <a:t>으로 갈라 넷으로 나눈다. 단위마다 확인할 예가 하나씩 붙는다.</a:t>
+              <a:t>을 따라 넷으로 나눈다. 단위마다 확인할 예가 하나씩 붙는다.</a:t>
             </a:r>
           </a:p>
         </p:txBody>
@@ -28936,7 +29392,7 @@
                 <a:latin typeface="맑은 고딕"/>
                 <a:ea typeface="맑은 고딕"/>
               </a:rPr>
-              <a:t>가르는 기준은 끝난 뒤 </a:t>
+              <a:t>나누는 기준은 끝난 뒤 </a:t>
             </a:r>
             <a:r>
               <a:rPr sz="1800" b="1">
@@ -29026,7 +29482,7 @@
                 <a:latin typeface="맑은 고딕"/>
                 <a:ea typeface="맑은 고딕"/>
               </a:rPr>
-              <a:t>12. 실습 — 설계와 작업 단위</a:t>
+              <a:t>12. 실습 7 — 설계와 작업 단위</a:t>
             </a:r>
           </a:p>
         </p:txBody>
@@ -29162,8 +29618,8 @@
         </p:nvSpPr>
         <p:spPr>
           <a:xfrm>
-            <a:off x="365760" y="1399442"/>
-            <a:ext cx="4069080" cy="4818478"/>
+            <a:off x="365760" y="1409700"/>
+            <a:ext cx="4069080" cy="4808220"/>
           </a:xfrm>
         </p:spPr>
         <p:txBody>
@@ -29337,7 +29793,7 @@
                 <a:latin typeface="맑은 고딕"/>
                 <a:ea typeface="맑은 고딕"/>
               </a:rPr>
-              <a:t>위 투입물을 읽고 "주문한다"를 구현할 객체의 책임과 협력을 설계해라. 업무 규칙을 누가 지키고 시스템 오퍼레이션을 누가 받는지 근거와 함께 정해라. 설계 시퀀스 다이어그램, 인터페이스 선언, 각 오퍼레이션의 사전조건과 사후조건을 함께 제안해라. 아키텍처가 정한 패키지 경계와 의존 규칙을 어기지 마라. 근거 없는 정책은 확정하지 말고 질문해라. 앞 실습이 미정으로 남긴 것은 해결하려 하지 말고 설계에서 어디가 비는지만 밝혀라.</a:t>
+              <a:t>위 투입물로 "주문한다"를 구현할 객체의 책임과 협력을 설계해라. 업무 규칙을 누가 지키고 시스템 오퍼레이션을 누가 받는지 근거와 함께 정해라. 설계 시퀀스, 인터페이스 선언, 오퍼레이션의 사전·사후조건을 함께 제안해라. 아키텍처의 경계와 의존 규칙을 어기지 마라. 근거 없는 정책은 확정하지 말고 질문하고, 앞 실습의 미정은 설계에서 어디가 비는지만 밝혀라.</a:t>
             </a:r>
           </a:p>
           <a:p>
@@ -29359,7 +29815,7 @@
                 <a:latin typeface="맑은 고딕"/>
                 <a:ea typeface="맑은 고딕"/>
               </a:rPr>
-              <a:t>[앞선 질문에 대한 답] [추가 질문·수정 요청] 책임 배치의 근거를 정보 전문가와 컨트롤러로 다시 적어라. 금액 계산·상태 전이·외부 요청·조회와 저장을 각각 어느 객체가 맡고 왜 그런지 한 줄씩 밝혀라.</a:t>
+              <a:t>[앞선 질문에 대한 답] [추가 질문·수정 요청] 책임 배치의 근거를 정보 전문가와 컨트롤러로 적고, 금액 계산·상태 전이·외부 요청·조회와 저장을 어느 객체가 왜 맡는지 한 줄씩 밝혀라.</a:t>
             </a:r>
           </a:p>
           <a:p>
@@ -29381,7 +29837,29 @@
                 <a:latin typeface="맑은 고딕"/>
                 <a:ea typeface="맑은 고딕"/>
               </a:rPr>
-              <a:t>[앞선 질문에 대한 답] [추가 질문·수정 요청] 인터페이스를 쓰는 쪽마다 가르고, 테스트 대역이 지켜야 할 계약을 사전조건과 사후조건으로 적어라.</a:t>
+              <a:t>[앞선 질문에 대한 답] [추가 질문·수정 요청] 인터페이스를 쓰는 쪽마다 나누고, 테스트 대역이 지켜야 할 계약을 사전조건과 사후조건으로 적어라.</a:t>
+            </a:r>
+          </a:p>
+          <a:p>
+            <a:pPr lvl="2" marL="1028700" indent="-304800">
+              <a:spcBef>
+                <a:spcPts val="300"/>
+              </a:spcBef>
+              <a:spcAft>
+                <a:spcPts val="300"/>
+              </a:spcAft>
+              <a:buFont typeface="+mj-lt"/>
+              <a:buAutoNum type="arabicPeriod" startAt="4"/>
+            </a:pPr>
+            <a:r>
+              <a:rPr sz="1200" b="0">
+                <a:solidFill>
+                  <a:srgbClr val="000000"/>
+                </a:solidFill>
+                <a:latin typeface="맑은 고딕"/>
+                <a:ea typeface="맑은 고딕"/>
+              </a:rPr>
+              <a:t>[앞선 질문에 대한 답] [추가 질문·수정 요청] 이 기능을 한 번에 검증할 수 있는 작업 단위로 쪼개라. 단위마다 구현할 결과와 완료를 확인할 예, 단위 사이의 순서를 적어라.</a:t>
             </a:r>
           </a:p>
         </p:txBody>
@@ -29405,7 +29883,7 @@
         <p:spPr>
           <a:xfrm>
             <a:off x="365760" y="960120"/>
-            <a:ext cx="8412480" cy="439322"/>
+            <a:ext cx="8412480" cy="449580"/>
           </a:xfrm>
         </p:spPr>
         <p:txBody>
@@ -29424,6 +29902,16 @@
               <a:buNone/>
             </a:pPr>
             <a:r>
+              <a:rPr sz="1200" b="1">
+                <a:solidFill>
+                  <a:srgbClr val="000000"/>
+                </a:solidFill>
+                <a:latin typeface="맑은 고딕"/>
+                <a:ea typeface="맑은 고딕"/>
+              </a:rPr>
+              <a:t>책임과 협력의 초안</a:t>
+            </a:r>
+            <a:r>
               <a:rPr sz="1200" b="0">
                 <a:solidFill>
                   <a:srgbClr val="000000"/>
@@ -29431,27 +29919,7 @@
                 <a:latin typeface="맑은 고딕"/>
                 <a:ea typeface="맑은 고딕"/>
               </a:rPr>
-              <a:t>앞선 요구와 모델, 아키텍처 결정을 LLM에 제공해 </a:t>
-            </a:r>
-            <a:r>
-              <a:rPr sz="1200" b="1">
-                <a:solidFill>
-                  <a:srgbClr val="000000"/>
-                </a:solidFill>
-                <a:latin typeface="맑은 고딕"/>
-                <a:ea typeface="맑은 고딕"/>
-              </a:rPr>
-              <a:t>책임과 협력의 초안</a:t>
-            </a:r>
-            <a:r>
-              <a:rPr sz="1200" b="0">
-                <a:solidFill>
-                  <a:srgbClr val="000000"/>
-                </a:solidFill>
-                <a:latin typeface="맑은 고딕"/>
-                <a:ea typeface="맑은 고딕"/>
-              </a:rPr>
-              <a:t>을 받고, </a:t>
+              <a:t>을 받아 </a:t>
             </a:r>
             <a:r>
               <a:rPr sz="1200" b="1">
@@ -29494,8 +29962,8 @@
         </p:nvSpPr>
         <p:spPr>
           <a:xfrm>
-            <a:off x="4709160" y="1399442"/>
-            <a:ext cx="4069080" cy="4818478"/>
+            <a:off x="4709160" y="1409700"/>
+            <a:ext cx="4069080" cy="4808220"/>
           </a:xfrm>
         </p:spPr>
         <p:txBody>
@@ -29503,28 +29971,6 @@
             <a:normAutofit/>
           </a:bodyPr>
           <a:lstStyle/>
-          <a:p>
-            <a:pPr lvl="2" marL="1028700" indent="-304800">
-              <a:spcBef>
-                <a:spcPts val="300"/>
-              </a:spcBef>
-              <a:spcAft>
-                <a:spcPts val="300"/>
-              </a:spcAft>
-              <a:buFont typeface="+mj-lt"/>
-              <a:buAutoNum type="arabicPeriod" startAt="4"/>
-            </a:pPr>
-            <a:r>
-              <a:rPr sz="1200" b="0">
-                <a:solidFill>
-                  <a:srgbClr val="000000"/>
-                </a:solidFill>
-                <a:latin typeface="맑은 고딕"/>
-                <a:ea typeface="맑은 고딕"/>
-              </a:rPr>
-              <a:t>[앞선 질문에 대한 답] [추가 질문·수정 요청] 이 기능을 한 번에 검증할 수 있는 작업 단위로 쪼개라. 단위마다 구현할 결과와 완료를 확인할 예, 단위 사이의 순서를 적어라.</a:t>
-            </a:r>
-          </a:p>
           <a:p>
             <a:pPr lvl="2" marL="1028700" indent="-304800">
               <a:spcBef>
@@ -29544,7 +29990,7 @@
                 <a:latin typeface="맑은 고딕"/>
                 <a:ea typeface="맑은 고딕"/>
               </a:rPr>
-              <a:t>지금까지 합의한 내용을 최종 MD 하나로 만들어라. 책임 배치, 설계 시퀀스</a:t>
+              <a:t>합의한 내용을 최종 MD 하나로 만들어라. 책임 배치, 설계 시퀀스</a:t>
             </a:r>
             <a:r>
               <a:rPr sz="800" b="0">
@@ -29564,7 +30010,7 @@
                 <a:latin typeface="맑은 고딕"/>
                 <a:ea typeface="맑은 고딕"/>
               </a:rPr>
-              <a:t>, 인터페이스와 오퍼레이션 계약, 작업 단위와 완료 조건으로 구성하고 새 결정을 추가하지 마라. 다섯 장을 넘지 않게 핵심만 남겨라.</a:t>
+              <a:t>, 인터페이스와 오퍼레이션 계약, 작업 단위와 완료 조건으로 구성하고 새 결정을 더하지 마라. 다섯 장 안에 담아라.</a:t>
             </a:r>
           </a:p>
           <a:p>
@@ -30404,7 +30850,7 @@
                 <a:latin typeface="맑은 고딕"/>
                 <a:ea typeface="맑은 고딕"/>
               </a:rPr>
-              <a:t>으로 갈린다.</a:t>
+              <a:t>으로 나뉜다.</a:t>
             </a:r>
           </a:p>
           <a:p>
@@ -41845,7 +42291,7 @@
                 <a:latin typeface="맑은 고딕"/>
                 <a:ea typeface="맑은 고딕"/>
               </a:rPr>
-              <a:t>바뀌는 것과 보내는 것이 갈린다.</a:t>
+              <a:t>바뀌는 것과 보내는 것이 나뉜다.</a:t>
             </a:r>
             <a:r>
               <a:rPr sz="1800" b="0">

--- a/courses/ai-native/sessions/s07.pptx
+++ b/courses/ai-native/sessions/s07.pptx
@@ -1101,7 +1101,7 @@
             <a:pPr lvl="0"/>
             <a:r>
               <a:rPr lang="ko-KR" sz="1200"/>
-              <a:t>SOLID라는 약어는 원전에 없다. 다섯 원칙을 묶어 부르는 통용 약어여서 이름만 쓰고 출처를 달지 않는다.</a:t>
+              <a:t>SOLID라는 약어는 원전에 없다. 5원칙을 묶어 부르는 통용 약어여서 이름만 쓰고 출처를 달지 않는다.</a:t>
             </a:r>
           </a:p>
           <a:p>
@@ -2261,7 +2261,7 @@
             <a:pPr lvl="0"/>
             <a:r>
               <a:rPr lang="ko-KR" sz="1200"/>
-              <a:t>행동으로 쪼개면 한 단위가 여러 패키지를 건드린다. 그것이 문제가 아니라 의도다.</a:t>
+              <a:t>행동으로 나누면 한 단위가 여러 패키지를 건드린다. 그것이 문제가 아니라 의도다.</a:t>
             </a:r>
           </a:p>
           <a:p>
@@ -2982,7 +2982,7 @@
             </a:pPr>
             <a:r>
               <a:rPr lang="ko-KR" sz="1200"/>
-              <a:t>    지금까지 합의한 내용을 최종 MD 하나로 만들어라. 책임 배치, 설계 시퀀스(원본 포함), 인터페이스와 오퍼레이션 계약, 작업 단위와 완료 조건으로 구성해라. 새 분석·정책·결정을 추가하지 말고 합의한 것만 담아라. 미정은 미정으로 남겨라. 다섯 장을 넘지 않게 핵심만 남기고, 긴 열거는 대표만 남겨라.</a:t>
+              <a:t>    지금까지 합의한 내용을 최종 MD 하나로 만들어라. 책임 배치, 설계 시퀀스(원본 포함), 인터페이스와 오퍼레이션 계약, 작업 단위와 완료 조건으로 구성해라. 새 분석·정책·결정을 추가하지 말고 합의한 것만 담아라. 미정은 미정으로 남겨라. 5장을 넘지 않게 핵심만 남기고, 긴 열거는 대표만 남겨라.</a:t>
             </a:r>
           </a:p>
           <a:p>
@@ -5792,7 +5792,7 @@
                       </a:r>
                     </a:p>
                   </a:txBody>
-                  <a:tcPr marL="6750" marR="6750" marT="6750" marB="0" anchor="ctr">
+                  <a:tcPr marL="6750" marR="6750" marT="6750" marB="6750" anchor="ctr">
                     <a:lnL>
                       <a:noFill/>
                     </a:lnL>
@@ -5854,7 +5854,7 @@
                       </a:r>
                     </a:p>
                   </a:txBody>
-                  <a:tcPr marL="6750" marR="6750" marT="6750" marB="0" anchor="ctr">
+                  <a:tcPr marL="6750" marR="6750" marT="6750" marB="6750" anchor="ctr">
                     <a:lnL w="9525" cap="flat" cmpd="sng" algn="ctr">
                       <a:solidFill>
                         <a:schemeClr val="bg1">
@@ -5924,7 +5924,7 @@
                       </a:r>
                     </a:p>
                   </a:txBody>
-                  <a:tcPr marL="6750" marR="6750" marT="6750" marB="0" anchor="ctr">
+                  <a:tcPr marL="6750" marR="6750" marT="6750" marB="6750" anchor="ctr">
                     <a:lnL w="9525" cap="flat" cmpd="sng" algn="ctr">
                       <a:solidFill>
                         <a:schemeClr val="bg1">
@@ -5994,7 +5994,7 @@
                       </a:r>
                     </a:p>
                   </a:txBody>
-                  <a:tcPr marL="6750" marR="6750" marT="6750" marB="0" anchor="ctr">
+                  <a:tcPr marL="6750" marR="6750" marT="6750" marB="6750" anchor="ctr">
                     <a:lnL w="9525" cap="flat" cmpd="sng" algn="ctr">
                       <a:solidFill>
                         <a:schemeClr val="bg1">
@@ -6066,7 +6066,7 @@
                       </a:r>
                     </a:p>
                   </a:txBody>
-                  <a:tcPr marL="81005" marR="6750" marT="6750" marB="0" anchor="ctr">
+                  <a:tcPr marL="81005" marR="6750" marT="6750" marB="6750" anchor="ctr">
                     <a:lnL>
                       <a:noFill/>
                     </a:lnL>
@@ -6120,7 +6120,7 @@
                       </a:r>
                     </a:p>
                   </a:txBody>
-                  <a:tcPr marL="81005" marR="6750" marT="6750" marB="0" anchor="ctr">
+                  <a:tcPr marL="81005" marR="6750" marT="6750" marB="6750" anchor="ctr">
                     <a:lnL>
                       <a:noFill/>
                     </a:lnL>
@@ -6176,7 +6176,7 @@
                       </a:r>
                     </a:p>
                   </a:txBody>
-                  <a:tcPr marL="81005" marR="6750" marT="6750" marB="0" anchor="ctr">
+                  <a:tcPr marL="81005" marR="6750" marT="6750" marB="6750" anchor="ctr">
                     <a:lnL>
                       <a:noFill/>
                     </a:lnL>
@@ -6232,7 +6232,7 @@
                       </a:r>
                     </a:p>
                   </a:txBody>
-                  <a:tcPr marL="81005" marR="6750" marT="6750" marB="0" anchor="ctr">
+                  <a:tcPr marL="81005" marR="6750" marT="6750" marB="6750" anchor="ctr">
                     <a:lnL>
                       <a:noFill/>
                     </a:lnL>
@@ -6290,7 +6290,7 @@
                       </a:r>
                     </a:p>
                   </a:txBody>
-                  <a:tcPr marL="81005" marR="6750" marT="6750" marB="0" anchor="ctr">
+                  <a:tcPr marL="81005" marR="6750" marT="6750" marB="6750" anchor="ctr">
                     <a:lnL>
                       <a:noFill/>
                     </a:lnL>
@@ -6344,7 +6344,7 @@
                       </a:r>
                     </a:p>
                   </a:txBody>
-                  <a:tcPr marL="81005" marR="6750" marT="6750" marB="0" anchor="ctr">
+                  <a:tcPr marL="81005" marR="6750" marT="6750" marB="6750" anchor="ctr">
                     <a:lnL>
                       <a:noFill/>
                     </a:lnL>
@@ -6400,7 +6400,7 @@
                       </a:r>
                     </a:p>
                   </a:txBody>
-                  <a:tcPr marL="81005" marR="6750" marT="6750" marB="0" anchor="ctr">
+                  <a:tcPr marL="81005" marR="6750" marT="6750" marB="6750" anchor="ctr">
                     <a:lnL>
                       <a:noFill/>
                     </a:lnL>
@@ -6456,7 +6456,7 @@
                       </a:r>
                     </a:p>
                   </a:txBody>
-                  <a:tcPr marL="81005" marR="6750" marT="6750" marB="0" anchor="ctr">
+                  <a:tcPr marL="81005" marR="6750" marT="6750" marB="6750" anchor="ctr">
                     <a:lnL>
                       <a:noFill/>
                     </a:lnL>
@@ -7635,7 +7635,7 @@
                 <a:latin typeface="맑은 고딕"/>
                 <a:ea typeface="맑은 고딕"/>
               </a:rPr>
-              <a:t>쓰는 쪽의 말</a:t>
+              <a:t>사용하는 쪽의 말</a:t>
             </a:r>
             <a:r>
               <a:rPr sz="1800" b="0">
@@ -8271,7 +8271,7 @@
                 <a:latin typeface="맑은 고딕"/>
                 <a:ea typeface="맑은 고딕"/>
               </a:rPr>
-              <a:t>에만 둔다. 양쪽이 같은 조건을 다 검사하면 규칙이 두 곳에 생기고, 고칠 때 한 곳만 바뀐다.</a:t>
+              <a:t>에만 둔다. 양쪽이 같은 조건을 다 검사하면 규칙이 2곳에 생기고, 고칠 때 한 곳만 바뀐다.</a:t>
             </a:r>
           </a:p>
         </p:txBody>
@@ -9148,7 +9148,7 @@
                       </a:r>
                     </a:p>
                   </a:txBody>
-                  <a:tcPr marL="6750" marR="6750" marT="6750" marB="0" anchor="ctr">
+                  <a:tcPr marL="6750" marR="6750" marT="6750" marB="6750" anchor="ctr">
                     <a:lnL>
                       <a:noFill/>
                     </a:lnL>
@@ -9210,7 +9210,7 @@
                       </a:r>
                     </a:p>
                   </a:txBody>
-                  <a:tcPr marL="6750" marR="6750" marT="6750" marB="0" anchor="ctr">
+                  <a:tcPr marL="6750" marR="6750" marT="6750" marB="6750" anchor="ctr">
                     <a:lnL w="9525" cap="flat" cmpd="sng" algn="ctr">
                       <a:solidFill>
                         <a:schemeClr val="bg1">
@@ -9280,7 +9280,7 @@
                       </a:r>
                     </a:p>
                   </a:txBody>
-                  <a:tcPr marL="6750" marR="6750" marT="6750" marB="0" anchor="ctr">
+                  <a:tcPr marL="6750" marR="6750" marT="6750" marB="6750" anchor="ctr">
                     <a:lnL w="9525" cap="flat" cmpd="sng" algn="ctr">
                       <a:solidFill>
                         <a:schemeClr val="bg1">
@@ -9352,7 +9352,7 @@
                       </a:r>
                     </a:p>
                   </a:txBody>
-                  <a:tcPr marL="81005" marR="6750" marT="6750" marB="0" anchor="ctr">
+                  <a:tcPr marL="81005" marR="6750" marT="6750" marB="6750" anchor="ctr">
                     <a:lnL>
                       <a:noFill/>
                     </a:lnL>
@@ -9406,7 +9406,7 @@
                       </a:r>
                     </a:p>
                   </a:txBody>
-                  <a:tcPr marL="81005" marR="6750" marT="6750" marB="0" anchor="ctr">
+                  <a:tcPr marL="81005" marR="6750" marT="6750" marB="6750" anchor="ctr">
                     <a:lnL>
                       <a:noFill/>
                     </a:lnL>
@@ -9462,7 +9462,7 @@
                       </a:r>
                     </a:p>
                   </a:txBody>
-                  <a:tcPr marL="81005" marR="6750" marT="6750" marB="0" anchor="ctr">
+                  <a:tcPr marL="81005" marR="6750" marT="6750" marB="6750" anchor="ctr">
                     <a:lnL>
                       <a:noFill/>
                     </a:lnL>
@@ -9520,7 +9520,7 @@
                       </a:r>
                     </a:p>
                   </a:txBody>
-                  <a:tcPr marL="81005" marR="6750" marT="6750" marB="0" anchor="ctr">
+                  <a:tcPr marL="81005" marR="6750" marT="6750" marB="6750" anchor="ctr">
                     <a:lnL>
                       <a:noFill/>
                     </a:lnL>
@@ -9574,7 +9574,7 @@
                       </a:r>
                     </a:p>
                   </a:txBody>
-                  <a:tcPr marL="81005" marR="6750" marT="6750" marB="0" anchor="ctr">
+                  <a:tcPr marL="81005" marR="6750" marT="6750" marB="6750" anchor="ctr">
                     <a:lnL>
                       <a:noFill/>
                     </a:lnL>
@@ -9630,7 +9630,7 @@
                       </a:r>
                     </a:p>
                   </a:txBody>
-                  <a:tcPr marL="81005" marR="6750" marT="6750" marB="0" anchor="ctr">
+                  <a:tcPr marL="81005" marR="6750" marT="6750" marB="6750" anchor="ctr">
                     <a:lnL>
                       <a:noFill/>
                     </a:lnL>
@@ -9688,7 +9688,7 @@
                       </a:r>
                     </a:p>
                   </a:txBody>
-                  <a:tcPr marL="81005" marR="6750" marT="6750" marB="0" anchor="ctr">
+                  <a:tcPr marL="81005" marR="6750" marT="6750" marB="6750" anchor="ctr">
                     <a:lnL>
                       <a:noFill/>
                     </a:lnL>
@@ -9742,7 +9742,7 @@
                       </a:r>
                     </a:p>
                   </a:txBody>
-                  <a:tcPr marL="81005" marR="6750" marT="6750" marB="0" anchor="ctr">
+                  <a:tcPr marL="81005" marR="6750" marT="6750" marB="6750" anchor="ctr">
                     <a:lnL>
                       <a:noFill/>
                     </a:lnL>
@@ -9798,7 +9798,7 @@
                       </a:r>
                     </a:p>
                   </a:txBody>
-                  <a:tcPr marL="81005" marR="6750" marT="6750" marB="0" anchor="ctr">
+                  <a:tcPr marL="81005" marR="6750" marT="6750" marB="6750" anchor="ctr">
                     <a:lnL>
                       <a:noFill/>
                     </a:lnL>
@@ -9856,7 +9856,7 @@
                       </a:r>
                     </a:p>
                   </a:txBody>
-                  <a:tcPr marL="81005" marR="6750" marT="6750" marB="0" anchor="ctr">
+                  <a:tcPr marL="81005" marR="6750" marT="6750" marB="6750" anchor="ctr">
                     <a:lnL>
                       <a:noFill/>
                     </a:lnL>
@@ -9910,7 +9910,7 @@
                       </a:r>
                     </a:p>
                   </a:txBody>
-                  <a:tcPr marL="81005" marR="6750" marT="6750" marB="0" anchor="ctr">
+                  <a:tcPr marL="81005" marR="6750" marT="6750" marB="6750" anchor="ctr">
                     <a:lnL>
                       <a:noFill/>
                     </a:lnL>
@@ -9966,7 +9966,7 @@
                       </a:r>
                     </a:p>
                   </a:txBody>
-                  <a:tcPr marL="81005" marR="6750" marT="6750" marB="0" anchor="ctr">
+                  <a:tcPr marL="81005" marR="6750" marT="6750" marB="6750" anchor="ctr">
                     <a:lnL>
                       <a:noFill/>
                     </a:lnL>
@@ -10024,7 +10024,7 @@
                       </a:r>
                     </a:p>
                   </a:txBody>
-                  <a:tcPr marL="81005" marR="6750" marT="6750" marB="0" anchor="ctr">
+                  <a:tcPr marL="81005" marR="6750" marT="6750" marB="6750" anchor="ctr">
                     <a:lnL>
                       <a:noFill/>
                     </a:lnL>
@@ -10078,7 +10078,7 @@
                       </a:r>
                     </a:p>
                   </a:txBody>
-                  <a:tcPr marL="81005" marR="6750" marT="6750" marB="0" anchor="ctr">
+                  <a:tcPr marL="81005" marR="6750" marT="6750" marB="6750" anchor="ctr">
                     <a:lnL>
                       <a:noFill/>
                     </a:lnL>
@@ -10134,7 +10134,7 @@
                       </a:r>
                     </a:p>
                   </a:txBody>
-                  <a:tcPr marL="81005" marR="6750" marT="6750" marB="0" anchor="ctr">
+                  <a:tcPr marL="81005" marR="6750" marT="6750" marB="6750" anchor="ctr">
                     <a:lnL>
                       <a:noFill/>
                     </a:lnL>
@@ -10192,7 +10192,7 @@
                       </a:r>
                     </a:p>
                   </a:txBody>
-                  <a:tcPr marL="81005" marR="6750" marT="6750" marB="0" anchor="ctr">
+                  <a:tcPr marL="81005" marR="6750" marT="6750" marB="6750" anchor="ctr">
                     <a:lnL>
                       <a:noFill/>
                     </a:lnL>
@@ -10246,7 +10246,7 @@
                       </a:r>
                     </a:p>
                   </a:txBody>
-                  <a:tcPr marL="81005" marR="6750" marT="6750" marB="0" anchor="ctr">
+                  <a:tcPr marL="81005" marR="6750" marT="6750" marB="6750" anchor="ctr">
                     <a:lnL>
                       <a:noFill/>
                     </a:lnL>
@@ -10302,7 +10302,7 @@
                       </a:r>
                     </a:p>
                   </a:txBody>
-                  <a:tcPr marL="81005" marR="6750" marT="6750" marB="0" anchor="ctr">
+                  <a:tcPr marL="81005" marR="6750" marT="6750" marB="6750" anchor="ctr">
                     <a:lnL>
                       <a:noFill/>
                     </a:lnL>
@@ -10360,7 +10360,7 @@
                       </a:r>
                     </a:p>
                   </a:txBody>
-                  <a:tcPr marL="81005" marR="6750" marT="6750" marB="0" anchor="ctr">
+                  <a:tcPr marL="81005" marR="6750" marT="6750" marB="6750" anchor="ctr">
                     <a:lnL>
                       <a:noFill/>
                     </a:lnL>
@@ -10414,7 +10414,7 @@
                       </a:r>
                     </a:p>
                   </a:txBody>
-                  <a:tcPr marL="81005" marR="6750" marT="6750" marB="0" anchor="ctr">
+                  <a:tcPr marL="81005" marR="6750" marT="6750" marB="6750" anchor="ctr">
                     <a:lnL>
                       <a:noFill/>
                     </a:lnL>
@@ -10470,7 +10470,7 @@
                       </a:r>
                     </a:p>
                   </a:txBody>
-                  <a:tcPr marL="81005" marR="6750" marT="6750" marB="0" anchor="ctr">
+                  <a:tcPr marL="81005" marR="6750" marT="6750" marB="6750" anchor="ctr">
                     <a:lnL>
                       <a:noFill/>
                     </a:lnL>
@@ -11593,8 +11593,8 @@
           </p:nvPr>
         </p:nvGraphicFramePr>
         <p:xfrm>
-          <a:off x="657416" y="2624628"/>
-          <a:ext cx="7815580" cy="3873500"/>
+          <a:off x="517715" y="2624628"/>
+          <a:ext cx="8094980" cy="3873500"/>
         </p:xfrm>
         <a:graphic>
           <a:graphicData uri="http://schemas.openxmlformats.org/drawingml/2006/table">
@@ -11602,7 +11602,7 @@
               <a:tblPr/>
               <a:tblGrid>
                 <a:gridCol w="1366520"/>
-                <a:gridCol w="2623820"/>
+                <a:gridCol w="2903220"/>
                 <a:gridCol w="3825240"/>
               </a:tblGrid>
               <a:tr h="288000">
@@ -11628,7 +11628,7 @@
                       </a:r>
                     </a:p>
                   </a:txBody>
-                  <a:tcPr marL="6750" marR="6750" marT="6750" marB="0" anchor="ctr">
+                  <a:tcPr marL="6750" marR="6750" marT="6750" marB="6750" anchor="ctr">
                     <a:lnL>
                       <a:noFill/>
                     </a:lnL>
@@ -11690,7 +11690,7 @@
                       </a:r>
                     </a:p>
                   </a:txBody>
-                  <a:tcPr marL="6750" marR="6750" marT="6750" marB="0" anchor="ctr">
+                  <a:tcPr marL="6750" marR="6750" marT="6750" marB="6750" anchor="ctr">
                     <a:lnL w="9525" cap="flat" cmpd="sng" algn="ctr">
                       <a:solidFill>
                         <a:schemeClr val="bg1">
@@ -11756,11 +11756,11 @@
                           <a:ea typeface="맑은 고딕" panose="020B0503020000020004" pitchFamily="34" charset="-127"/>
                           <a:cs typeface="맑은 고딕"/>
                         </a:rPr>
-                        <a:t>주문한다에서 쓰는 자리</a:t>
+                        <a:t>주문한다에서 사용하는 자리</a:t>
                       </a:r>
                     </a:p>
                   </a:txBody>
-                  <a:tcPr marL="6750" marR="6750" marT="6750" marB="0" anchor="ctr">
+                  <a:tcPr marL="6750" marR="6750" marT="6750" marB="6750" anchor="ctr">
                     <a:lnL w="9525" cap="flat" cmpd="sng" algn="ctr">
                       <a:solidFill>
                         <a:schemeClr val="bg1">
@@ -11832,7 +11832,7 @@
                       </a:r>
                     </a:p>
                   </a:txBody>
-                  <a:tcPr marL="81005" marR="6750" marT="6750" marB="0" anchor="ctr">
+                  <a:tcPr marL="81005" marR="6750" marT="6750" marB="6750" anchor="ctr">
                     <a:lnL>
                       <a:noFill/>
                     </a:lnL>
@@ -11886,7 +11886,7 @@
                       </a:r>
                     </a:p>
                   </a:txBody>
-                  <a:tcPr marL="81005" marR="6750" marT="6750" marB="0" anchor="ctr">
+                  <a:tcPr marL="81005" marR="6750" marT="6750" marB="6750" anchor="ctr">
                     <a:lnL>
                       <a:noFill/>
                     </a:lnL>
@@ -11942,7 +11942,7 @@
                       </a:r>
                     </a:p>
                   </a:txBody>
-                  <a:tcPr marL="81005" marR="6750" marT="6750" marB="0" anchor="ctr">
+                  <a:tcPr marL="81005" marR="6750" marT="6750" marB="6750" anchor="ctr">
                     <a:lnL>
                       <a:noFill/>
                     </a:lnL>
@@ -12000,7 +12000,7 @@
                       </a:r>
                     </a:p>
                   </a:txBody>
-                  <a:tcPr marL="81005" marR="6750" marT="6750" marB="0" anchor="ctr">
+                  <a:tcPr marL="81005" marR="6750" marT="6750" marB="6750" anchor="ctr">
                     <a:lnL>
                       <a:noFill/>
                     </a:lnL>
@@ -12054,7 +12054,7 @@
                       </a:r>
                     </a:p>
                   </a:txBody>
-                  <a:tcPr marL="81005" marR="6750" marT="6750" marB="0" anchor="ctr">
+                  <a:tcPr marL="81005" marR="6750" marT="6750" marB="6750" anchor="ctr">
                     <a:lnL>
                       <a:noFill/>
                     </a:lnL>
@@ -12110,7 +12110,7 @@
                       </a:r>
                     </a:p>
                   </a:txBody>
-                  <a:tcPr marL="81005" marR="6750" marT="6750" marB="0" anchor="ctr">
+                  <a:tcPr marL="81005" marR="6750" marT="6750" marB="6750" anchor="ctr">
                     <a:lnL>
                       <a:noFill/>
                     </a:lnL>
@@ -12168,7 +12168,7 @@
                       </a:r>
                     </a:p>
                   </a:txBody>
-                  <a:tcPr marL="81005" marR="6750" marT="6750" marB="0" anchor="ctr">
+                  <a:tcPr marL="81005" marR="6750" marT="6750" marB="6750" anchor="ctr">
                     <a:lnL>
                       <a:noFill/>
                     </a:lnL>
@@ -12222,7 +12222,7 @@
                       </a:r>
                     </a:p>
                   </a:txBody>
-                  <a:tcPr marL="81005" marR="6750" marT="6750" marB="0" anchor="ctr">
+                  <a:tcPr marL="81005" marR="6750" marT="6750" marB="6750" anchor="ctr">
                     <a:lnL>
                       <a:noFill/>
                     </a:lnL>
@@ -12278,7 +12278,7 @@
                       </a:r>
                     </a:p>
                   </a:txBody>
-                  <a:tcPr marL="81005" marR="6750" marT="6750" marB="0" anchor="ctr">
+                  <a:tcPr marL="81005" marR="6750" marT="6750" marB="6750" anchor="ctr">
                     <a:lnL>
                       <a:noFill/>
                     </a:lnL>
@@ -12336,7 +12336,7 @@
                       </a:r>
                     </a:p>
                   </a:txBody>
-                  <a:tcPr marL="81005" marR="6750" marT="6750" marB="0" anchor="ctr">
+                  <a:tcPr marL="81005" marR="6750" marT="6750" marB="6750" anchor="ctr">
                     <a:lnL>
                       <a:noFill/>
                     </a:lnL>
@@ -12386,11 +12386,11 @@
                           <a:ea typeface="맑은 고딕" panose="020B0503020000020004" pitchFamily="34" charset="-127"/>
                           <a:cs typeface="맑은 고딕"/>
                         </a:rPr>
-                        <a:t>쓰는 쪽이 필요 없는 것을 아는가?</a:t>
+                        <a:t>사용하는 쪽이 필요 없는 것을 아는가?</a:t>
                       </a:r>
                     </a:p>
                   </a:txBody>
-                  <a:tcPr marL="81005" marR="6750" marT="6750" marB="0" anchor="ctr">
+                  <a:tcPr marL="81005" marR="6750" marT="6750" marB="6750" anchor="ctr">
                     <a:lnL>
                       <a:noFill/>
                     </a:lnL>
@@ -12446,7 +12446,7 @@
                       </a:r>
                     </a:p>
                   </a:txBody>
-                  <a:tcPr marL="81005" marR="6750" marT="6750" marB="0" anchor="ctr">
+                  <a:tcPr marL="81005" marR="6750" marT="6750" marB="6750" anchor="ctr">
                     <a:lnL>
                       <a:noFill/>
                     </a:lnL>
@@ -12504,7 +12504,7 @@
                       </a:r>
                     </a:p>
                   </a:txBody>
-                  <a:tcPr marL="81005" marR="6750" marT="6750" marB="0" anchor="ctr">
+                  <a:tcPr marL="81005" marR="6750" marT="6750" marB="6750" anchor="ctr">
                     <a:lnL>
                       <a:noFill/>
                     </a:lnL>
@@ -12558,7 +12558,7 @@
                       </a:r>
                     </a:p>
                   </a:txBody>
-                  <a:tcPr marL="81005" marR="6750" marT="6750" marB="0" anchor="ctr">
+                  <a:tcPr marL="81005" marR="6750" marT="6750" marB="6750" anchor="ctr">
                     <a:lnL>
                       <a:noFill/>
                     </a:lnL>
@@ -12614,7 +12614,7 @@
                       </a:r>
                     </a:p>
                   </a:txBody>
-                  <a:tcPr marL="81005" marR="6750" marT="6750" marB="0" anchor="ctr">
+                  <a:tcPr marL="81005" marR="6750" marT="6750" marB="6750" anchor="ctr">
                     <a:lnL>
                       <a:noFill/>
                     </a:lnL>
@@ -12935,7 +12935,7 @@
                 <a:latin typeface="맑은 고딕"/>
                 <a:ea typeface="맑은 고딕"/>
               </a:rPr>
-              <a:t>다섯 원칙이 묻는 것</a:t>
+              <a:t>5원칙이 묻는 것</a:t>
             </a:r>
           </a:p>
         </p:txBody>
@@ -13731,7 +13731,7 @@
                 <a:latin typeface="맑은 고딕"/>
                 <a:ea typeface="맑은 고딕"/>
               </a:rPr>
-              <a:t>결제만 쓰는 자리에서도 배송과 상품을 안다.</a:t>
+              <a:t>결제만 사용하는 자리에서도 배송과 상품을 안다.</a:t>
             </a:r>
             <a:r>
               <a:rPr sz="1800" b="0">
@@ -13774,7 +13774,7 @@
                 <a:latin typeface="맑은 고딕"/>
                 <a:ea typeface="맑은 고딕"/>
               </a:rPr>
-              <a:t>쓰는 쪽</a:t>
+              <a:t>사용하는 쪽</a:t>
             </a:r>
             <a:r>
               <a:rPr sz="1800" b="0">
@@ -14884,7 +14884,7 @@
                 <a:latin typeface="맑은 고딕"/>
                 <a:ea typeface="맑은 고딕"/>
               </a:rPr>
-              <a:t>SOLID 다섯 원칙</a:t>
+              <a:t>SOLID 5원칙</a:t>
             </a:r>
             <a:r>
               <a:rPr sz="1800" b="0">
@@ -15579,7 +15579,7 @@
                       </a:r>
                     </a:p>
                   </a:txBody>
-                  <a:tcPr marL="6750" marR="6750" marT="6750" marB="0" anchor="ctr">
+                  <a:tcPr marL="6750" marR="6750" marT="6750" marB="6750" anchor="ctr">
                     <a:lnL>
                       <a:noFill/>
                     </a:lnL>
@@ -15641,7 +15641,7 @@
                       </a:r>
                     </a:p>
                   </a:txBody>
-                  <a:tcPr marL="6750" marR="6750" marT="6750" marB="0" anchor="ctr">
+                  <a:tcPr marL="6750" marR="6750" marT="6750" marB="6750" anchor="ctr">
                     <a:lnL w="9525" cap="flat" cmpd="sng" algn="ctr">
                       <a:solidFill>
                         <a:schemeClr val="bg1">
@@ -15711,7 +15711,7 @@
                       </a:r>
                     </a:p>
                   </a:txBody>
-                  <a:tcPr marL="6750" marR="6750" marT="6750" marB="0" anchor="ctr">
+                  <a:tcPr marL="6750" marR="6750" marT="6750" marB="6750" anchor="ctr">
                     <a:lnL w="9525" cap="flat" cmpd="sng" algn="ctr">
                       <a:solidFill>
                         <a:schemeClr val="bg1">
@@ -15783,7 +15783,7 @@
                       </a:r>
                     </a:p>
                   </a:txBody>
-                  <a:tcPr marL="81005" marR="6750" marT="6750" marB="0" anchor="ctr">
+                  <a:tcPr marL="81005" marR="6750" marT="6750" marB="6750" anchor="ctr">
                     <a:lnL>
                       <a:noFill/>
                     </a:lnL>
@@ -15837,7 +15837,7 @@
                       </a:r>
                     </a:p>
                   </a:txBody>
-                  <a:tcPr marL="81005" marR="6750" marT="6750" marB="0" anchor="ctr">
+                  <a:tcPr marL="81005" marR="6750" marT="6750" marB="6750" anchor="ctr">
                     <a:lnL>
                       <a:noFill/>
                     </a:lnL>
@@ -15893,7 +15893,7 @@
                       </a:r>
                     </a:p>
                   </a:txBody>
-                  <a:tcPr marL="81005" marR="6750" marT="6750" marB="0" anchor="ctr">
+                  <a:tcPr marL="81005" marR="6750" marT="6750" marB="6750" anchor="ctr">
                     <a:lnL>
                       <a:noFill/>
                     </a:lnL>
@@ -15951,7 +15951,7 @@
                       </a:r>
                     </a:p>
                   </a:txBody>
-                  <a:tcPr marL="81005" marR="6750" marT="6750" marB="0" anchor="ctr">
+                  <a:tcPr marL="81005" marR="6750" marT="6750" marB="6750" anchor="ctr">
                     <a:lnL>
                       <a:noFill/>
                     </a:lnL>
@@ -16005,7 +16005,7 @@
                       </a:r>
                     </a:p>
                   </a:txBody>
-                  <a:tcPr marL="81005" marR="6750" marT="6750" marB="0" anchor="ctr">
+                  <a:tcPr marL="81005" marR="6750" marT="6750" marB="6750" anchor="ctr">
                     <a:lnL>
                       <a:noFill/>
                     </a:lnL>
@@ -16061,7 +16061,7 @@
                       </a:r>
                     </a:p>
                   </a:txBody>
-                  <a:tcPr marL="81005" marR="6750" marT="6750" marB="0" anchor="ctr">
+                  <a:tcPr marL="81005" marR="6750" marT="6750" marB="6750" anchor="ctr">
                     <a:lnL>
                       <a:noFill/>
                     </a:lnL>
@@ -16119,7 +16119,7 @@
                       </a:r>
                     </a:p>
                   </a:txBody>
-                  <a:tcPr marL="81005" marR="6750" marT="6750" marB="0" anchor="ctr">
+                  <a:tcPr marL="81005" marR="6750" marT="6750" marB="6750" anchor="ctr">
                     <a:lnL>
                       <a:noFill/>
                     </a:lnL>
@@ -16173,7 +16173,7 @@
                       </a:r>
                     </a:p>
                   </a:txBody>
-                  <a:tcPr marL="81005" marR="6750" marT="6750" marB="0" anchor="ctr">
+                  <a:tcPr marL="81005" marR="6750" marT="6750" marB="6750" anchor="ctr">
                     <a:lnL>
                       <a:noFill/>
                     </a:lnL>
@@ -16229,7 +16229,7 @@
                       </a:r>
                     </a:p>
                   </a:txBody>
-                  <a:tcPr marL="81005" marR="6750" marT="6750" marB="0" anchor="ctr">
+                  <a:tcPr marL="81005" marR="6750" marT="6750" marB="6750" anchor="ctr">
                     <a:lnL>
                       <a:noFill/>
                     </a:lnL>
@@ -16368,7 +16368,7 @@
                 <a:latin typeface="맑은 고딕"/>
                 <a:ea typeface="맑은 고딕"/>
               </a:rPr>
-              <a:t>돌아간다.</a:t>
+              <a:t>동작한다.</a:t>
             </a:r>
             <a:r>
               <a:rPr sz="1800" b="0">
@@ -16599,7 +16599,7 @@
                       </a:r>
                     </a:p>
                   </a:txBody>
-                  <a:tcPr marL="6750" marR="6750" marT="6750" marB="0" anchor="ctr">
+                  <a:tcPr marL="6750" marR="6750" marT="6750" marB="6750" anchor="ctr">
                     <a:lnL>
                       <a:noFill/>
                     </a:lnL>
@@ -16661,7 +16661,7 @@
                       </a:r>
                     </a:p>
                   </a:txBody>
-                  <a:tcPr marL="6750" marR="6750" marT="6750" marB="0" anchor="ctr">
+                  <a:tcPr marL="6750" marR="6750" marT="6750" marB="6750" anchor="ctr">
                     <a:lnL w="9525" cap="flat" cmpd="sng" algn="ctr">
                       <a:solidFill>
                         <a:schemeClr val="bg1">
@@ -16731,7 +16731,7 @@
                       </a:r>
                     </a:p>
                   </a:txBody>
-                  <a:tcPr marL="6750" marR="6750" marT="6750" marB="0" anchor="ctr">
+                  <a:tcPr marL="6750" marR="6750" marT="6750" marB="6750" anchor="ctr">
                     <a:lnL w="9525" cap="flat" cmpd="sng" algn="ctr">
                       <a:solidFill>
                         <a:schemeClr val="bg1">
@@ -16803,7 +16803,7 @@
                       </a:r>
                     </a:p>
                   </a:txBody>
-                  <a:tcPr marL="81005" marR="6750" marT="6750" marB="0" anchor="ctr">
+                  <a:tcPr marL="81005" marR="6750" marT="6750" marB="6750" anchor="ctr">
                     <a:lnL>
                       <a:noFill/>
                     </a:lnL>
@@ -16857,7 +16857,7 @@
                       </a:r>
                     </a:p>
                   </a:txBody>
-                  <a:tcPr marL="81005" marR="6750" marT="6750" marB="0" anchor="ctr">
+                  <a:tcPr marL="81005" marR="6750" marT="6750" marB="6750" anchor="ctr">
                     <a:lnL>
                       <a:noFill/>
                     </a:lnL>
@@ -16913,7 +16913,7 @@
                       </a:r>
                     </a:p>
                   </a:txBody>
-                  <a:tcPr marL="81005" marR="6750" marT="6750" marB="0" anchor="ctr">
+                  <a:tcPr marL="81005" marR="6750" marT="6750" marB="6750" anchor="ctr">
                     <a:lnL>
                       <a:noFill/>
                     </a:lnL>
@@ -16971,7 +16971,7 @@
                       </a:r>
                     </a:p>
                   </a:txBody>
-                  <a:tcPr marL="81005" marR="6750" marT="6750" marB="0" anchor="ctr">
+                  <a:tcPr marL="81005" marR="6750" marT="6750" marB="6750" anchor="ctr">
                     <a:lnL>
                       <a:noFill/>
                     </a:lnL>
@@ -17025,7 +17025,7 @@
                       </a:r>
                     </a:p>
                   </a:txBody>
-                  <a:tcPr marL="81005" marR="6750" marT="6750" marB="0" anchor="ctr">
+                  <a:tcPr marL="81005" marR="6750" marT="6750" marB="6750" anchor="ctr">
                     <a:lnL>
                       <a:noFill/>
                     </a:lnL>
@@ -17081,7 +17081,7 @@
                       </a:r>
                     </a:p>
                   </a:txBody>
-                  <a:tcPr marL="81005" marR="6750" marT="6750" marB="0" anchor="ctr">
+                  <a:tcPr marL="81005" marR="6750" marT="6750" marB="6750" anchor="ctr">
                     <a:lnL>
                       <a:noFill/>
                     </a:lnL>
@@ -17139,7 +17139,7 @@
                       </a:r>
                     </a:p>
                   </a:txBody>
-                  <a:tcPr marL="81005" marR="6750" marT="6750" marB="0" anchor="ctr">
+                  <a:tcPr marL="81005" marR="6750" marT="6750" marB="6750" anchor="ctr">
                     <a:lnL>
                       <a:noFill/>
                     </a:lnL>
@@ -17193,7 +17193,7 @@
                       </a:r>
                     </a:p>
                   </a:txBody>
-                  <a:tcPr marL="81005" marR="6750" marT="6750" marB="0" anchor="ctr">
+                  <a:tcPr marL="81005" marR="6750" marT="6750" marB="6750" anchor="ctr">
                     <a:lnL>
                       <a:noFill/>
                     </a:lnL>
@@ -17249,7 +17249,7 @@
                       </a:r>
                     </a:p>
                   </a:txBody>
-                  <a:tcPr marL="81005" marR="6750" marT="6750" marB="0" anchor="ctr">
+                  <a:tcPr marL="81005" marR="6750" marT="6750" marB="6750" anchor="ctr">
                     <a:lnL>
                       <a:noFill/>
                     </a:lnL>
@@ -17307,7 +17307,7 @@
                       </a:r>
                     </a:p>
                   </a:txBody>
-                  <a:tcPr marL="81005" marR="6750" marT="6750" marB="0" anchor="ctr">
+                  <a:tcPr marL="81005" marR="6750" marT="6750" marB="6750" anchor="ctr">
                     <a:lnL>
                       <a:noFill/>
                     </a:lnL>
@@ -17361,7 +17361,7 @@
                       </a:r>
                     </a:p>
                   </a:txBody>
-                  <a:tcPr marL="81005" marR="6750" marT="6750" marB="0" anchor="ctr">
+                  <a:tcPr marL="81005" marR="6750" marT="6750" marB="6750" anchor="ctr">
                     <a:lnL>
                       <a:noFill/>
                     </a:lnL>
@@ -17417,7 +17417,7 @@
                       </a:r>
                     </a:p>
                   </a:txBody>
-                  <a:tcPr marL="81005" marR="6750" marT="6750" marB="0" anchor="ctr">
+                  <a:tcPr marL="81005" marR="6750" marT="6750" marB="6750" anchor="ctr">
                     <a:lnL>
                       <a:noFill/>
                     </a:lnL>
@@ -17475,7 +17475,7 @@
                       </a:r>
                     </a:p>
                   </a:txBody>
-                  <a:tcPr marL="81005" marR="6750" marT="6750" marB="0" anchor="ctr">
+                  <a:tcPr marL="81005" marR="6750" marT="6750" marB="6750" anchor="ctr">
                     <a:lnL>
                       <a:noFill/>
                     </a:lnL>
@@ -17529,7 +17529,7 @@
                       </a:r>
                     </a:p>
                   </a:txBody>
-                  <a:tcPr marL="81005" marR="6750" marT="6750" marB="0" anchor="ctr">
+                  <a:tcPr marL="81005" marR="6750" marT="6750" marB="6750" anchor="ctr">
                     <a:lnL>
                       <a:noFill/>
                     </a:lnL>
@@ -17585,7 +17585,7 @@
                       </a:r>
                     </a:p>
                   </a:txBody>
-                  <a:tcPr marL="81005" marR="6750" marT="6750" marB="0" anchor="ctr">
+                  <a:tcPr marL="81005" marR="6750" marT="6750" marB="6750" anchor="ctr">
                     <a:lnL>
                       <a:noFill/>
                     </a:lnL>
@@ -18182,7 +18182,7 @@
                       </a:r>
                     </a:p>
                   </a:txBody>
-                  <a:tcPr marL="6750" marR="6750" marT="6750" marB="0" anchor="ctr">
+                  <a:tcPr marL="6750" marR="6750" marT="6750" marB="6750" anchor="ctr">
                     <a:lnL>
                       <a:noFill/>
                     </a:lnL>
@@ -18244,7 +18244,7 @@
                       </a:r>
                     </a:p>
                   </a:txBody>
-                  <a:tcPr marL="6750" marR="6750" marT="6750" marB="0" anchor="ctr">
+                  <a:tcPr marL="6750" marR="6750" marT="6750" marB="6750" anchor="ctr">
                     <a:lnL w="9525" cap="flat" cmpd="sng" algn="ctr">
                       <a:solidFill>
                         <a:schemeClr val="bg1">
@@ -18314,7 +18314,7 @@
                       </a:r>
                     </a:p>
                   </a:txBody>
-                  <a:tcPr marL="6750" marR="6750" marT="6750" marB="0" anchor="ctr">
+                  <a:tcPr marL="6750" marR="6750" marT="6750" marB="6750" anchor="ctr">
                     <a:lnL w="9525" cap="flat" cmpd="sng" algn="ctr">
                       <a:solidFill>
                         <a:schemeClr val="bg1">
@@ -18386,7 +18386,7 @@
                       </a:r>
                     </a:p>
                   </a:txBody>
-                  <a:tcPr marL="81005" marR="6750" marT="6750" marB="0" anchor="ctr">
+                  <a:tcPr marL="81005" marR="6750" marT="6750" marB="6750" anchor="ctr">
                     <a:lnL>
                       <a:noFill/>
                     </a:lnL>
@@ -18440,7 +18440,7 @@
                       </a:r>
                     </a:p>
                   </a:txBody>
-                  <a:tcPr marL="81005" marR="6750" marT="6750" marB="0" anchor="ctr">
+                  <a:tcPr marL="81005" marR="6750" marT="6750" marB="6750" anchor="ctr">
                     <a:lnL>
                       <a:noFill/>
                     </a:lnL>
@@ -18496,7 +18496,7 @@
                       </a:r>
                     </a:p>
                   </a:txBody>
-                  <a:tcPr marL="81005" marR="6750" marT="6750" marB="0" anchor="ctr">
+                  <a:tcPr marL="81005" marR="6750" marT="6750" marB="6750" anchor="ctr">
                     <a:lnL>
                       <a:noFill/>
                     </a:lnL>
@@ -18554,7 +18554,7 @@
                       </a:r>
                     </a:p>
                   </a:txBody>
-                  <a:tcPr marL="81005" marR="6750" marT="6750" marB="0" anchor="ctr">
+                  <a:tcPr marL="81005" marR="6750" marT="6750" marB="6750" anchor="ctr">
                     <a:lnL>
                       <a:noFill/>
                     </a:lnL>
@@ -18608,7 +18608,7 @@
                       </a:r>
                     </a:p>
                   </a:txBody>
-                  <a:tcPr marL="81005" marR="6750" marT="6750" marB="0" anchor="ctr">
+                  <a:tcPr marL="81005" marR="6750" marT="6750" marB="6750" anchor="ctr">
                     <a:lnL>
                       <a:noFill/>
                     </a:lnL>
@@ -18664,7 +18664,7 @@
                       </a:r>
                     </a:p>
                   </a:txBody>
-                  <a:tcPr marL="81005" marR="6750" marT="6750" marB="0" anchor="ctr">
+                  <a:tcPr marL="81005" marR="6750" marT="6750" marB="6750" anchor="ctr">
                     <a:lnL>
                       <a:noFill/>
                     </a:lnL>
@@ -18722,7 +18722,7 @@
                       </a:r>
                     </a:p>
                   </a:txBody>
-                  <a:tcPr marL="81005" marR="6750" marT="6750" marB="0" anchor="ctr">
+                  <a:tcPr marL="81005" marR="6750" marT="6750" marB="6750" anchor="ctr">
                     <a:lnL>
                       <a:noFill/>
                     </a:lnL>
@@ -18776,7 +18776,7 @@
                       </a:r>
                     </a:p>
                   </a:txBody>
-                  <a:tcPr marL="81005" marR="6750" marT="6750" marB="0" anchor="ctr">
+                  <a:tcPr marL="81005" marR="6750" marT="6750" marB="6750" anchor="ctr">
                     <a:lnL>
                       <a:noFill/>
                     </a:lnL>
@@ -18832,7 +18832,7 @@
                       </a:r>
                     </a:p>
                   </a:txBody>
-                  <a:tcPr marL="81005" marR="6750" marT="6750" marB="0" anchor="ctr">
+                  <a:tcPr marL="81005" marR="6750" marT="6750" marB="6750" anchor="ctr">
                     <a:lnL>
                       <a:noFill/>
                     </a:lnL>
@@ -18890,7 +18890,7 @@
                       </a:r>
                     </a:p>
                   </a:txBody>
-                  <a:tcPr marL="81005" marR="6750" marT="6750" marB="0" anchor="ctr">
+                  <a:tcPr marL="81005" marR="6750" marT="6750" marB="6750" anchor="ctr">
                     <a:lnL>
                       <a:noFill/>
                     </a:lnL>
@@ -18940,11 +18940,11 @@
                           <a:ea typeface="맑은 고딕" panose="020B0503020000020004" pitchFamily="34" charset="-127"/>
                           <a:cs typeface="맑은 고딕"/>
                         </a:rPr>
-                        <a:t>쪼개는 기준과 완료 조건을 정한다</a:t>
+                        <a:t>나누는 기준과 완료 조건을 정한다</a:t>
                       </a:r>
                     </a:p>
                   </a:txBody>
-                  <a:tcPr marL="81005" marR="6750" marT="6750" marB="0" anchor="ctr">
+                  <a:tcPr marL="81005" marR="6750" marT="6750" marB="6750" anchor="ctr">
                     <a:lnL>
                       <a:noFill/>
                     </a:lnL>
@@ -19000,7 +19000,7 @@
                       </a:r>
                     </a:p>
                   </a:txBody>
-                  <a:tcPr marL="81005" marR="6750" marT="6750" marB="0" anchor="ctr">
+                  <a:tcPr marL="81005" marR="6750" marT="6750" marB="6750" anchor="ctr">
                     <a:lnL>
                       <a:noFill/>
                     </a:lnL>
@@ -21053,7 +21053,7 @@
                 <a:latin typeface="맑은 고딕"/>
                 <a:ea typeface="맑은 고딕"/>
               </a:rPr>
-              <a:t>여섯 줄이 </a:t>
+              <a:t>6줄이 </a:t>
             </a:r>
             <a:r>
               <a:rPr sz="1800" b="1">
@@ -21586,7 +21586,7 @@
                 <a:latin typeface="맑은 고딕"/>
                 <a:ea typeface="맑은 고딕"/>
               </a:rPr>
-              <a:t>주문한다의 작업 단위 넷</a:t>
+              <a:t>주문한다의 작업 단위 4개</a:t>
             </a:r>
           </a:p>
           <a:p>
@@ -21737,7 +21737,7 @@
                       </a:r>
                     </a:p>
                   </a:txBody>
-                  <a:tcPr marL="6750" marR="6750" marT="6750" marB="0" anchor="ctr">
+                  <a:tcPr marL="6750" marR="6750" marT="6750" marB="6750" anchor="ctr">
                     <a:lnL>
                       <a:noFill/>
                     </a:lnL>
@@ -21799,7 +21799,7 @@
                       </a:r>
                     </a:p>
                   </a:txBody>
-                  <a:tcPr marL="6750" marR="6750" marT="6750" marB="0" anchor="ctr">
+                  <a:tcPr marL="6750" marR="6750" marT="6750" marB="6750" anchor="ctr">
                     <a:lnL w="9525" cap="flat" cmpd="sng" algn="ctr">
                       <a:solidFill>
                         <a:schemeClr val="bg1">
@@ -21869,7 +21869,7 @@
                       </a:r>
                     </a:p>
                   </a:txBody>
-                  <a:tcPr marL="6750" marR="6750" marT="6750" marB="0" anchor="ctr">
+                  <a:tcPr marL="6750" marR="6750" marT="6750" marB="6750" anchor="ctr">
                     <a:lnL w="9525" cap="flat" cmpd="sng" algn="ctr">
                       <a:solidFill>
                         <a:schemeClr val="bg1">
@@ -21941,7 +21941,7 @@
                       </a:r>
                     </a:p>
                   </a:txBody>
-                  <a:tcPr marL="81005" marR="6750" marT="6750" marB="0" anchor="ctr">
+                  <a:tcPr marL="81005" marR="6750" marT="6750" marB="6750" anchor="ctr">
                     <a:lnL>
                       <a:noFill/>
                     </a:lnL>
@@ -21995,7 +21995,7 @@
                       </a:r>
                     </a:p>
                   </a:txBody>
-                  <a:tcPr marL="81005" marR="6750" marT="6750" marB="0" anchor="ctr">
+                  <a:tcPr marL="81005" marR="6750" marT="6750" marB="6750" anchor="ctr">
                     <a:lnL>
                       <a:noFill/>
                     </a:lnL>
@@ -22051,7 +22051,7 @@
                       </a:r>
                     </a:p>
                   </a:txBody>
-                  <a:tcPr marL="81005" marR="6750" marT="6750" marB="0" anchor="ctr">
+                  <a:tcPr marL="81005" marR="6750" marT="6750" marB="6750" anchor="ctr">
                     <a:lnL>
                       <a:noFill/>
                     </a:lnL>
@@ -22109,7 +22109,7 @@
                       </a:r>
                     </a:p>
                   </a:txBody>
-                  <a:tcPr marL="81005" marR="6750" marT="6750" marB="0" anchor="ctr">
+                  <a:tcPr marL="81005" marR="6750" marT="6750" marB="6750" anchor="ctr">
                     <a:lnL>
                       <a:noFill/>
                     </a:lnL>
@@ -22163,7 +22163,7 @@
                       </a:r>
                     </a:p>
                   </a:txBody>
-                  <a:tcPr marL="81005" marR="6750" marT="6750" marB="0" anchor="ctr">
+                  <a:tcPr marL="81005" marR="6750" marT="6750" marB="6750" anchor="ctr">
                     <a:lnL>
                       <a:noFill/>
                     </a:lnL>
@@ -22219,7 +22219,7 @@
                       </a:r>
                     </a:p>
                   </a:txBody>
-                  <a:tcPr marL="81005" marR="6750" marT="6750" marB="0" anchor="ctr">
+                  <a:tcPr marL="81005" marR="6750" marT="6750" marB="6750" anchor="ctr">
                     <a:lnL>
                       <a:noFill/>
                     </a:lnL>
@@ -22277,7 +22277,7 @@
                       </a:r>
                     </a:p>
                   </a:txBody>
-                  <a:tcPr marL="81005" marR="6750" marT="6750" marB="0" anchor="ctr">
+                  <a:tcPr marL="81005" marR="6750" marT="6750" marB="6750" anchor="ctr">
                     <a:lnL>
                       <a:noFill/>
                     </a:lnL>
@@ -22331,7 +22331,7 @@
                       </a:r>
                     </a:p>
                   </a:txBody>
-                  <a:tcPr marL="81005" marR="6750" marT="6750" marB="0" anchor="ctr">
+                  <a:tcPr marL="81005" marR="6750" marT="6750" marB="6750" anchor="ctr">
                     <a:lnL>
                       <a:noFill/>
                     </a:lnL>
@@ -22387,7 +22387,7 @@
                       </a:r>
                     </a:p>
                   </a:txBody>
-                  <a:tcPr marL="81005" marR="6750" marT="6750" marB="0" anchor="ctr">
+                  <a:tcPr marL="81005" marR="6750" marT="6750" marB="6750" anchor="ctr">
                     <a:lnL>
                       <a:noFill/>
                     </a:lnL>
@@ -22445,7 +22445,7 @@
                       </a:r>
                     </a:p>
                   </a:txBody>
-                  <a:tcPr marL="81005" marR="6750" marT="6750" marB="0" anchor="ctr">
+                  <a:tcPr marL="81005" marR="6750" marT="6750" marB="6750" anchor="ctr">
                     <a:lnL>
                       <a:noFill/>
                     </a:lnL>
@@ -22499,7 +22499,7 @@
                       </a:r>
                     </a:p>
                   </a:txBody>
-                  <a:tcPr marL="81005" marR="6750" marT="6750" marB="0" anchor="ctr">
+                  <a:tcPr marL="81005" marR="6750" marT="6750" marB="6750" anchor="ctr">
                     <a:lnL>
                       <a:noFill/>
                     </a:lnL>
@@ -22555,7 +22555,7 @@
                       </a:r>
                     </a:p>
                   </a:txBody>
-                  <a:tcPr marL="81005" marR="6750" marT="6750" marB="0" anchor="ctr">
+                  <a:tcPr marL="81005" marR="6750" marT="6750" marB="6750" anchor="ctr">
                     <a:lnL>
                       <a:noFill/>
                     </a:lnL>
@@ -23119,7 +23119,7 @@
                       </a:r>
                     </a:p>
                   </a:txBody>
-                  <a:tcPr marL="6750" marR="6750" marT="6750" marB="0" anchor="ctr">
+                  <a:tcPr marL="6750" marR="6750" marT="6750" marB="6750" anchor="ctr">
                     <a:lnL>
                       <a:noFill/>
                     </a:lnL>
@@ -23181,7 +23181,7 @@
                       </a:r>
                     </a:p>
                   </a:txBody>
-                  <a:tcPr marL="6750" marR="6750" marT="6750" marB="0" anchor="ctr">
+                  <a:tcPr marL="6750" marR="6750" marT="6750" marB="6750" anchor="ctr">
                     <a:lnL w="9525" cap="flat" cmpd="sng" algn="ctr">
                       <a:solidFill>
                         <a:schemeClr val="bg1">
@@ -23251,7 +23251,7 @@
                       </a:r>
                     </a:p>
                   </a:txBody>
-                  <a:tcPr marL="6750" marR="6750" marT="6750" marB="0" anchor="ctr">
+                  <a:tcPr marL="6750" marR="6750" marT="6750" marB="6750" anchor="ctr">
                     <a:lnL w="9525" cap="flat" cmpd="sng" algn="ctr">
                       <a:solidFill>
                         <a:schemeClr val="bg1">
@@ -23323,7 +23323,7 @@
                       </a:r>
                     </a:p>
                   </a:txBody>
-                  <a:tcPr marL="81005" marR="6750" marT="6750" marB="0" anchor="ctr">
+                  <a:tcPr marL="81005" marR="6750" marT="6750" marB="6750" anchor="ctr">
                     <a:lnL>
                       <a:noFill/>
                     </a:lnL>
@@ -23377,7 +23377,7 @@
                       </a:r>
                     </a:p>
                   </a:txBody>
-                  <a:tcPr marL="81005" marR="6750" marT="6750" marB="0" anchor="ctr">
+                  <a:tcPr marL="81005" marR="6750" marT="6750" marB="6750" anchor="ctr">
                     <a:lnL>
                       <a:noFill/>
                     </a:lnL>
@@ -23433,7 +23433,7 @@
                       </a:r>
                     </a:p>
                   </a:txBody>
-                  <a:tcPr marL="81005" marR="6750" marT="6750" marB="0" anchor="ctr">
+                  <a:tcPr marL="81005" marR="6750" marT="6750" marB="6750" anchor="ctr">
                     <a:lnL>
                       <a:noFill/>
                     </a:lnL>
@@ -23491,7 +23491,7 @@
                       </a:r>
                     </a:p>
                   </a:txBody>
-                  <a:tcPr marL="81005" marR="6750" marT="6750" marB="0" anchor="ctr">
+                  <a:tcPr marL="81005" marR="6750" marT="6750" marB="6750" anchor="ctr">
                     <a:lnL>
                       <a:noFill/>
                     </a:lnL>
@@ -23545,7 +23545,7 @@
                       </a:r>
                     </a:p>
                   </a:txBody>
-                  <a:tcPr marL="81005" marR="6750" marT="6750" marB="0" anchor="ctr">
+                  <a:tcPr marL="81005" marR="6750" marT="6750" marB="6750" anchor="ctr">
                     <a:lnL>
                       <a:noFill/>
                     </a:lnL>
@@ -23601,7 +23601,7 @@
                       </a:r>
                     </a:p>
                   </a:txBody>
-                  <a:tcPr marL="81005" marR="6750" marT="6750" marB="0" anchor="ctr">
+                  <a:tcPr marL="81005" marR="6750" marT="6750" marB="6750" anchor="ctr">
                     <a:lnL>
                       <a:noFill/>
                     </a:lnL>
@@ -23659,7 +23659,7 @@
                       </a:r>
                     </a:p>
                   </a:txBody>
-                  <a:tcPr marL="81005" marR="6750" marT="6750" marB="0" anchor="ctr">
+                  <a:tcPr marL="81005" marR="6750" marT="6750" marB="6750" anchor="ctr">
                     <a:lnL>
                       <a:noFill/>
                     </a:lnL>
@@ -23713,7 +23713,7 @@
                       </a:r>
                     </a:p>
                   </a:txBody>
-                  <a:tcPr marL="81005" marR="6750" marT="6750" marB="0" anchor="ctr">
+                  <a:tcPr marL="81005" marR="6750" marT="6750" marB="6750" anchor="ctr">
                     <a:lnL>
                       <a:noFill/>
                     </a:lnL>
@@ -23765,11 +23765,11 @@
                           <a:ea typeface="맑은 고딕" panose="020B0503020000020004" pitchFamily="34" charset="-127"/>
                           <a:cs typeface="맑은 고딕"/>
                         </a:rPr>
-                        <a:t>인터페이스를 썼다는 설명</a:t>
+                        <a:t>인터페이스를 작성했다는 설명</a:t>
                       </a:r>
                     </a:p>
                   </a:txBody>
-                  <a:tcPr marL="81005" marR="6750" marT="6750" marB="0" anchor="ctr">
+                  <a:tcPr marL="81005" marR="6750" marT="6750" marB="6750" anchor="ctr">
                     <a:lnL>
                       <a:noFill/>
                     </a:lnL>
@@ -23827,7 +23827,7 @@
                       </a:r>
                     </a:p>
                   </a:txBody>
-                  <a:tcPr marL="81005" marR="6750" marT="6750" marB="0" anchor="ctr">
+                  <a:tcPr marL="81005" marR="6750" marT="6750" marB="6750" anchor="ctr">
                     <a:lnL>
                       <a:noFill/>
                     </a:lnL>
@@ -23881,7 +23881,7 @@
                       </a:r>
                     </a:p>
                   </a:txBody>
-                  <a:tcPr marL="81005" marR="6750" marT="6750" marB="0" anchor="ctr">
+                  <a:tcPr marL="81005" marR="6750" marT="6750" marB="6750" anchor="ctr">
                     <a:lnL>
                       <a:noFill/>
                     </a:lnL>
@@ -23933,11 +23933,11 @@
                           <a:ea typeface="맑은 고딕" panose="020B0503020000020004" pitchFamily="34" charset="-127"/>
                           <a:cs typeface="맑은 고딕"/>
                         </a:rPr>
-                        <a:t>포트를 썼다는 설명</a:t>
+                        <a:t>포트를 작성했다는 설명</a:t>
                       </a:r>
                     </a:p>
                   </a:txBody>
-                  <a:tcPr marL="81005" marR="6750" marT="6750" marB="0" anchor="ctr">
+                  <a:tcPr marL="81005" marR="6750" marT="6750" marB="6750" anchor="ctr">
                     <a:lnL>
                       <a:noFill/>
                     </a:lnL>
@@ -23995,7 +23995,7 @@
                       </a:r>
                     </a:p>
                   </a:txBody>
-                  <a:tcPr marL="81005" marR="6750" marT="6750" marB="0" anchor="ctr">
+                  <a:tcPr marL="81005" marR="6750" marT="6750" marB="6750" anchor="ctr">
                     <a:lnL>
                       <a:noFill/>
                     </a:lnL>
@@ -24049,7 +24049,7 @@
                       </a:r>
                     </a:p>
                   </a:txBody>
-                  <a:tcPr marL="81005" marR="6750" marT="6750" marB="0" anchor="ctr">
+                  <a:tcPr marL="81005" marR="6750" marT="6750" marB="6750" anchor="ctr">
                     <a:lnL>
                       <a:noFill/>
                     </a:lnL>
@@ -24105,7 +24105,7 @@
                       </a:r>
                     </a:p>
                   </a:txBody>
-                  <a:tcPr marL="81005" marR="6750" marT="6750" marB="0" anchor="ctr">
+                  <a:tcPr marL="81005" marR="6750" marT="6750" marB="6750" anchor="ctr">
                     <a:lnL>
                       <a:noFill/>
                     </a:lnL>
@@ -26160,7 +26160,7 @@
                       </a:r>
                     </a:p>
                   </a:txBody>
-                  <a:tcPr marL="6750" marR="6750" marT="6750" marB="0" anchor="ctr">
+                  <a:tcPr marL="6750" marR="6750" marT="6750" marB="6750" anchor="ctr">
                     <a:lnL>
                       <a:noFill/>
                     </a:lnL>
@@ -26222,7 +26222,7 @@
                       </a:r>
                     </a:p>
                   </a:txBody>
-                  <a:tcPr marL="6750" marR="6750" marT="6750" marB="0" anchor="ctr">
+                  <a:tcPr marL="6750" marR="6750" marT="6750" marB="6750" anchor="ctr">
                     <a:lnL w="9525" cap="flat" cmpd="sng" algn="ctr">
                       <a:solidFill>
                         <a:schemeClr val="bg1">
@@ -26292,7 +26292,7 @@
                       </a:r>
                     </a:p>
                   </a:txBody>
-                  <a:tcPr marL="6750" marR="6750" marT="6750" marB="0" anchor="ctr">
+                  <a:tcPr marL="6750" marR="6750" marT="6750" marB="6750" anchor="ctr">
                     <a:lnL w="9525" cap="flat" cmpd="sng" algn="ctr">
                       <a:solidFill>
                         <a:schemeClr val="bg1">
@@ -26364,7 +26364,7 @@
                       </a:r>
                     </a:p>
                   </a:txBody>
-                  <a:tcPr marL="81005" marR="6750" marT="6750" marB="0" anchor="ctr">
+                  <a:tcPr marL="81005" marR="6750" marT="6750" marB="6750" anchor="ctr">
                     <a:lnL>
                       <a:noFill/>
                     </a:lnL>
@@ -26418,7 +26418,7 @@
                       </a:r>
                     </a:p>
                   </a:txBody>
-                  <a:tcPr marL="81005" marR="6750" marT="6750" marB="0" anchor="ctr">
+                  <a:tcPr marL="81005" marR="6750" marT="6750" marB="6750" anchor="ctr">
                     <a:lnL>
                       <a:noFill/>
                     </a:lnL>
@@ -26474,7 +26474,7 @@
                       </a:r>
                     </a:p>
                   </a:txBody>
-                  <a:tcPr marL="81005" marR="6750" marT="6750" marB="0" anchor="ctr">
+                  <a:tcPr marL="81005" marR="6750" marT="6750" marB="6750" anchor="ctr">
                     <a:lnL>
                       <a:noFill/>
                     </a:lnL>
@@ -26532,7 +26532,7 @@
                       </a:r>
                     </a:p>
                   </a:txBody>
-                  <a:tcPr marL="81005" marR="6750" marT="6750" marB="0" anchor="ctr">
+                  <a:tcPr marL="81005" marR="6750" marT="6750" marB="6750" anchor="ctr">
                     <a:lnL>
                       <a:noFill/>
                     </a:lnL>
@@ -26586,7 +26586,7 @@
                       </a:r>
                     </a:p>
                   </a:txBody>
-                  <a:tcPr marL="81005" marR="6750" marT="6750" marB="0" anchor="ctr">
+                  <a:tcPr marL="81005" marR="6750" marT="6750" marB="6750" anchor="ctr">
                     <a:lnL>
                       <a:noFill/>
                     </a:lnL>
@@ -26642,7 +26642,7 @@
                       </a:r>
                     </a:p>
                   </a:txBody>
-                  <a:tcPr marL="81005" marR="6750" marT="6750" marB="0" anchor="ctr">
+                  <a:tcPr marL="81005" marR="6750" marT="6750" marB="6750" anchor="ctr">
                     <a:lnL>
                       <a:noFill/>
                     </a:lnL>
@@ -26700,7 +26700,7 @@
                       </a:r>
                     </a:p>
                   </a:txBody>
-                  <a:tcPr marL="81005" marR="6750" marT="6750" marB="0" anchor="ctr">
+                  <a:tcPr marL="81005" marR="6750" marT="6750" marB="6750" anchor="ctr">
                     <a:lnL>
                       <a:noFill/>
                     </a:lnL>
@@ -26754,7 +26754,7 @@
                       </a:r>
                     </a:p>
                   </a:txBody>
-                  <a:tcPr marL="81005" marR="6750" marT="6750" marB="0" anchor="ctr">
+                  <a:tcPr marL="81005" marR="6750" marT="6750" marB="6750" anchor="ctr">
                     <a:lnL>
                       <a:noFill/>
                     </a:lnL>
@@ -26810,7 +26810,7 @@
                       </a:r>
                     </a:p>
                   </a:txBody>
-                  <a:tcPr marL="81005" marR="6750" marT="6750" marB="0" anchor="ctr">
+                  <a:tcPr marL="81005" marR="6750" marT="6750" marB="6750" anchor="ctr">
                     <a:lnL>
                       <a:noFill/>
                     </a:lnL>
@@ -26868,7 +26868,7 @@
                       </a:r>
                     </a:p>
                   </a:txBody>
-                  <a:tcPr marL="81005" marR="6750" marT="6750" marB="0" anchor="ctr">
+                  <a:tcPr marL="81005" marR="6750" marT="6750" marB="6750" anchor="ctr">
                     <a:lnL>
                       <a:noFill/>
                     </a:lnL>
@@ -26922,7 +26922,7 @@
                       </a:r>
                     </a:p>
                   </a:txBody>
-                  <a:tcPr marL="81005" marR="6750" marT="6750" marB="0" anchor="ctr">
+                  <a:tcPr marL="81005" marR="6750" marT="6750" marB="6750" anchor="ctr">
                     <a:lnL>
                       <a:noFill/>
                     </a:lnL>
@@ -26978,7 +26978,7 @@
                       </a:r>
                     </a:p>
                   </a:txBody>
-                  <a:tcPr marL="81005" marR="6750" marT="6750" marB="0" anchor="ctr">
+                  <a:tcPr marL="81005" marR="6750" marT="6750" marB="6750" anchor="ctr">
                     <a:lnL>
                       <a:noFill/>
                     </a:lnL>
@@ -28158,7 +28158,7 @@
                       </a:r>
                     </a:p>
                   </a:txBody>
-                  <a:tcPr marL="6750" marR="6750" marT="6750" marB="0" anchor="ctr">
+                  <a:tcPr marL="6750" marR="6750" marT="6750" marB="6750" anchor="ctr">
                     <a:lnL>
                       <a:noFill/>
                     </a:lnL>
@@ -28220,7 +28220,7 @@
                       </a:r>
                     </a:p>
                   </a:txBody>
-                  <a:tcPr marL="6750" marR="6750" marT="6750" marB="0" anchor="ctr">
+                  <a:tcPr marL="6750" marR="6750" marT="6750" marB="6750" anchor="ctr">
                     <a:lnL w="9525" cap="flat" cmpd="sng" algn="ctr">
                       <a:solidFill>
                         <a:schemeClr val="bg1">
@@ -28290,7 +28290,7 @@
                       </a:r>
                     </a:p>
                   </a:txBody>
-                  <a:tcPr marL="6750" marR="6750" marT="6750" marB="0" anchor="ctr">
+                  <a:tcPr marL="6750" marR="6750" marT="6750" marB="6750" anchor="ctr">
                     <a:lnL w="9525" cap="flat" cmpd="sng" algn="ctr">
                       <a:solidFill>
                         <a:schemeClr val="bg1">
@@ -28360,7 +28360,7 @@
                       </a:r>
                     </a:p>
                   </a:txBody>
-                  <a:tcPr marL="6750" marR="6750" marT="6750" marB="0" anchor="ctr">
+                  <a:tcPr marL="6750" marR="6750" marT="6750" marB="6750" anchor="ctr">
                     <a:lnL w="9525" cap="flat" cmpd="sng" algn="ctr">
                       <a:solidFill>
                         <a:schemeClr val="bg1">
@@ -28432,7 +28432,7 @@
                       </a:r>
                     </a:p>
                   </a:txBody>
-                  <a:tcPr marL="81005" marR="6750" marT="6750" marB="0" anchor="ctr">
+                  <a:tcPr marL="81005" marR="6750" marT="6750" marB="6750" anchor="ctr">
                     <a:lnL>
                       <a:noFill/>
                     </a:lnL>
@@ -28486,7 +28486,7 @@
                       </a:r>
                     </a:p>
                   </a:txBody>
-                  <a:tcPr marL="81005" marR="6750" marT="6750" marB="0" anchor="ctr">
+                  <a:tcPr marL="81005" marR="6750" marT="6750" marB="6750" anchor="ctr">
                     <a:lnL>
                       <a:noFill/>
                     </a:lnL>
@@ -28542,7 +28542,7 @@
                       </a:r>
                     </a:p>
                   </a:txBody>
-                  <a:tcPr marL="81005" marR="6750" marT="6750" marB="0" anchor="ctr">
+                  <a:tcPr marL="81005" marR="6750" marT="6750" marB="6750" anchor="ctr">
                     <a:lnL>
                       <a:noFill/>
                     </a:lnL>
@@ -28598,7 +28598,7 @@
                       </a:r>
                     </a:p>
                   </a:txBody>
-                  <a:tcPr marL="81005" marR="6750" marT="6750" marB="0" anchor="ctr">
+                  <a:tcPr marL="81005" marR="6750" marT="6750" marB="6750" anchor="ctr">
                     <a:lnL>
                       <a:noFill/>
                     </a:lnL>
@@ -28656,7 +28656,7 @@
                       </a:r>
                     </a:p>
                   </a:txBody>
-                  <a:tcPr marL="81005" marR="6750" marT="6750" marB="0" anchor="ctr">
+                  <a:tcPr marL="81005" marR="6750" marT="6750" marB="6750" anchor="ctr">
                     <a:lnL>
                       <a:noFill/>
                     </a:lnL>
@@ -28710,7 +28710,7 @@
                       </a:r>
                     </a:p>
                   </a:txBody>
-                  <a:tcPr marL="81005" marR="6750" marT="6750" marB="0" anchor="ctr">
+                  <a:tcPr marL="81005" marR="6750" marT="6750" marB="6750" anchor="ctr">
                     <a:lnL>
                       <a:noFill/>
                     </a:lnL>
@@ -28766,7 +28766,7 @@
                       </a:r>
                     </a:p>
                   </a:txBody>
-                  <a:tcPr marL="81005" marR="6750" marT="6750" marB="0" anchor="ctr">
+                  <a:tcPr marL="81005" marR="6750" marT="6750" marB="6750" anchor="ctr">
                     <a:lnL>
                       <a:noFill/>
                     </a:lnL>
@@ -28822,7 +28822,7 @@
                       </a:r>
                     </a:p>
                   </a:txBody>
-                  <a:tcPr marL="81005" marR="6750" marT="6750" marB="0" anchor="ctr">
+                  <a:tcPr marL="81005" marR="6750" marT="6750" marB="6750" anchor="ctr">
                     <a:lnL>
                       <a:noFill/>
                     </a:lnL>
@@ -28880,7 +28880,7 @@
                       </a:r>
                     </a:p>
                   </a:txBody>
-                  <a:tcPr marL="81005" marR="6750" marT="6750" marB="0" anchor="ctr">
+                  <a:tcPr marL="81005" marR="6750" marT="6750" marB="6750" anchor="ctr">
                     <a:lnL>
                       <a:noFill/>
                     </a:lnL>
@@ -28934,7 +28934,7 @@
                       </a:r>
                     </a:p>
                   </a:txBody>
-                  <a:tcPr marL="81005" marR="6750" marT="6750" marB="0" anchor="ctr">
+                  <a:tcPr marL="81005" marR="6750" marT="6750" marB="6750" anchor="ctr">
                     <a:lnL>
                       <a:noFill/>
                     </a:lnL>
@@ -28990,7 +28990,7 @@
                       </a:r>
                     </a:p>
                   </a:txBody>
-                  <a:tcPr marL="81005" marR="6750" marT="6750" marB="0" anchor="ctr">
+                  <a:tcPr marL="81005" marR="6750" marT="6750" marB="6750" anchor="ctr">
                     <a:lnL>
                       <a:noFill/>
                     </a:lnL>
@@ -29046,7 +29046,7 @@
                       </a:r>
                     </a:p>
                   </a:txBody>
-                  <a:tcPr marL="81005" marR="6750" marT="6750" marB="0" anchor="ctr">
+                  <a:tcPr marL="81005" marR="6750" marT="6750" marB="6750" anchor="ctr">
                     <a:lnL>
                       <a:noFill/>
                     </a:lnL>
@@ -29254,7 +29254,7 @@
                 <a:latin typeface="맑은 고딕"/>
                 <a:ea typeface="맑은 고딕"/>
               </a:rPr>
-              <a:t>쪼개는 두 방식</a:t>
+              <a:t>나누는 2가지 방식</a:t>
             </a:r>
           </a:p>
         </p:txBody>
@@ -29316,7 +29316,7 @@
                 <a:latin typeface="맑은 고딕"/>
                 <a:ea typeface="맑은 고딕"/>
               </a:rPr>
-              <a:t>세 단위가 다 끝나야</a:t>
+              <a:t>3개 단위가 다 끝나야</a:t>
             </a:r>
             <a:r>
               <a:rPr sz="1800" b="0">
@@ -29326,7 +29326,7 @@
                 <a:latin typeface="맑은 고딕"/>
                 <a:ea typeface="맑은 고딕"/>
               </a:rPr>
-              <a:t> 고객의 행동 하나가 돌아간다. 중간에 멈추면 확인한 것이 없다.</a:t>
+              <a:t> 고객의 행동 하나가 동작한다. 중간에 멈추면 확인한 것이 없다.</a:t>
             </a:r>
           </a:p>
           <a:p>
@@ -29837,7 +29837,7 @@
                 <a:latin typeface="맑은 고딕"/>
                 <a:ea typeface="맑은 고딕"/>
               </a:rPr>
-              <a:t>[앞선 질문에 대한 답] [추가 질문·수정 요청] 인터페이스를 쓰는 쪽마다 나누고, 테스트 대역이 지켜야 할 계약을 사전조건과 사후조건으로 적어라.</a:t>
+              <a:t>[앞선 질문에 대한 답] [추가 질문·수정 요청] 인터페이스를 사용하는 쪽마다 나누고, 테스트 대역이 지켜야 할 계약을 사전조건과 사후조건으로 적어라.</a:t>
             </a:r>
           </a:p>
           <a:p>
@@ -29859,7 +29859,7 @@
                 <a:latin typeface="맑은 고딕"/>
                 <a:ea typeface="맑은 고딕"/>
               </a:rPr>
-              <a:t>[앞선 질문에 대한 답] [추가 질문·수정 요청] 이 기능을 한 번에 검증할 수 있는 작업 단위로 쪼개라. 단위마다 구현할 결과와 완료를 확인할 예, 단위 사이의 순서를 적어라.</a:t>
+              <a:t>[앞선 질문에 대한 답] [추가 질문·수정 요청] 이 기능을 한 번에 검증할 수 있는 작업 단위로 나눠라. 단위마다 구현할 결과와 완료를 확인할 예, 단위 사이의 순서를 적어라.</a:t>
             </a:r>
           </a:p>
         </p:txBody>
@@ -30010,7 +30010,7 @@
                 <a:latin typeface="맑은 고딕"/>
                 <a:ea typeface="맑은 고딕"/>
               </a:rPr>
-              <a:t>, 인터페이스와 오퍼레이션 계약, 작업 단위와 완료 조건으로 구성하고 새 결정을 더하지 마라. 다섯 장 안에 담아라.</a:t>
+              <a:t>, 인터페이스와 오퍼레이션 계약, 작업 단위와 완료 조건으로 구성하고 새 결정을 더하지 마라. 5장 안에 담아라.</a:t>
             </a:r>
           </a:p>
           <a:p>
@@ -30754,7 +30754,7 @@
                 <a:latin typeface="맑은 고딕"/>
                 <a:ea typeface="맑은 고딕"/>
               </a:rPr>
-              <a:t>으로 적고, 불변 조건은 정적 모델이 정한 것을 쓴다.</a:t>
+              <a:t>으로 적고, 불변 조건은 정적 모델이 정한 것을 따른다.</a:t>
             </a:r>
           </a:p>
           <a:p>
@@ -37259,7 +37259,7 @@
                       </a:r>
                     </a:p>
                   </a:txBody>
-                  <a:tcPr marL="6750" marR="6750" marT="6750" marB="0" anchor="ctr">
+                  <a:tcPr marL="6750" marR="6750" marT="6750" marB="6750" anchor="ctr">
                     <a:lnL>
                       <a:noFill/>
                     </a:lnL>
@@ -37321,7 +37321,7 @@
                       </a:r>
                     </a:p>
                   </a:txBody>
-                  <a:tcPr marL="6750" marR="6750" marT="6750" marB="0" anchor="ctr">
+                  <a:tcPr marL="6750" marR="6750" marT="6750" marB="6750" anchor="ctr">
                     <a:lnL w="9525" cap="flat" cmpd="sng" algn="ctr">
                       <a:solidFill>
                         <a:schemeClr val="bg1">
@@ -37391,7 +37391,7 @@
                       </a:r>
                     </a:p>
                   </a:txBody>
-                  <a:tcPr marL="6750" marR="6750" marT="6750" marB="0" anchor="ctr">
+                  <a:tcPr marL="6750" marR="6750" marT="6750" marB="6750" anchor="ctr">
                     <a:lnL w="9525" cap="flat" cmpd="sng" algn="ctr">
                       <a:solidFill>
                         <a:schemeClr val="bg1">
@@ -37463,7 +37463,7 @@
                       </a:r>
                     </a:p>
                   </a:txBody>
-                  <a:tcPr marL="81005" marR="6750" marT="6750" marB="0" anchor="ctr">
+                  <a:tcPr marL="81005" marR="6750" marT="6750" marB="6750" anchor="ctr">
                     <a:lnL>
                       <a:noFill/>
                     </a:lnL>
@@ -37517,7 +37517,7 @@
                       </a:r>
                     </a:p>
                   </a:txBody>
-                  <a:tcPr marL="81005" marR="6750" marT="6750" marB="0" anchor="ctr">
+                  <a:tcPr marL="81005" marR="6750" marT="6750" marB="6750" anchor="ctr">
                     <a:lnL>
                       <a:noFill/>
                     </a:lnL>
@@ -37573,7 +37573,7 @@
                       </a:r>
                     </a:p>
                   </a:txBody>
-                  <a:tcPr marL="81005" marR="6750" marT="6750" marB="0" anchor="ctr">
+                  <a:tcPr marL="81005" marR="6750" marT="6750" marB="6750" anchor="ctr">
                     <a:lnL>
                       <a:noFill/>
                     </a:lnL>
@@ -37631,7 +37631,7 @@
                       </a:r>
                     </a:p>
                   </a:txBody>
-                  <a:tcPr marL="81005" marR="6750" marT="6750" marB="0" anchor="ctr">
+                  <a:tcPr marL="81005" marR="6750" marT="6750" marB="6750" anchor="ctr">
                     <a:lnL>
                       <a:noFill/>
                     </a:lnL>
@@ -37685,7 +37685,7 @@
                       </a:r>
                     </a:p>
                   </a:txBody>
-                  <a:tcPr marL="81005" marR="6750" marT="6750" marB="0" anchor="ctr">
+                  <a:tcPr marL="81005" marR="6750" marT="6750" marB="6750" anchor="ctr">
                     <a:lnL>
                       <a:noFill/>
                     </a:lnL>
@@ -37741,7 +37741,7 @@
                       </a:r>
                     </a:p>
                   </a:txBody>
-                  <a:tcPr marL="81005" marR="6750" marT="6750" marB="0" anchor="ctr">
+                  <a:tcPr marL="81005" marR="6750" marT="6750" marB="6750" anchor="ctr">
                     <a:lnL>
                       <a:noFill/>
                     </a:lnL>
@@ -37799,7 +37799,7 @@
                       </a:r>
                     </a:p>
                   </a:txBody>
-                  <a:tcPr marL="81005" marR="6750" marT="6750" marB="0" anchor="ctr">
+                  <a:tcPr marL="81005" marR="6750" marT="6750" marB="6750" anchor="ctr">
                     <a:lnL>
                       <a:noFill/>
                     </a:lnL>
@@ -37853,7 +37853,7 @@
                       </a:r>
                     </a:p>
                   </a:txBody>
-                  <a:tcPr marL="81005" marR="6750" marT="6750" marB="0" anchor="ctr">
+                  <a:tcPr marL="81005" marR="6750" marT="6750" marB="6750" anchor="ctr">
                     <a:lnL>
                       <a:noFill/>
                     </a:lnL>
@@ -37909,7 +37909,7 @@
                       </a:r>
                     </a:p>
                   </a:txBody>
-                  <a:tcPr marL="81005" marR="6750" marT="6750" marB="0" anchor="ctr">
+                  <a:tcPr marL="81005" marR="6750" marT="6750" marB="6750" anchor="ctr">
                     <a:lnL>
                       <a:noFill/>
                     </a:lnL>
@@ -37967,7 +37967,7 @@
                       </a:r>
                     </a:p>
                   </a:txBody>
-                  <a:tcPr marL="81005" marR="6750" marT="6750" marB="0" anchor="ctr">
+                  <a:tcPr marL="81005" marR="6750" marT="6750" marB="6750" anchor="ctr">
                     <a:lnL>
                       <a:noFill/>
                     </a:lnL>
@@ -38021,7 +38021,7 @@
                       </a:r>
                     </a:p>
                   </a:txBody>
-                  <a:tcPr marL="81005" marR="6750" marT="6750" marB="0" anchor="ctr">
+                  <a:tcPr marL="81005" marR="6750" marT="6750" marB="6750" anchor="ctr">
                     <a:lnL>
                       <a:noFill/>
                     </a:lnL>
@@ -38077,7 +38077,7 @@
                       </a:r>
                     </a:p>
                   </a:txBody>
-                  <a:tcPr marL="81005" marR="6750" marT="6750" marB="0" anchor="ctr">
+                  <a:tcPr marL="81005" marR="6750" marT="6750" marB="6750" anchor="ctr">
                     <a:lnL>
                       <a:noFill/>
                     </a:lnL>
@@ -38335,7 +38335,7 @@
                 <a:latin typeface="맑은 고딕"/>
                 <a:ea typeface="맑은 고딕"/>
               </a:rPr>
-              <a:t>이 세션이 쓰는 네 판단</a:t>
+              <a:t>이 세션이 사용하는 4가지 판단</a:t>
             </a:r>
           </a:p>
         </p:txBody>
@@ -39678,7 +39678,7 @@
                       </a:r>
                     </a:p>
                   </a:txBody>
-                  <a:tcPr marL="6750" marR="6750" marT="6750" marB="0" anchor="ctr">
+                  <a:tcPr marL="6750" marR="6750" marT="6750" marB="6750" anchor="ctr">
                     <a:lnL>
                       <a:noFill/>
                     </a:lnL>
@@ -39740,7 +39740,7 @@
                       </a:r>
                     </a:p>
                   </a:txBody>
-                  <a:tcPr marL="6750" marR="6750" marT="6750" marB="0" anchor="ctr">
+                  <a:tcPr marL="6750" marR="6750" marT="6750" marB="6750" anchor="ctr">
                     <a:lnL w="9525" cap="flat" cmpd="sng" algn="ctr">
                       <a:solidFill>
                         <a:schemeClr val="bg1">
@@ -39810,7 +39810,7 @@
                       </a:r>
                     </a:p>
                   </a:txBody>
-                  <a:tcPr marL="6750" marR="6750" marT="6750" marB="0" anchor="ctr">
+                  <a:tcPr marL="6750" marR="6750" marT="6750" marB="6750" anchor="ctr">
                     <a:lnL w="9525" cap="flat" cmpd="sng" algn="ctr">
                       <a:solidFill>
                         <a:schemeClr val="bg1">
@@ -39882,7 +39882,7 @@
                       </a:r>
                     </a:p>
                   </a:txBody>
-                  <a:tcPr marL="81005" marR="6750" marT="6750" marB="0" anchor="ctr">
+                  <a:tcPr marL="81005" marR="6750" marT="6750" marB="6750" anchor="ctr">
                     <a:lnL>
                       <a:noFill/>
                     </a:lnL>
@@ -39936,7 +39936,7 @@
                       </a:r>
                     </a:p>
                   </a:txBody>
-                  <a:tcPr marL="81005" marR="6750" marT="6750" marB="0" anchor="ctr">
+                  <a:tcPr marL="81005" marR="6750" marT="6750" marB="6750" anchor="ctr">
                     <a:lnL>
                       <a:noFill/>
                     </a:lnL>
@@ -39992,7 +39992,7 @@
                       </a:r>
                     </a:p>
                   </a:txBody>
-                  <a:tcPr marL="81005" marR="6750" marT="6750" marB="0" anchor="ctr">
+                  <a:tcPr marL="81005" marR="6750" marT="6750" marB="6750" anchor="ctr">
                     <a:lnL>
                       <a:noFill/>
                     </a:lnL>
@@ -40050,7 +40050,7 @@
                       </a:r>
                     </a:p>
                   </a:txBody>
-                  <a:tcPr marL="81005" marR="6750" marT="6750" marB="0" anchor="ctr">
+                  <a:tcPr marL="81005" marR="6750" marT="6750" marB="6750" anchor="ctr">
                     <a:lnL>
                       <a:noFill/>
                     </a:lnL>
@@ -40104,7 +40104,7 @@
                       </a:r>
                     </a:p>
                   </a:txBody>
-                  <a:tcPr marL="81005" marR="6750" marT="6750" marB="0" anchor="ctr">
+                  <a:tcPr marL="81005" marR="6750" marT="6750" marB="6750" anchor="ctr">
                     <a:lnL>
                       <a:noFill/>
                     </a:lnL>
@@ -40160,7 +40160,7 @@
                       </a:r>
                     </a:p>
                   </a:txBody>
-                  <a:tcPr marL="81005" marR="6750" marT="6750" marB="0" anchor="ctr">
+                  <a:tcPr marL="81005" marR="6750" marT="6750" marB="6750" anchor="ctr">
                     <a:lnL>
                       <a:noFill/>
                     </a:lnL>
@@ -40837,7 +40837,7 @@
                       </a:r>
                     </a:p>
                   </a:txBody>
-                  <a:tcPr marL="6750" marR="6750" marT="6750" marB="0" anchor="ctr">
+                  <a:tcPr marL="6750" marR="6750" marT="6750" marB="6750" anchor="ctr">
                     <a:lnL>
                       <a:noFill/>
                     </a:lnL>
@@ -40899,7 +40899,7 @@
                       </a:r>
                     </a:p>
                   </a:txBody>
-                  <a:tcPr marL="6750" marR="6750" marT="6750" marB="0" anchor="ctr">
+                  <a:tcPr marL="6750" marR="6750" marT="6750" marB="6750" anchor="ctr">
                     <a:lnL w="9525" cap="flat" cmpd="sng" algn="ctr">
                       <a:solidFill>
                         <a:schemeClr val="bg1">
@@ -40969,7 +40969,7 @@
                       </a:r>
                     </a:p>
                   </a:txBody>
-                  <a:tcPr marL="6750" marR="6750" marT="6750" marB="0" anchor="ctr">
+                  <a:tcPr marL="6750" marR="6750" marT="6750" marB="6750" anchor="ctr">
                     <a:lnL w="9525" cap="flat" cmpd="sng" algn="ctr">
                       <a:solidFill>
                         <a:schemeClr val="bg1">
@@ -41041,7 +41041,7 @@
                       </a:r>
                     </a:p>
                   </a:txBody>
-                  <a:tcPr marL="81005" marR="6750" marT="6750" marB="0" anchor="ctr">
+                  <a:tcPr marL="81005" marR="6750" marT="6750" marB="6750" anchor="ctr">
                     <a:lnL>
                       <a:noFill/>
                     </a:lnL>
@@ -41095,7 +41095,7 @@
                       </a:r>
                     </a:p>
                   </a:txBody>
-                  <a:tcPr marL="81005" marR="6750" marT="6750" marB="0" anchor="ctr">
+                  <a:tcPr marL="81005" marR="6750" marT="6750" marB="6750" anchor="ctr">
                     <a:lnL>
                       <a:noFill/>
                     </a:lnL>
@@ -41151,7 +41151,7 @@
                       </a:r>
                     </a:p>
                   </a:txBody>
-                  <a:tcPr marL="81005" marR="6750" marT="6750" marB="0" anchor="ctr">
+                  <a:tcPr marL="81005" marR="6750" marT="6750" marB="6750" anchor="ctr">
                     <a:lnL>
                       <a:noFill/>
                     </a:lnL>
@@ -41209,7 +41209,7 @@
                       </a:r>
                     </a:p>
                   </a:txBody>
-                  <a:tcPr marL="81005" marR="6750" marT="6750" marB="0" anchor="ctr">
+                  <a:tcPr marL="81005" marR="6750" marT="6750" marB="6750" anchor="ctr">
                     <a:lnL>
                       <a:noFill/>
                     </a:lnL>
@@ -41263,7 +41263,7 @@
                       </a:r>
                     </a:p>
                   </a:txBody>
-                  <a:tcPr marL="81005" marR="6750" marT="6750" marB="0" anchor="ctr">
+                  <a:tcPr marL="81005" marR="6750" marT="6750" marB="6750" anchor="ctr">
                     <a:lnL>
                       <a:noFill/>
                     </a:lnL>
@@ -41319,7 +41319,7 @@
                       </a:r>
                     </a:p>
                   </a:txBody>
-                  <a:tcPr marL="81005" marR="6750" marT="6750" marB="0" anchor="ctr">
+                  <a:tcPr marL="81005" marR="6750" marT="6750" marB="6750" anchor="ctr">
                     <a:lnL>
                       <a:noFill/>
                     </a:lnL>
@@ -41377,7 +41377,7 @@
                       </a:r>
                     </a:p>
                   </a:txBody>
-                  <a:tcPr marL="81005" marR="6750" marT="6750" marB="0" anchor="ctr">
+                  <a:tcPr marL="81005" marR="6750" marT="6750" marB="6750" anchor="ctr">
                     <a:lnL>
                       <a:noFill/>
                     </a:lnL>
@@ -41431,7 +41431,7 @@
                       </a:r>
                     </a:p>
                   </a:txBody>
-                  <a:tcPr marL="81005" marR="6750" marT="6750" marB="0" anchor="ctr">
+                  <a:tcPr marL="81005" marR="6750" marT="6750" marB="6750" anchor="ctr">
                     <a:lnL>
                       <a:noFill/>
                     </a:lnL>
@@ -41487,7 +41487,7 @@
                       </a:r>
                     </a:p>
                   </a:txBody>
-                  <a:tcPr marL="81005" marR="6750" marT="6750" marB="0" anchor="ctr">
+                  <a:tcPr marL="81005" marR="6750" marT="6750" marB="6750" anchor="ctr">
                     <a:lnL>
                       <a:noFill/>
                     </a:lnL>
@@ -41545,7 +41545,7 @@
                       </a:r>
                     </a:p>
                   </a:txBody>
-                  <a:tcPr marL="81005" marR="6750" marT="6750" marB="0" anchor="ctr">
+                  <a:tcPr marL="81005" marR="6750" marT="6750" marB="6750" anchor="ctr">
                     <a:lnL>
                       <a:noFill/>
                     </a:lnL>
@@ -41599,7 +41599,7 @@
                       </a:r>
                     </a:p>
                   </a:txBody>
-                  <a:tcPr marL="81005" marR="6750" marT="6750" marB="0" anchor="ctr">
+                  <a:tcPr marL="81005" marR="6750" marT="6750" marB="6750" anchor="ctr">
                     <a:lnL>
                       <a:noFill/>
                     </a:lnL>
@@ -41655,7 +41655,7 @@
                       </a:r>
                     </a:p>
                   </a:txBody>
-                  <a:tcPr marL="81005" marR="6750" marT="6750" marB="0" anchor="ctr">
+                  <a:tcPr marL="81005" marR="6750" marT="6750" marB="6750" anchor="ctr">
                     <a:lnL>
                       <a:noFill/>
                     </a:lnL>
@@ -41713,7 +41713,7 @@
                       </a:r>
                     </a:p>
                   </a:txBody>
-                  <a:tcPr marL="81005" marR="6750" marT="6750" marB="0" anchor="ctr">
+                  <a:tcPr marL="81005" marR="6750" marT="6750" marB="6750" anchor="ctr">
                     <a:lnL>
                       <a:noFill/>
                     </a:lnL>
@@ -41767,7 +41767,7 @@
                       </a:r>
                     </a:p>
                   </a:txBody>
-                  <a:tcPr marL="81005" marR="6750" marT="6750" marB="0" anchor="ctr">
+                  <a:tcPr marL="81005" marR="6750" marT="6750" marB="6750" anchor="ctr">
                     <a:lnL>
                       <a:noFill/>
                     </a:lnL>
@@ -41823,7 +41823,7 @@
                       </a:r>
                     </a:p>
                   </a:txBody>
-                  <a:tcPr marL="81005" marR="6750" marT="6750" marB="0" anchor="ctr">
+                  <a:tcPr marL="81005" marR="6750" marT="6750" marB="6750" anchor="ctr">
                     <a:lnL>
                       <a:noFill/>
                     </a:lnL>
@@ -41881,7 +41881,7 @@
                       </a:r>
                     </a:p>
                   </a:txBody>
-                  <a:tcPr marL="81005" marR="6750" marT="6750" marB="0" anchor="ctr">
+                  <a:tcPr marL="81005" marR="6750" marT="6750" marB="6750" anchor="ctr">
                     <a:lnL>
                       <a:noFill/>
                     </a:lnL>
@@ -41935,7 +41935,7 @@
                       </a:r>
                     </a:p>
                   </a:txBody>
-                  <a:tcPr marL="81005" marR="6750" marT="6750" marB="0" anchor="ctr">
+                  <a:tcPr marL="81005" marR="6750" marT="6750" marB="6750" anchor="ctr">
                     <a:lnL>
                       <a:noFill/>
                     </a:lnL>
@@ -41991,7 +41991,7 @@
                       </a:r>
                     </a:p>
                   </a:txBody>
-                  <a:tcPr marL="81005" marR="6750" marT="6750" marB="0" anchor="ctr">
+                  <a:tcPr marL="81005" marR="6750" marT="6750" marB="6750" anchor="ctr">
                     <a:lnL>
                       <a:noFill/>
                     </a:lnL>
@@ -42718,7 +42718,7 @@
                 <a:latin typeface="맑은 고딕"/>
                 <a:ea typeface="맑은 고딕"/>
               </a:rPr>
-              <a:t>인터페이스가 정해진다.</a:t>
+              <a:t>인터페이스가 결정된다.</a:t>
             </a:r>
             <a:r>
               <a:rPr sz="1800" b="0">

--- a/courses/ai-native/sessions/s07.pptx
+++ b/courses/ai-native/sessions/s07.pptx
@@ -5757,7 +5757,7 @@
         </p:nvGraphicFramePr>
         <p:xfrm>
           <a:off x="412306" y="2112010"/>
-          <a:ext cx="8305800" cy="3873500"/>
+          <a:ext cx="8305800" cy="864000"/>
         </p:xfrm>
         <a:graphic>
           <a:graphicData uri="http://schemas.openxmlformats.org/drawingml/2006/table">
@@ -9114,7 +9114,7 @@
         </p:nvGraphicFramePr>
         <p:xfrm>
           <a:off x="412306" y="1837690"/>
-          <a:ext cx="8305800" cy="3873500"/>
+          <a:ext cx="8305800" cy="2304000"/>
         </p:xfrm>
         <a:graphic>
           <a:graphicData uri="http://schemas.openxmlformats.org/drawingml/2006/table">
@@ -11594,7 +11594,7 @@
         </p:nvGraphicFramePr>
         <p:xfrm>
           <a:off x="517715" y="2624628"/>
-          <a:ext cx="8094980" cy="3873500"/>
+          <a:ext cx="8094980" cy="1728000"/>
         </p:xfrm>
         <a:graphic>
           <a:graphicData uri="http://schemas.openxmlformats.org/drawingml/2006/table">
@@ -15545,7 +15545,7 @@
         </p:nvGraphicFramePr>
         <p:xfrm>
           <a:off x="741235" y="3549380"/>
-          <a:ext cx="7647940" cy="3873500"/>
+          <a:ext cx="7647940" cy="1152000"/>
         </p:xfrm>
         <a:graphic>
           <a:graphicData uri="http://schemas.openxmlformats.org/drawingml/2006/table">
@@ -16565,7 +16565,7 @@
         </p:nvGraphicFramePr>
         <p:xfrm>
           <a:off x="629476" y="1837690"/>
-          <a:ext cx="7871460" cy="3873500"/>
+          <a:ext cx="7871460" cy="1728000"/>
         </p:xfrm>
         <a:graphic>
           <a:graphicData uri="http://schemas.openxmlformats.org/drawingml/2006/table">
@@ -18148,7 +18148,7 @@
         </p:nvGraphicFramePr>
         <p:xfrm>
           <a:off x="964756" y="2112010"/>
-          <a:ext cx="7200900" cy="3873500"/>
+          <a:ext cx="7200900" cy="1440000"/>
         </p:xfrm>
         <a:graphic>
           <a:graphicData uri="http://schemas.openxmlformats.org/drawingml/2006/table">
@@ -21703,7 +21703,7 @@
         </p:nvGraphicFramePr>
         <p:xfrm>
           <a:off x="1006665" y="2112010"/>
-          <a:ext cx="7117080" cy="3873500"/>
+          <a:ext cx="7117080" cy="1440000"/>
         </p:xfrm>
         <a:graphic>
           <a:graphicData uri="http://schemas.openxmlformats.org/drawingml/2006/table">
@@ -23085,7 +23085,7 @@
         </p:nvGraphicFramePr>
         <p:xfrm>
           <a:off x="1244156" y="2274108"/>
-          <a:ext cx="6642100" cy="3873500"/>
+          <a:ext cx="6642100" cy="1728000"/>
         </p:xfrm>
         <a:graphic>
           <a:graphicData uri="http://schemas.openxmlformats.org/drawingml/2006/table">
@@ -26126,7 +26126,7 @@
         </p:nvGraphicFramePr>
         <p:xfrm>
           <a:off x="741235" y="3223145"/>
-          <a:ext cx="7647940" cy="3873500"/>
+          <a:ext cx="7647940" cy="1440000"/>
         </p:xfrm>
         <a:graphic>
           <a:graphicData uri="http://schemas.openxmlformats.org/drawingml/2006/table">
@@ -28123,7 +28123,7 @@
         </p:nvGraphicFramePr>
         <p:xfrm>
           <a:off x="1413066" y="1837690"/>
-          <a:ext cx="6304280" cy="3873500"/>
+          <a:ext cx="6304280" cy="1152000"/>
         </p:xfrm>
         <a:graphic>
           <a:graphicData uri="http://schemas.openxmlformats.org/drawingml/2006/table">
@@ -34524,6 +34524,102 @@
           </a:p>
         </p:txBody>
       </p:sp>
+      <p:sp>
+        <p:nvSpPr>
+          <p:cNvPr id="35" name="TextBox 12">
+            <a:extLst>
+              <a:ext uri="{FF2B5EF4-FFF2-40B4-BE49-F238E27FC236}">
+                <a16:creationId xmlns:a16="http://schemas.microsoft.com/office/drawing/2014/main" id="{654EDDB4-901F-3D48-A715-17D163E8A7AC}"/>
+              </a:ext>
+            </a:extLst>
+          </p:cNvPr>
+          <p:cNvSpPr txBox="1"/>
+          <p:nvPr/>
+        </p:nvSpPr>
+        <p:spPr>
+          <a:xfrm>
+            <a:off x="365760" y="5195711"/>
+            <a:ext cx="8412480" cy="783167"/>
+          </a:xfrm>
+          <a:prstGeom prst="rect">
+            <a:avLst/>
+          </a:prstGeom>
+          <a:noFill/>
+        </p:spPr>
+        <p:txBody>
+          <a:bodyPr wrap="square">
+            <a:spAutoFit/>
+          </a:bodyPr>
+          <a:lstStyle/>
+          <a:p>
+            <a:pPr marL="322580" indent="-139700">
+              <a:spcBef>
+                <a:spcPts val="300"/>
+              </a:spcBef>
+              <a:spcAft>
+                <a:spcPts val="300"/>
+              </a:spcAft>
+              <a:buNone/>
+            </a:pPr>
+            <a:r>
+              <a:rPr sz="1000" b="1">
+                <a:solidFill>
+                  <a:srgbClr val="000000"/>
+                </a:solidFill>
+                <a:latin typeface="맑은 고딕"/>
+                <a:ea typeface="맑은 고딕"/>
+              </a:rPr>
+              <a:t>4. 오퍼레이션 계약</a:t>
+            </a:r>
+          </a:p>
+          <a:p>
+            <a:pPr lvl="2" marL="411480" indent="-137160">
+              <a:spcBef>
+                <a:spcPts val="300"/>
+              </a:spcBef>
+              <a:spcAft>
+                <a:spcPts val="300"/>
+              </a:spcAft>
+              <a:buSzPct val="90000"/>
+              <a:buFont typeface="Wingdings" pitchFamily="2" charset="2"/>
+              <a:buChar char=""/>
+            </a:pPr>
+            <a:r>
+              <a:rPr sz="1000" b="1">
+                <a:solidFill>
+                  <a:srgbClr val="000000"/>
+                </a:solidFill>
+                <a:latin typeface="맑은 고딕"/>
+                <a:ea typeface="맑은 고딕"/>
+              </a:rPr>
+              <a:t>createOrder</a:t>
+            </a:r>
+          </a:p>
+          <a:p>
+            <a:pPr lvl="3" marL="731520" indent="-137160">
+              <a:spcBef>
+                <a:spcPts val="300"/>
+              </a:spcBef>
+              <a:spcAft>
+                <a:spcPts val="300"/>
+              </a:spcAft>
+              <a:buSzPct val="90000"/>
+              <a:buFont typeface="Wingdings" pitchFamily="2" charset="2"/>
+              <a:buChar char=""/>
+            </a:pPr>
+            <a:r>
+              <a:rPr sz="1000" b="0">
+                <a:solidFill>
+                  <a:srgbClr val="000000"/>
+                </a:solidFill>
+                <a:latin typeface="맑은 고딕"/>
+                <a:ea typeface="맑은 고딕"/>
+              </a:rPr>
+              <a:t>사전조건: 항목이 1개 이상이고 수량은 각각 1 이상이다. 배송지가 제공되고 각 상품의 현재 판매가를 조회할 수 있다.</a:t>
+            </a:r>
+          </a:p>
+        </p:txBody>
+      </p:sp>
     </p:spTree>
     <p:extLst>
       <p:ext uri="{BB962C8B-B14F-4D97-AF65-F5344CB8AC3E}">
@@ -34752,24 +34848,86 @@
           </a:bodyPr>
           <a:lstStyle/>
           <a:p>
-            <a:pPr marL="322580" indent="-139700">
+            <a:pPr lvl="3" marL="731520" indent="-137160">
               <a:spcBef>
                 <a:spcPts val="300"/>
               </a:spcBef>
               <a:spcAft>
                 <a:spcPts val="300"/>
               </a:spcAft>
-              <a:buNone/>
+              <a:buSzPct val="90000"/>
+              <a:buFont typeface="Wingdings" pitchFamily="2" charset="2"/>
+              <a:buChar char=""/>
             </a:pPr>
             <a:r>
-              <a:rPr sz="1000" b="1">
-                <a:solidFill>
-                  <a:srgbClr val="000000"/>
-                </a:solidFill>
-                <a:latin typeface="맑은 고딕"/>
-                <a:ea typeface="맑은 고딕"/>
-              </a:rPr>
-              <a:t>4. 오퍼레이션 계약</a:t>
+              <a:rPr sz="1000" b="0">
+                <a:solidFill>
+                  <a:srgbClr val="000000"/>
+                </a:solidFill>
+                <a:latin typeface="맑은 고딕"/>
+                <a:ea typeface="맑은 고딕"/>
+              </a:rPr>
+              <a:t>사후조건: 주문이 저장된다. 각 </a:t>
+            </a:r>
+            <a:r>
+              <a:rPr sz="1000" b="0">
+                <a:solidFill>
+                  <a:srgbClr val="000000"/>
+                </a:solidFill>
+                <a:latin typeface="맑은 고딕"/>
+                <a:ea typeface="맑은 고딕"/>
+              </a:rPr>
+              <a:t>unitPrice</a:t>
+            </a:r>
+            <a:r>
+              <a:rPr sz="1000" b="0">
+                <a:solidFill>
+                  <a:srgbClr val="000000"/>
+                </a:solidFill>
+                <a:latin typeface="맑은 고딕"/>
+                <a:ea typeface="맑은 고딕"/>
+              </a:rPr>
+              <a:t>는 생성 시 판매가로 확정되고, </a:t>
+            </a:r>
+            <a:r>
+              <a:rPr sz="1000" b="0">
+                <a:solidFill>
+                  <a:srgbClr val="000000"/>
+                </a:solidFill>
+                <a:latin typeface="맑은 고딕"/>
+                <a:ea typeface="맑은 고딕"/>
+              </a:rPr>
+              <a:t>totalAmount = Σ(unitPrice × quantity)</a:t>
+            </a:r>
+            <a:r>
+              <a:rPr sz="1000" b="0">
+                <a:solidFill>
+                  <a:srgbClr val="000000"/>
+                </a:solidFill>
+                <a:latin typeface="맑은 고딕"/>
+                <a:ea typeface="맑은 고딕"/>
+              </a:rPr>
+              <a:t>, 상태는 </a:t>
+            </a:r>
+            <a:r>
+              <a:rPr sz="1000" b="0">
+                <a:solidFill>
+                  <a:srgbClr val="000000"/>
+                </a:solidFill>
+                <a:latin typeface="맑은 고딕"/>
+                <a:ea typeface="맑은 고딕"/>
+              </a:rPr>
+              <a:t>PENDING_PAYMENT</a:t>
+            </a:r>
+            <a:r>
+              <a:rPr sz="1000" b="0">
+                <a:solidFill>
+                  <a:srgbClr val="000000"/>
+                </a:solidFill>
+                <a:latin typeface="맑은 고딕"/>
+                <a:ea typeface="맑은 고딕"/>
+              </a:rPr>
+              <a:t>다.</a:t>
             </a:r>
           </a:p>
           <a:p>
@@ -34792,7 +34950,7 @@
                 <a:latin typeface="맑은 고딕"/>
                 <a:ea typeface="맑은 고딕"/>
               </a:rPr>
-              <a:t>createOrder</a:t>
+              <a:t>requestCardApproval</a:t>
             </a:r>
           </a:p>
           <a:p>
@@ -34815,7 +34973,47 @@
                 <a:latin typeface="맑은 고딕"/>
                 <a:ea typeface="맑은 고딕"/>
               </a:rPr>
-              <a:t>사전조건: 항목이 1개 이상이고 수량은 각각 1 이상이다. 배송지가 제공되고 각 상품의 현재 판매가를 조회할 수 있다.</a:t>
+              <a:t>사전조건: 주문이 존재하고 </a:t>
+            </a:r>
+            <a:r>
+              <a:rPr sz="1000" b="0">
+                <a:solidFill>
+                  <a:srgbClr val="000000"/>
+                </a:solidFill>
+                <a:latin typeface="맑은 고딕"/>
+                <a:ea typeface="맑은 고딕"/>
+              </a:rPr>
+              <a:t>PENDING_PAYMENT</a:t>
+            </a:r>
+            <a:r>
+              <a:rPr sz="1000" b="0">
+                <a:solidFill>
+                  <a:srgbClr val="000000"/>
+                </a:solidFill>
+                <a:latin typeface="맑은 고딕"/>
+                <a:ea typeface="맑은 고딕"/>
+              </a:rPr>
+              <a:t>다. 승인 요청 금액은 저장된 </a:t>
+            </a:r>
+            <a:r>
+              <a:rPr sz="1000" b="0">
+                <a:solidFill>
+                  <a:srgbClr val="000000"/>
+                </a:solidFill>
+                <a:latin typeface="맑은 고딕"/>
+                <a:ea typeface="맑은 고딕"/>
+              </a:rPr>
+              <a:t>totalAmount</a:t>
+            </a:r>
+            <a:r>
+              <a:rPr sz="1000" b="0">
+                <a:solidFill>
+                  <a:srgbClr val="000000"/>
+                </a:solidFill>
+                <a:latin typeface="맑은 고딕"/>
+                <a:ea typeface="맑은 고딕"/>
+              </a:rPr>
+              <a:t>다.</a:t>
             </a:r>
           </a:p>
           <a:p>
@@ -34838,7 +35036,7 @@
                 <a:latin typeface="맑은 고딕"/>
                 <a:ea typeface="맑은 고딕"/>
               </a:rPr>
-              <a:t>사후조건: 주문이 저장된다. 각 </a:t>
+              <a:t>사후조건 —</a:t>
             </a:r>
             <a:r>
               <a:rPr sz="1000" b="0">
@@ -34848,7 +35046,7 @@
                 <a:latin typeface="맑은 고딕"/>
                 <a:ea typeface="맑은 고딕"/>
               </a:rPr>
-              <a:t>unitPrice</a:t>
+              <a:t> </a:t>
             </a:r>
             <a:r>
               <a:rPr sz="1000" b="0">
@@ -34858,7 +35056,7 @@
                 <a:latin typeface="맑은 고딕"/>
                 <a:ea typeface="맑은 고딕"/>
               </a:rPr>
-              <a:t>는 생성 시 판매가로 확정되고, </a:t>
+              <a:t>APPROVED</a:t>
             </a:r>
             <a:r>
               <a:rPr sz="1000" b="0">
@@ -34868,7 +35066,7 @@
                 <a:latin typeface="맑은 고딕"/>
                 <a:ea typeface="맑은 고딕"/>
               </a:rPr>
-              <a:t>totalAmount = Σ(unitPrice × quantity)</a:t>
+              <a:t>: 같은 주문이 </a:t>
             </a:r>
             <a:r>
               <a:rPr sz="1000" b="0">
@@ -34878,7 +35076,7 @@
                 <a:latin typeface="맑은 고딕"/>
                 <a:ea typeface="맑은 고딕"/>
               </a:rPr>
-              <a:t>, 상태는 </a:t>
+              <a:t>PAID</a:t>
             </a:r>
             <a:r>
               <a:rPr sz="1000" b="0">
@@ -34888,8 +35086,21 @@
                 <a:latin typeface="맑은 고딕"/>
                 <a:ea typeface="맑은 고딕"/>
               </a:rPr>
-              <a:t>PENDING_PAYMENT</a:t>
-            </a:r>
+              <a:t>가 되고 확정 배송지로 배송 요청을 시도한다.</a:t>
+            </a:r>
+          </a:p>
+          <a:p>
+            <a:pPr lvl="3" marL="731520" indent="-137160">
+              <a:spcBef>
+                <a:spcPts val="300"/>
+              </a:spcBef>
+              <a:spcAft>
+                <a:spcPts val="300"/>
+              </a:spcAft>
+              <a:buSzPct val="90000"/>
+              <a:buFont typeface="Wingdings" pitchFamily="2" charset="2"/>
+              <a:buChar char=""/>
+            </a:pPr>
             <a:r>
               <a:rPr sz="1000" b="0">
                 <a:solidFill>
@@ -34898,7 +35109,90 @@
                 <a:latin typeface="맑은 고딕"/>
                 <a:ea typeface="맑은 고딕"/>
               </a:rPr>
-              <a:t>다.</a:t>
+              <a:t>사후조건 —</a:t>
+            </a:r>
+            <a:r>
+              <a:rPr sz="1000" b="0">
+                <a:solidFill>
+                  <a:srgbClr val="000000"/>
+                </a:solidFill>
+                <a:latin typeface="맑은 고딕"/>
+                <a:ea typeface="맑은 고딕"/>
+              </a:rPr>
+              <a:t> </a:t>
+            </a:r>
+            <a:r>
+              <a:rPr sz="1000" b="0">
+                <a:solidFill>
+                  <a:srgbClr val="000000"/>
+                </a:solidFill>
+                <a:latin typeface="맑은 고딕"/>
+                <a:ea typeface="맑은 고딕"/>
+              </a:rPr>
+              <a:t>DECLINED</a:t>
+            </a:r>
+            <a:r>
+              <a:rPr sz="1000" b="0">
+                <a:solidFill>
+                  <a:srgbClr val="000000"/>
+                </a:solidFill>
+                <a:latin typeface="맑은 고딕"/>
+                <a:ea typeface="맑은 고딕"/>
+              </a:rPr>
+              <a:t>: 상태를 유지하고 배송 요청하지 않는다.</a:t>
+            </a:r>
+          </a:p>
+          <a:p>
+            <a:pPr lvl="3" marL="731520" indent="-137160">
+              <a:spcBef>
+                <a:spcPts val="300"/>
+              </a:spcBef>
+              <a:spcAft>
+                <a:spcPts val="300"/>
+              </a:spcAft>
+              <a:buSzPct val="90000"/>
+              <a:buFont typeface="Wingdings" pitchFamily="2" charset="2"/>
+              <a:buChar char=""/>
+            </a:pPr>
+            <a:r>
+              <a:rPr sz="1000" b="0">
+                <a:solidFill>
+                  <a:srgbClr val="000000"/>
+                </a:solidFill>
+                <a:latin typeface="맑은 고딕"/>
+                <a:ea typeface="맑은 고딕"/>
+              </a:rPr>
+              <a:t>사후조건 —</a:t>
+            </a:r>
+            <a:r>
+              <a:rPr sz="1000" b="0">
+                <a:solidFill>
+                  <a:srgbClr val="000000"/>
+                </a:solidFill>
+                <a:latin typeface="맑은 고딕"/>
+                <a:ea typeface="맑은 고딕"/>
+              </a:rPr>
+              <a:t> </a:t>
+            </a:r>
+            <a:r>
+              <a:rPr sz="1000" b="0">
+                <a:solidFill>
+                  <a:srgbClr val="000000"/>
+                </a:solidFill>
+                <a:latin typeface="맑은 고딕"/>
+                <a:ea typeface="맑은 고딕"/>
+              </a:rPr>
+              <a:t>UNCONFIRMED</a:t>
+            </a:r>
+            <a:r>
+              <a:rPr sz="1000" b="0">
+                <a:solidFill>
+                  <a:srgbClr val="000000"/>
+                </a:solidFill>
+                <a:latin typeface="맑은 고딕"/>
+                <a:ea typeface="맑은 고딕"/>
+              </a:rPr>
+              <a:t>: 승인·거절·상태 전이를 하지 않는다.</a:t>
             </a:r>
           </a:p>
           <a:p>
@@ -34921,7 +35215,7 @@
                 <a:latin typeface="맑은 고딕"/>
                 <a:ea typeface="맑은 고딕"/>
               </a:rPr>
-              <a:t>requestCardApproval</a:t>
+              <a:t>getOrder</a:t>
             </a:r>
           </a:p>
           <a:p>
@@ -34944,47 +35238,7 @@
                 <a:latin typeface="맑은 고딕"/>
                 <a:ea typeface="맑은 고딕"/>
               </a:rPr>
-              <a:t>사전조건: 주문이 존재하고 </a:t>
-            </a:r>
-            <a:r>
-              <a:rPr sz="1000" b="0">
-                <a:solidFill>
-                  <a:srgbClr val="000000"/>
-                </a:solidFill>
-                <a:latin typeface="맑은 고딕"/>
-                <a:ea typeface="맑은 고딕"/>
-              </a:rPr>
-              <a:t>PENDING_PAYMENT</a:t>
-            </a:r>
-            <a:r>
-              <a:rPr sz="1000" b="0">
-                <a:solidFill>
-                  <a:srgbClr val="000000"/>
-                </a:solidFill>
-                <a:latin typeface="맑은 고딕"/>
-                <a:ea typeface="맑은 고딕"/>
-              </a:rPr>
-              <a:t>다. 승인 요청 금액은 저장된 </a:t>
-            </a:r>
-            <a:r>
-              <a:rPr sz="1000" b="0">
-                <a:solidFill>
-                  <a:srgbClr val="000000"/>
-                </a:solidFill>
-                <a:latin typeface="맑은 고딕"/>
-                <a:ea typeface="맑은 고딕"/>
-              </a:rPr>
-              <a:t>totalAmount</a:t>
-            </a:r>
-            <a:r>
-              <a:rPr sz="1000" b="0">
-                <a:solidFill>
-                  <a:srgbClr val="000000"/>
-                </a:solidFill>
-                <a:latin typeface="맑은 고딕"/>
-                <a:ea typeface="맑은 고딕"/>
-              </a:rPr>
-              <a:t>다.</a:t>
+              <a:t>사전조건: 주문이 존재한다.</a:t>
             </a:r>
           </a:p>
           <a:p>
@@ -35007,57 +35261,30 @@
                 <a:latin typeface="맑은 고딕"/>
                 <a:ea typeface="맑은 고딕"/>
               </a:rPr>
-              <a:t>사후조건 —</a:t>
-            </a:r>
-            <a:r>
-              <a:rPr sz="1000" b="0">
-                <a:solidFill>
-                  <a:srgbClr val="000000"/>
-                </a:solidFill>
-                <a:latin typeface="맑은 고딕"/>
-                <a:ea typeface="맑은 고딕"/>
-              </a:rPr>
-              <a:t> </a:t>
-            </a:r>
-            <a:r>
-              <a:rPr sz="1000" b="0">
-                <a:solidFill>
-                  <a:srgbClr val="000000"/>
-                </a:solidFill>
-                <a:latin typeface="맑은 고딕"/>
-                <a:ea typeface="맑은 고딕"/>
-              </a:rPr>
-              <a:t>APPROVED</a:t>
-            </a:r>
-            <a:r>
-              <a:rPr sz="1000" b="0">
-                <a:solidFill>
-                  <a:srgbClr val="000000"/>
-                </a:solidFill>
-                <a:latin typeface="맑은 고딕"/>
-                <a:ea typeface="맑은 고딕"/>
-              </a:rPr>
-              <a:t>: 같은 주문이 </a:t>
-            </a:r>
-            <a:r>
-              <a:rPr sz="1000" b="0">
-                <a:solidFill>
-                  <a:srgbClr val="000000"/>
-                </a:solidFill>
-                <a:latin typeface="맑은 고딕"/>
-                <a:ea typeface="맑은 고딕"/>
-              </a:rPr>
-              <a:t>PAID</a:t>
-            </a:r>
-            <a:r>
-              <a:rPr sz="1000" b="0">
-                <a:solidFill>
-                  <a:srgbClr val="000000"/>
-                </a:solidFill>
-                <a:latin typeface="맑은 고딕"/>
-                <a:ea typeface="맑은 고딕"/>
-              </a:rPr>
-              <a:t>가 되고 확정 배송지로 배송 요청을 시도한다.</a:t>
+              <a:t>사후조건: 현재 상태와 주문 번호·항목·확정 단가·총액·배송지를 반환하며 주문을 변경하지 않는다.</a:t>
+            </a:r>
+          </a:p>
+          <a:p>
+            <a:pPr lvl="2" marL="411480" indent="-137160">
+              <a:spcBef>
+                <a:spcPts val="300"/>
+              </a:spcBef>
+              <a:spcAft>
+                <a:spcPts val="300"/>
+              </a:spcAft>
+              <a:buSzPct val="90000"/>
+              <a:buFont typeface="Wingdings" pitchFamily="2" charset="2"/>
+              <a:buChar char=""/>
+            </a:pPr>
+            <a:r>
+              <a:rPr sz="1000" b="1">
+                <a:solidFill>
+                  <a:srgbClr val="000000"/>
+                </a:solidFill>
+                <a:latin typeface="맑은 고딕"/>
+                <a:ea typeface="맑은 고딕"/>
+              </a:rPr>
+              <a:t>Order.create</a:t>
             </a:r>
           </a:p>
           <a:p>
@@ -35080,37 +35307,7 @@
                 <a:latin typeface="맑은 고딕"/>
                 <a:ea typeface="맑은 고딕"/>
               </a:rPr>
-              <a:t>사후조건 —</a:t>
-            </a:r>
-            <a:r>
-              <a:rPr sz="1000" b="0">
-                <a:solidFill>
-                  <a:srgbClr val="000000"/>
-                </a:solidFill>
-                <a:latin typeface="맑은 고딕"/>
-                <a:ea typeface="맑은 고딕"/>
-              </a:rPr>
-              <a:t> </a:t>
-            </a:r>
-            <a:r>
-              <a:rPr sz="1000" b="0">
-                <a:solidFill>
-                  <a:srgbClr val="000000"/>
-                </a:solidFill>
-                <a:latin typeface="맑은 고딕"/>
-                <a:ea typeface="맑은 고딕"/>
-              </a:rPr>
-              <a:t>DECLINED</a:t>
-            </a:r>
-            <a:r>
-              <a:rPr sz="1000" b="0">
-                <a:solidFill>
-                  <a:srgbClr val="000000"/>
-                </a:solidFill>
-                <a:latin typeface="맑은 고딕"/>
-                <a:ea typeface="맑은 고딕"/>
-              </a:rPr>
-              <a:t>: 상태를 유지하고 배송 요청하지 않는다.</a:t>
+              <a:t>사전조건: 항목이 1개 이상이고 수량은 1 이상이며, 단가와 계산 총액은 0 이상이고 배송지가 존재한다.</a:t>
             </a:r>
           </a:p>
           <a:p>
@@ -35133,7 +35330,7 @@
                 <a:latin typeface="맑은 고딕"/>
                 <a:ea typeface="맑은 고딕"/>
               </a:rPr>
-              <a:t>사후조건 —</a:t>
+              <a:t>사후조건: 불변식을 만족하는 </a:t>
             </a:r>
             <a:r>
               <a:rPr sz="1000" b="0">
@@ -35143,7 +35340,7 @@
                 <a:latin typeface="맑은 고딕"/>
                 <a:ea typeface="맑은 고딕"/>
               </a:rPr>
-              <a:t> </a:t>
+              <a:t>PENDING_PAYMENT</a:t>
             </a:r>
             <a:r>
               <a:rPr sz="1000" b="0">
@@ -35153,17 +35350,7 @@
                 <a:latin typeface="맑은 고딕"/>
                 <a:ea typeface="맑은 고딕"/>
               </a:rPr>
-              <a:t>UNCONFIRMED</a:t>
-            </a:r>
-            <a:r>
-              <a:rPr sz="1000" b="0">
-                <a:solidFill>
-                  <a:srgbClr val="000000"/>
-                </a:solidFill>
-                <a:latin typeface="맑은 고딕"/>
-                <a:ea typeface="맑은 고딕"/>
-              </a:rPr>
-              <a:t>: 승인·거절·상태 전이를 하지 않는다.</a:t>
+              <a:t> 주문을 만든다.</a:t>
             </a:r>
           </a:p>
           <a:p>
@@ -35186,7 +35373,7 @@
                 <a:latin typeface="맑은 고딕"/>
                 <a:ea typeface="맑은 고딕"/>
               </a:rPr>
-              <a:t>getOrder</a:t>
+              <a:t>Order.approvePayment</a:t>
             </a:r>
           </a:p>
           <a:p>
@@ -35209,7 +35396,27 @@
                 <a:latin typeface="맑은 고딕"/>
                 <a:ea typeface="맑은 고딕"/>
               </a:rPr>
-              <a:t>사전조건: 주문이 존재한다.</a:t>
+              <a:t>사전조건: 현재 상태가 </a:t>
+            </a:r>
+            <a:r>
+              <a:rPr sz="1000" b="0">
+                <a:solidFill>
+                  <a:srgbClr val="000000"/>
+                </a:solidFill>
+                <a:latin typeface="맑은 고딕"/>
+                <a:ea typeface="맑은 고딕"/>
+              </a:rPr>
+              <a:t>PENDING_PAYMENT</a:t>
+            </a:r>
+            <a:r>
+              <a:rPr sz="1000" b="0">
+                <a:solidFill>
+                  <a:srgbClr val="000000"/>
+                </a:solidFill>
+                <a:latin typeface="맑은 고딕"/>
+                <a:ea typeface="맑은 고딕"/>
+              </a:rPr>
+              <a:t>다.</a:t>
             </a:r>
           </a:p>
           <a:p>
@@ -35232,7 +35439,27 @@
                 <a:latin typeface="맑은 고딕"/>
                 <a:ea typeface="맑은 고딕"/>
               </a:rPr>
-              <a:t>사후조건: 현재 상태와 주문 번호·항목·확정 단가·총액·배송지를 반환하며 주문을 변경하지 않는다.</a:t>
+              <a:t>사후조건: 상태가 </a:t>
+            </a:r>
+            <a:r>
+              <a:rPr sz="1000" b="0">
+                <a:solidFill>
+                  <a:srgbClr val="000000"/>
+                </a:solidFill>
+                <a:latin typeface="맑은 고딕"/>
+                <a:ea typeface="맑은 고딕"/>
+              </a:rPr>
+              <a:t>PAID</a:t>
+            </a:r>
+            <a:r>
+              <a:rPr sz="1000" b="0">
+                <a:solidFill>
+                  <a:srgbClr val="000000"/>
+                </a:solidFill>
+                <a:latin typeface="맑은 고딕"/>
+                <a:ea typeface="맑은 고딕"/>
+              </a:rPr>
+              <a:t>가 되며 항목, 단가, 총액, 배송지는 변하지 않는다.</a:t>
             </a:r>
           </a:p>
           <a:p>
@@ -35248,84 +35475,79 @@
               <a:buChar char=""/>
             </a:pPr>
             <a:r>
-              <a:rPr sz="1000" b="1">
-                <a:solidFill>
-                  <a:srgbClr val="000000"/>
-                </a:solidFill>
-                <a:latin typeface="맑은 고딕"/>
-                <a:ea typeface="맑은 고딕"/>
-              </a:rPr>
-              <a:t>Order.create</a:t>
-            </a:r>
-          </a:p>
-          <a:p>
-            <a:pPr lvl="3" marL="731520" indent="-137160">
+              <a:rPr sz="1000" b="0">
+                <a:solidFill>
+                  <a:srgbClr val="000000"/>
+                </a:solidFill>
+                <a:latin typeface="맑은 고딕"/>
+                <a:ea typeface="맑은 고딕"/>
+              </a:rPr>
+              <a:t>테스트 대역은 포트 호출의 업무 계약도 검사한다. 예를 들어 </a:t>
+            </a:r>
+            <a:r>
+              <a:rPr sz="1000" b="0">
+                <a:solidFill>
+                  <a:srgbClr val="000000"/>
+                </a:solidFill>
+                <a:latin typeface="맑은 고딕"/>
+                <a:ea typeface="맑은 고딕"/>
+              </a:rPr>
+              <a:t>PaymentGateway</a:t>
+            </a:r>
+            <a:r>
+              <a:rPr sz="1000" b="0">
+                <a:solidFill>
+                  <a:srgbClr val="000000"/>
+                </a:solidFill>
+                <a:latin typeface="맑은 고딕"/>
+                <a:ea typeface="맑은 고딕"/>
+              </a:rPr>
+              <a:t> 대역은 기대 주문 번호와 확정 총액을 받은 경우에만 구성된 결과를 반환한다. 이를 검사하지 않으면 판매가 변경 후 현재 가격 2,400원으로 승인 요청하는 잘못된 구현도 무조건 </a:t>
+            </a:r>
+            <a:r>
+              <a:rPr sz="1000" b="0">
+                <a:solidFill>
+                  <a:srgbClr val="000000"/>
+                </a:solidFill>
+                <a:latin typeface="맑은 고딕"/>
+                <a:ea typeface="맑은 고딕"/>
+              </a:rPr>
+              <a:t>APPROVED</a:t>
+            </a:r>
+            <a:r>
+              <a:rPr sz="1000" b="0">
+                <a:solidFill>
+                  <a:srgbClr val="000000"/>
+                </a:solidFill>
+                <a:latin typeface="맑은 고딕"/>
+                <a:ea typeface="맑은 고딕"/>
+              </a:rPr>
+              <a:t>를 반환하는 느슨한 대역에서는 통과할 수 있다.</a:t>
+            </a:r>
+          </a:p>
+          <a:p>
+            <a:pPr marL="322580" indent="-139700">
               <a:spcBef>
                 <a:spcPts val="300"/>
               </a:spcBef>
               <a:spcAft>
                 <a:spcPts val="300"/>
               </a:spcAft>
-              <a:buSzPct val="90000"/>
-              <a:buFont typeface="Wingdings" pitchFamily="2" charset="2"/>
-              <a:buChar char=""/>
+              <a:buNone/>
             </a:pPr>
             <a:r>
-              <a:rPr sz="1000" b="0">
-                <a:solidFill>
-                  <a:srgbClr val="000000"/>
-                </a:solidFill>
-                <a:latin typeface="맑은 고딕"/>
-                <a:ea typeface="맑은 고딕"/>
-              </a:rPr>
-              <a:t>사전조건: 항목이 1개 이상이고 수량은 1 이상이며, 단가와 계산 총액은 0 이상이고 배송지가 존재한다.</a:t>
-            </a:r>
-          </a:p>
-          <a:p>
-            <a:pPr lvl="3" marL="731520" indent="-137160">
-              <a:spcBef>
-                <a:spcPts val="300"/>
-              </a:spcBef>
-              <a:spcAft>
-                <a:spcPts val="300"/>
-              </a:spcAft>
-              <a:buSzPct val="90000"/>
-              <a:buFont typeface="Wingdings" pitchFamily="2" charset="2"/>
-              <a:buChar char=""/>
-            </a:pPr>
-            <a:r>
-              <a:rPr sz="1000" b="0">
-                <a:solidFill>
-                  <a:srgbClr val="000000"/>
-                </a:solidFill>
-                <a:latin typeface="맑은 고딕"/>
-                <a:ea typeface="맑은 고딕"/>
-              </a:rPr>
-              <a:t>사후조건: 불변식을 만족하는 </a:t>
-            </a:r>
-            <a:r>
-              <a:rPr sz="1000" b="0">
-                <a:solidFill>
-                  <a:srgbClr val="000000"/>
-                </a:solidFill>
-                <a:latin typeface="맑은 고딕"/>
-                <a:ea typeface="맑은 고딕"/>
-              </a:rPr>
-              <a:t>PENDING_PAYMENT</a:t>
-            </a:r>
-            <a:r>
-              <a:rPr sz="1000" b="0">
-                <a:solidFill>
-                  <a:srgbClr val="000000"/>
-                </a:solidFill>
-                <a:latin typeface="맑은 고딕"/>
-                <a:ea typeface="맑은 고딕"/>
-              </a:rPr>
-              <a:t> 주문을 만든다.</a:t>
-            </a:r>
-          </a:p>
-          <a:p>
-            <a:pPr lvl="2" marL="411480" indent="-137160">
+              <a:rPr sz="1000" b="1">
+                <a:solidFill>
+                  <a:srgbClr val="000000"/>
+                </a:solidFill>
+                <a:latin typeface="맑은 고딕"/>
+                <a:ea typeface="맑은 고딕"/>
+              </a:rPr>
+              <a:t>5. 작업 단위와 완료 조건</a:t>
+            </a:r>
+          </a:p>
+          <a:p>
+            <a:pPr lvl="2" marL="551180" indent="-139700">
               <a:spcBef>
                 <a:spcPts val="300"/>
               </a:spcBef>
@@ -35344,93 +35566,7 @@
                 <a:latin typeface="맑은 고딕"/>
                 <a:ea typeface="맑은 고딕"/>
               </a:rPr>
-              <a:t>Order.approvePayment</a:t>
-            </a:r>
-          </a:p>
-          <a:p>
-            <a:pPr lvl="3" marL="731520" indent="-137160">
-              <a:spcBef>
-                <a:spcPts val="300"/>
-              </a:spcBef>
-              <a:spcAft>
-                <a:spcPts val="300"/>
-              </a:spcAft>
-              <a:buSzPct val="90000"/>
-              <a:buFont typeface="Wingdings" pitchFamily="2" charset="2"/>
-              <a:buChar char=""/>
-            </a:pPr>
-            <a:r>
-              <a:rPr sz="1000" b="0">
-                <a:solidFill>
-                  <a:srgbClr val="000000"/>
-                </a:solidFill>
-                <a:latin typeface="맑은 고딕"/>
-                <a:ea typeface="맑은 고딕"/>
-              </a:rPr>
-              <a:t>사전조건: 현재 상태가 </a:t>
-            </a:r>
-            <a:r>
-              <a:rPr sz="1000" b="0">
-                <a:solidFill>
-                  <a:srgbClr val="000000"/>
-                </a:solidFill>
-                <a:latin typeface="맑은 고딕"/>
-                <a:ea typeface="맑은 고딕"/>
-              </a:rPr>
-              <a:t>PENDING_PAYMENT</a:t>
-            </a:r>
-            <a:r>
-              <a:rPr sz="1000" b="0">
-                <a:solidFill>
-                  <a:srgbClr val="000000"/>
-                </a:solidFill>
-                <a:latin typeface="맑은 고딕"/>
-                <a:ea typeface="맑은 고딕"/>
-              </a:rPr>
-              <a:t>다.</a:t>
-            </a:r>
-          </a:p>
-          <a:p>
-            <a:pPr lvl="3" marL="731520" indent="-137160">
-              <a:spcBef>
-                <a:spcPts val="300"/>
-              </a:spcBef>
-              <a:spcAft>
-                <a:spcPts val="300"/>
-              </a:spcAft>
-              <a:buSzPct val="90000"/>
-              <a:buFont typeface="Wingdings" pitchFamily="2" charset="2"/>
-              <a:buChar char=""/>
-            </a:pPr>
-            <a:r>
-              <a:rPr sz="1000" b="0">
-                <a:solidFill>
-                  <a:srgbClr val="000000"/>
-                </a:solidFill>
-                <a:latin typeface="맑은 고딕"/>
-                <a:ea typeface="맑은 고딕"/>
-              </a:rPr>
-              <a:t>사후조건: 상태가 </a:t>
-            </a:r>
-            <a:r>
-              <a:rPr sz="1000" b="0">
-                <a:solidFill>
-                  <a:srgbClr val="000000"/>
-                </a:solidFill>
-                <a:latin typeface="맑은 고딕"/>
-                <a:ea typeface="맑은 고딕"/>
-              </a:rPr>
-              <a:t>PAID</a:t>
-            </a:r>
-            <a:r>
-              <a:rPr sz="1000" b="0">
-                <a:solidFill>
-                  <a:srgbClr val="000000"/>
-                </a:solidFill>
-                <a:latin typeface="맑은 고딕"/>
-                <a:ea typeface="맑은 고딕"/>
-              </a:rPr>
-              <a:t>가 되며 항목, 단가, 총액, 배송지는 변하지 않는다.</a:t>
+              <a:t>1. 고객이 배송지를 지정해 주문을 만든다</a:t>
             </a:r>
           </a:p>
         </p:txBody>
@@ -35663,113 +35799,6 @@
           </a:bodyPr>
           <a:lstStyle/>
           <a:p>
-            <a:pPr lvl="2" marL="411480" indent="-137160">
-              <a:spcBef>
-                <a:spcPts val="300"/>
-              </a:spcBef>
-              <a:spcAft>
-                <a:spcPts val="300"/>
-              </a:spcAft>
-              <a:buSzPct val="90000"/>
-              <a:buFont typeface="Wingdings" pitchFamily="2" charset="2"/>
-              <a:buChar char=""/>
-            </a:pPr>
-            <a:r>
-              <a:rPr sz="1000" b="0">
-                <a:solidFill>
-                  <a:srgbClr val="000000"/>
-                </a:solidFill>
-                <a:latin typeface="맑은 고딕"/>
-                <a:ea typeface="맑은 고딕"/>
-              </a:rPr>
-              <a:t>테스트 대역은 포트 호출의 업무 계약도 검사한다. 예를 들어 </a:t>
-            </a:r>
-            <a:r>
-              <a:rPr sz="1000" b="0">
-                <a:solidFill>
-                  <a:srgbClr val="000000"/>
-                </a:solidFill>
-                <a:latin typeface="맑은 고딕"/>
-                <a:ea typeface="맑은 고딕"/>
-              </a:rPr>
-              <a:t>PaymentGateway</a:t>
-            </a:r>
-            <a:r>
-              <a:rPr sz="1000" b="0">
-                <a:solidFill>
-                  <a:srgbClr val="000000"/>
-                </a:solidFill>
-                <a:latin typeface="맑은 고딕"/>
-                <a:ea typeface="맑은 고딕"/>
-              </a:rPr>
-              <a:t> 대역은 기대 주문 번호와 확정 총액을 받은 경우에만 구성된 결과를 반환한다. 이를 검사하지 않으면 판매가 변경 후 현재 가격 2,400원으로 승인 요청하는 잘못된 구현도 무조건 </a:t>
-            </a:r>
-            <a:r>
-              <a:rPr sz="1000" b="0">
-                <a:solidFill>
-                  <a:srgbClr val="000000"/>
-                </a:solidFill>
-                <a:latin typeface="맑은 고딕"/>
-                <a:ea typeface="맑은 고딕"/>
-              </a:rPr>
-              <a:t>APPROVED</a:t>
-            </a:r>
-            <a:r>
-              <a:rPr sz="1000" b="0">
-                <a:solidFill>
-                  <a:srgbClr val="000000"/>
-                </a:solidFill>
-                <a:latin typeface="맑은 고딕"/>
-                <a:ea typeface="맑은 고딕"/>
-              </a:rPr>
-              <a:t>를 반환하는 느슨한 대역에서는 통과할 수 있다.</a:t>
-            </a:r>
-          </a:p>
-          <a:p>
-            <a:pPr marL="322580" indent="-139700">
-              <a:spcBef>
-                <a:spcPts val="300"/>
-              </a:spcBef>
-              <a:spcAft>
-                <a:spcPts val="300"/>
-              </a:spcAft>
-              <a:buNone/>
-            </a:pPr>
-            <a:r>
-              <a:rPr sz="1000" b="1">
-                <a:solidFill>
-                  <a:srgbClr val="000000"/>
-                </a:solidFill>
-                <a:latin typeface="맑은 고딕"/>
-                <a:ea typeface="맑은 고딕"/>
-              </a:rPr>
-              <a:t>5. 작업 단위와 완료 조건</a:t>
-            </a:r>
-          </a:p>
-          <a:p>
-            <a:pPr lvl="2" marL="551180" indent="-139700">
-              <a:spcBef>
-                <a:spcPts val="300"/>
-              </a:spcBef>
-              <a:spcAft>
-                <a:spcPts val="300"/>
-              </a:spcAft>
-              <a:buSzPct val="90000"/>
-              <a:buFont typeface="Wingdings" pitchFamily="2" charset="2"/>
-              <a:buChar char=""/>
-            </a:pPr>
-            <a:r>
-              <a:rPr sz="1000" b="1">
-                <a:solidFill>
-                  <a:srgbClr val="000000"/>
-                </a:solidFill>
-                <a:latin typeface="맑은 고딕"/>
-                <a:ea typeface="맑은 고딕"/>
-              </a:rPr>
-              <a:t>1. 고객이 배송지를 지정해 주문을 만든다</a:t>
-            </a:r>
-          </a:p>
-          <a:p>
             <a:pPr lvl="3" marL="731520" indent="-137160">
               <a:spcBef>
                 <a:spcPts val="300"/>
@@ -37225,7 +37254,7 @@
         </p:nvGraphicFramePr>
         <p:xfrm>
           <a:off x="811085" y="1999788"/>
-          <a:ext cx="7508240" cy="3873500"/>
+          <a:ext cx="7508240" cy="1440000"/>
         </p:xfrm>
         <a:graphic>
           <a:graphicData uri="http://schemas.openxmlformats.org/drawingml/2006/table">
@@ -39644,7 +39673,7 @@
         </p:nvGraphicFramePr>
         <p:xfrm>
           <a:off x="852996" y="2274108"/>
-          <a:ext cx="7424420" cy="3873500"/>
+          <a:ext cx="7424420" cy="864000"/>
         </p:xfrm>
         <a:graphic>
           <a:graphicData uri="http://schemas.openxmlformats.org/drawingml/2006/table">
@@ -40803,7 +40832,7 @@
         </p:nvGraphicFramePr>
         <p:xfrm>
           <a:off x="412306" y="2112010"/>
-          <a:ext cx="8305800" cy="3873500"/>
+          <a:ext cx="8305800" cy="2016000"/>
         </p:xfrm>
         <a:graphic>
           <a:graphicData uri="http://schemas.openxmlformats.org/drawingml/2006/table">
